--- a/reports/pitch/Parali_Se_Paisa_Greenovators2026.pptx
+++ b/reports/pitch/Parali_Se_Paisa_Greenovators2026.pptx
@@ -1074,7 +1074,7 @@
           <a:lstStyle/>
           <a:p>
             <a:r>
-              <a:t>Only 8 percent of 2025's confirmed field burns had a VIIRS alert anywhere within 500 metres during the burn window, against 34 percent in 2023. Unburned control fields match 4 percent by proximity alone, so the true share is lower still. And at the peak, smoke blinds ordinary optical monitoring too, which our SWIR logic is built to survive.</a:t>
+              <a:t>Only 8 percent of 2025's strict-tier field burn candidates had a VIIRS alert anywhere within 500 metres during the burn window, against 34 percent in 2023. Unburned control fields match 4 percent by proximity alone, so the true share is lower still. And at the peak, smoke blinds ordinary optical monitoring too, which our SWIR logic is built to survive.</a:t>
             </a:r>
           </a:p>
         </p:txBody>
@@ -4558,7 +4558,7 @@
                 </a:solidFill>
                 <a:latin typeface="Segoe UI"/>
               </a:rPr>
-              <a:t>Satellite AI that turns paddy straw into verified farmer income</a:t>
+              <a:t>Satellite AI that helps turn paddy straw into farmer income</a:t>
             </a:r>
           </a:p>
           <a:p>
@@ -4946,7 +4946,7 @@
                 </a:solidFill>
                 <a:latin typeface="Segoe UI"/>
               </a:rPr>
-              <a:t>No-burn certificate with QR verification</a:t>
+              <a:t>Prototype no-burn certificate with QR metadata check</a:t>
             </a:r>
           </a:p>
         </p:txBody>
@@ -6031,7 +6031,7 @@
                 </a:solidFill>
                 <a:latin typeface="Segoe UI"/>
               </a:rPr>
-              <a:t>Fire alerts −79% · burn scars unchanged · 92% of confirmed burns unseen by fire satellites (2025)</a:t>
+              <a:t>Fire alerts −79% · burn scars unchanged · 92% of strict-tier burn candidates unseen by fire satellites (2025)</a:t>
             </a:r>
           </a:p>
           <a:p>
@@ -7625,7 +7625,7 @@
                 </a:solidFill>
                 <a:latin typeface="Segoe UI"/>
               </a:rPr>
-              <a:t>Sentinel-2 at a harmonised 5-day revisit. Strict = char-confirmed tier; loose = all burn candidates. 2024 burn area is a lower bound (smog gap, 3–21 Nov).</a:t>
+              <a:t>Sentinel-2 at a harmonised 5-day revisit. Strict = char-like signature tier; loose = all burn candidates; both are unverified rule candidates. 2024 burn area is a lower bound (smog gap, 3–21 Nov).</a:t>
             </a:r>
           </a:p>
         </p:txBody>
@@ -7761,7 +7761,7 @@
                 </a:solidFill>
                 <a:latin typeface="Segoe UI"/>
               </a:rPr>
-              <a:t>char-confirmed burn area (index 101)</a:t>
+              <a:t>strict-tier burn-scar candidate area (index 101)</a:t>
             </a:r>
           </a:p>
           <a:p>
@@ -7915,7 +7915,7 @@
                 </a:solidFill>
                 <a:latin typeface="Segoe UI"/>
               </a:rPr>
-              <a:t>9 in 10 confirmed burns in 2025 raised no fire alert</a:t>
+              <a:t>9 in 10 strict-tier burn candidates in 2025 raised no fire alert</a:t>
             </a:r>
           </a:p>
         </p:txBody>
@@ -8089,7 +8089,7 @@
                 </a:solidFill>
                 <a:latin typeface="Segoe UI"/>
               </a:rPr>
-              <a:t>confirmed burns with any VIIRS alert (control 4%)</a:t>
+              <a:t>strict-tier burn candidates with any VIIRS alert (control 4%)</a:t>
             </a:r>
           </a:p>
           <a:p>

--- a/reports/pitch/Parali_Se_Paisa_Greenovators2026.pptx
+++ b/reports/pitch/Parali_Se_Paisa_Greenovators2026.pptx
@@ -14,10 +14,6 @@
     <p:sldId id="262" r:id="rId14"/>
     <p:sldId id="263" r:id="rId15"/>
     <p:sldId id="264" r:id="rId16"/>
-    <p:sldId id="265" r:id="rId17"/>
-    <p:sldId id="266" r:id="rId18"/>
-    <p:sldId id="267" r:id="rId19"/>
-    <p:sldId id="268" r:id="rId20"/>
   </p:sldIdLst>
   <p:sldSz cx="12191695" cy="6858000" type="screen4x3"/>
   <p:notesSz cx="6858000" cy="9144000"/>
@@ -514,287 +510,7 @@
           <a:lstStyle/>
           <a:p>
             <a:r>
-              <a:t>Open with the paradox: the official fire count says the problem is nearly solved, but the burn scars say otherwise. We use free satellite data to see every field, find the burns that fire satellites now miss, and send balers to the fields most likely to burn, so farmers earn from straw instead of burning it.</a:t>
-            </a:r>
-          </a:p>
-        </p:txBody>
-      </p:sp>
-      <p:sp>
-        <p:nvSpPr>
-          <p:cNvPr id="4" name="Slide Number Placeholder 3"/>
-          <p:cNvSpPr>
-            <a:spLocks noGrp="1"/>
-          </p:cNvSpPr>
-          <p:nvPr>
-            <p:ph type="sldNum" idx="5" sz="quarter"/>
-          </p:nvPr>
-        </p:nvSpPr>
-        <p:spPr/>
-      </p:sp>
-    </p:spTree>
-  </p:cSld>
-  <p:clrMapOvr>
-    <a:masterClrMapping/>
-  </p:clrMapOvr>
-</p:notes>
-</file>
-
-<file path=ppt/notesSlides/notesSlide10.xml><?xml version="1.0" encoding="utf-8"?>
-<p:notes xmlns:a="http://schemas.openxmlformats.org/drawingml/2006/main" xmlns:p="http://schemas.openxmlformats.org/presentationml/2006/main" xmlns:r="http://schemas.openxmlformats.org/officeDocument/2006/relationships">
-  <p:cSld>
-    <p:spTree>
-      <p:nvGrpSpPr>
-        <p:cNvPr id="1" name=""/>
-        <p:cNvGrpSpPr/>
-        <p:nvPr/>
-      </p:nvGrpSpPr>
-      <p:grpSpPr>
-        <a:xfrm>
-          <a:off x="0" y="0"/>
-          <a:ext cx="0" cy="0"/>
-          <a:chOff x="0" y="0"/>
-          <a:chExt cx="0" cy="0"/>
-        </a:xfrm>
-      </p:grpSpPr>
-      <p:sp>
-        <p:nvSpPr>
-          <p:cNvPr id="2" name="Slide Image Placeholder 1"/>
-          <p:cNvSpPr>
-            <a:spLocks noGrp="1"/>
-          </p:cNvSpPr>
-          <p:nvPr>
-            <p:ph type="sldImg" idx="2"/>
-          </p:nvPr>
-        </p:nvSpPr>
-        <p:spPr/>
-      </p:sp>
-      <p:sp>
-        <p:nvSpPr>
-          <p:cNvPr id="3" name="Notes Placeholder 2"/>
-          <p:cNvSpPr>
-            <a:spLocks noGrp="1"/>
-          </p:cNvSpPr>
-          <p:nvPr>
-            <p:ph type="body" idx="3" sz="quarter"/>
-          </p:nvPr>
-        </p:nvSpPr>
-        <p:spPr/>
-        <p:txBody>
-          <a:bodyPr/>
-          <a:lstStyle/>
-          <a:p>
-            <a:r>
-              <a:t>Everything is in a working app. Officials see the research evidence and the live map, operators get dispatch plans, buyers get traceable supply, and farmers get updates in Punjabi and Hindi and a no-burn certificate. Field-level burn data is restricted and never used to fine anyone.</a:t>
-            </a:r>
-          </a:p>
-        </p:txBody>
-      </p:sp>
-      <p:sp>
-        <p:nvSpPr>
-          <p:cNvPr id="4" name="Slide Number Placeholder 3"/>
-          <p:cNvSpPr>
-            <a:spLocks noGrp="1"/>
-          </p:cNvSpPr>
-          <p:nvPr>
-            <p:ph type="sldNum" idx="5" sz="quarter"/>
-          </p:nvPr>
-        </p:nvSpPr>
-        <p:spPr/>
-      </p:sp>
-    </p:spTree>
-  </p:cSld>
-  <p:clrMapOvr>
-    <a:masterClrMapping/>
-  </p:clrMapOvr>
-</p:notes>
-</file>
-
-<file path=ppt/notesSlides/notesSlide11.xml><?xml version="1.0" encoding="utf-8"?>
-<p:notes xmlns:a="http://schemas.openxmlformats.org/drawingml/2006/main" xmlns:p="http://schemas.openxmlformats.org/presentationml/2006/main" xmlns:r="http://schemas.openxmlformats.org/officeDocument/2006/relationships">
-  <p:cSld>
-    <p:spTree>
-      <p:nvGrpSpPr>
-        <p:cNvPr id="1" name=""/>
-        <p:cNvGrpSpPr/>
-        <p:nvPr/>
-      </p:nvGrpSpPr>
-      <p:grpSpPr>
-        <a:xfrm>
-          <a:off x="0" y="0"/>
-          <a:ext cx="0" cy="0"/>
-          <a:chOff x="0" y="0"/>
-          <a:chExt cx="0" cy="0"/>
-        </a:xfrm>
-      </p:grpSpPr>
-      <p:sp>
-        <p:nvSpPr>
-          <p:cNvPr id="2" name="Slide Image Placeholder 1"/>
-          <p:cNvSpPr>
-            <a:spLocks noGrp="1"/>
-          </p:cNvSpPr>
-          <p:nvPr>
-            <p:ph type="sldImg" idx="2"/>
-          </p:nvPr>
-        </p:nvSpPr>
-        <p:spPr/>
-      </p:sp>
-      <p:sp>
-        <p:nvSpPr>
-          <p:cNvPr id="3" name="Notes Placeholder 2"/>
-          <p:cNvSpPr>
-            <a:spLocks noGrp="1"/>
-          </p:cNvSpPr>
-          <p:nvPr>
-            <p:ph type="body" idx="3" sz="quarter"/>
-          </p:nvPr>
-        </p:nvSpPr>
-        <p:spPr/>
-        <p:txBody>
-          <a:bodyPr/>
-          <a:lstStyle/>
-          <a:p>
-            <a:r>
-              <a:t>The district's straw is worth almost two hundred crore rupees at today's biomass price. Each thousand hectares that is not burned avoids about 740 tonnes of CO2-equivalent and 34 tonnes of PM2.5. The whole system uses free satellite data and a laptop, so extending to all of Punjab and Haryana is a configuration change, not a hardware rollout.</a:t>
-            </a:r>
-          </a:p>
-        </p:txBody>
-      </p:sp>
-      <p:sp>
-        <p:nvSpPr>
-          <p:cNvPr id="4" name="Slide Number Placeholder 3"/>
-          <p:cNvSpPr>
-            <a:spLocks noGrp="1"/>
-          </p:cNvSpPr>
-          <p:nvPr>
-            <p:ph type="sldNum" idx="5" sz="quarter"/>
-          </p:nvPr>
-        </p:nvSpPr>
-        <p:spPr/>
-      </p:sp>
-    </p:spTree>
-  </p:cSld>
-  <p:clrMapOvr>
-    <a:masterClrMapping/>
-  </p:clrMapOvr>
-</p:notes>
-</file>
-
-<file path=ppt/notesSlides/notesSlide12.xml><?xml version="1.0" encoding="utf-8"?>
-<p:notes xmlns:a="http://schemas.openxmlformats.org/drawingml/2006/main" xmlns:p="http://schemas.openxmlformats.org/presentationml/2006/main" xmlns:r="http://schemas.openxmlformats.org/officeDocument/2006/relationships">
-  <p:cSld>
-    <p:spTree>
-      <p:nvGrpSpPr>
-        <p:cNvPr id="1" name=""/>
-        <p:cNvGrpSpPr/>
-        <p:nvPr/>
-      </p:nvGrpSpPr>
-      <p:grpSpPr>
-        <a:xfrm>
-          <a:off x="0" y="0"/>
-          <a:ext cx="0" cy="0"/>
-          <a:chOff x="0" y="0"/>
-          <a:chExt cx="0" cy="0"/>
-        </a:xfrm>
-      </p:grpSpPr>
-      <p:sp>
-        <p:nvSpPr>
-          <p:cNvPr id="2" name="Slide Image Placeholder 1"/>
-          <p:cNvSpPr>
-            <a:spLocks noGrp="1"/>
-          </p:cNvSpPr>
-          <p:nvPr>
-            <p:ph type="sldImg" idx="2"/>
-          </p:nvPr>
-        </p:nvSpPr>
-        <p:spPr/>
-      </p:sp>
-      <p:sp>
-        <p:nvSpPr>
-          <p:cNvPr id="3" name="Notes Placeholder 2"/>
-          <p:cNvSpPr>
-            <a:spLocks noGrp="1"/>
-          </p:cNvSpPr>
-          <p:nvPr>
-            <p:ph type="body" idx="3" sz="quarter"/>
-          </p:nvPr>
-        </p:nvSpPr>
-        <p:spPr/>
-        <p:txBody>
-          <a:bodyPr/>
-          <a:lstStyle/>
-          <a:p>
-            <a:r>
-              <a:t>We are careful about what the evidence supports. The burn tiers are rule outputs; human labels are being collected. Char can be ploughed in within days, so our counts are lower bounds. Next we add a radar paddy mask, Sentinel-1 for smog gaps, and a one-block field pilot with a baler cooperative to measure real acceptance and tonnage.</a:t>
-            </a:r>
-          </a:p>
-        </p:txBody>
-      </p:sp>
-      <p:sp>
-        <p:nvSpPr>
-          <p:cNvPr id="4" name="Slide Number Placeholder 3"/>
-          <p:cNvSpPr>
-            <a:spLocks noGrp="1"/>
-          </p:cNvSpPr>
-          <p:nvPr>
-            <p:ph type="sldNum" idx="5" sz="quarter"/>
-          </p:nvPr>
-        </p:nvSpPr>
-        <p:spPr/>
-      </p:sp>
-    </p:spTree>
-  </p:cSld>
-  <p:clrMapOvr>
-    <a:masterClrMapping/>
-  </p:clrMapOvr>
-</p:notes>
-</file>
-
-<file path=ppt/notesSlides/notesSlide13.xml><?xml version="1.0" encoding="utf-8"?>
-<p:notes xmlns:a="http://schemas.openxmlformats.org/drawingml/2006/main" xmlns:p="http://schemas.openxmlformats.org/presentationml/2006/main" xmlns:r="http://schemas.openxmlformats.org/officeDocument/2006/relationships">
-  <p:cSld>
-    <p:spTree>
-      <p:nvGrpSpPr>
-        <p:cNvPr id="1" name=""/>
-        <p:cNvGrpSpPr/>
-        <p:nvPr/>
-      </p:nvGrpSpPr>
-      <p:grpSpPr>
-        <a:xfrm>
-          <a:off x="0" y="0"/>
-          <a:ext cx="0" cy="0"/>
-          <a:chOff x="0" y="0"/>
-          <a:chExt cx="0" cy="0"/>
-        </a:xfrm>
-      </p:grpSpPr>
-      <p:sp>
-        <p:nvSpPr>
-          <p:cNvPr id="2" name="Slide Image Placeholder 1"/>
-          <p:cNvSpPr>
-            <a:spLocks noGrp="1"/>
-          </p:cNvSpPr>
-          <p:nvPr>
-            <p:ph type="sldImg" idx="2"/>
-          </p:nvPr>
-        </p:nvSpPr>
-        <p:spPr/>
-      </p:sp>
-      <p:sp>
-        <p:nvSpPr>
-          <p:cNvPr id="3" name="Notes Placeholder 2"/>
-          <p:cNvSpPr>
-            <a:spLocks noGrp="1"/>
-          </p:cNvSpPr>
-          <p:nvPr>
-            <p:ph type="body" idx="3" sz="quarter"/>
-          </p:nvPr>
-        </p:nvSpPr>
-        <p:spPr/>
-        <p:txBody>
-          <a:bodyPr/>
-          <a:lstStyle/>
-          <a:p>
-            <a:r>
-              <a:t>Close by repeating the two numbers: fire alerts fell 79 percent but burn scars did not, and the same balers reach 2.6 times more would-be burns when guided by our risk map. Invite the judges to the live app.</a:t>
+              <a:t>Open with the practical coordination problem: residue has a short handling window; farmers, balers and buyers need a way to coordinate pickup. Our live evidence is satellite observation. The operating workflow is a prototype and uses synthetic records.</a:t>
             </a:r>
           </a:p>
         </p:txBody>
@@ -864,7 +580,7 @@
           <a:lstStyle/>
           <a:p>
             <a:r>
-              <a:t>Punjab will produce about 18.8 million tonnes of paddy straw this season. Fire counts from polar-orbiting satellites have collapsed, which looks like success. But geostationary data show farmers now burn after 3 PM, after the satellites pass. Policy, incentives and enforcement that run on fire counts are steering blind.</a:t>
+              <a:t>Explain the separation. Real mode is a read-only research view. The dispatch, buyer and evidence workflows are a separate synthetic prototype. No live service, verified registry, or incentive decision is claimed.</a:t>
             </a:r>
           </a:p>
         </p:txBody>
@@ -934,7 +650,7 @@
           <a:lstStyle/>
           <a:p>
             <a:r>
-              <a:t>We downloaded every Sentinel-2 image of Muktsar for four seasons, harmonised it, and reduced it to time series for 170 thousand fields. A harvest-aware and smoke-robust detector dates each harvest and each burn. We then match burns with thermal fire alerts, learn who burns, replay the season with balers, and nowcast this week.</a:t>
+              <a:t>Show the district candidate map, then the selected field's dense satellite history. Missing dates are not interpolated. The field is an example, and the burn tiers are rule-based candidates, not independently validated labels.</a:t>
             </a:r>
           </a:p>
         </p:txBody>
@@ -1004,7 +720,7 @@
           <a:lstStyle/>
           <a:p>
             <a:r>
-              <a:t>From 2023 to 2025, VIIRS fire alerts in Muktsar fell from 2,792 to 600. Sentinel-2 burn scars, mapped field by field, stayed flat at 7,883 and 7,930 hectares. Every season was thinned to the same 5-day revisit, so 2025's extra satellite does not create the result.</a:t>
+              <a:t>The loose candidate area is exploratory and is the cross-season series shown. Strict area is precision-first but cannot be read as a year-to-year trend because clean pre-event coverage differs with haze and cloud. FIRMS/VIIRS is corroborative thermal context, not ground truth.</a:t>
             </a:r>
           </a:p>
         </p:txBody>
@@ -1074,7 +790,7 @@
           <a:lstStyle/>
           <a:p>
             <a:r>
-              <a:t>Only 8 percent of 2025's strict-tier field burn candidates had a VIIRS alert anywhere within 500 metres during the burn window, against 34 percent in 2023. Unburned control fields match 4 percent by proximity alone, so the true share is lower still. And at the peak, smoke blinds ordinary optical monitoring too, which our SWIR logic is built to survive.</a:t>
+              <a:t>In 2025, 8.8% of strict optical candidates had a matched VIIRS active-fire detection within the defined matching window. Say: About 9 in 10 strict optical burn candidates had no matched VIIRS active-fire detection within the defined matching window. Do not call this missed fires. Candidates are rule-based and VIIRS is corroborative thermal context.</a:t>
             </a:r>
           </a:p>
         </p:txBody>
@@ -1144,7 +860,7 @@
           <a:lstStyle/>
           <a:p>
             <a:r>
-              <a:t>Our detector separates harvest from fire. A naive pre/post dNBR, as often used, flags almost every field because harvest alone moves NBR. We validate against independent thermal alerts, with controls, and we built a blind stratified labelling tool so precision is measured by humans, not assumed.</a:t>
+              <a:t>Attribute the 12.1 lakh tonne figure directly to The Tribune. It is a reported estimate and should not be represented as an official district statistic or as a measured result of our system.</a:t>
             </a:r>
           </a:p>
         </p:txBody>
@@ -1214,7 +930,7 @@
           <a:lstStyle/>
           <a:p>
             <a:r>
-              <a:t>Burns cluster in space and repeat in time: a field that burned last year was 2.6 times as likely to burn again. After harvest the median wait before fire was 15 days. That is the window a satellite-triggered dispatch can use.</a:t>
+              <a:t>Clearly label every object in this segment DEMO/SYNTHETIC. Routing is a straight-line geodesic proxy and does not provide road travel time. Baler and buyer records are fixtures, not verified registries.</a:t>
             </a:r>
           </a:p>
         </p:txBody>
@@ -1284,7 +1000,7 @@
           <a:lstStyle/>
           <a:p>
             <a:r>
-              <a:t>We replayed the real 2025 season. With 100 balers, first-come-first-served would have reached 4.3 percent of the fields that burned; ranking by burn history reaches 11.4 percent. That is 2,498 hectares of burning avoided, about 1,859 tonnes CO2-equivalent and 85 tonnes of PM2.5. The oracle line shows the value of better prediction.</a:t>
+              <a:t>We have not completed independent human labels. Strict and loose tiers are rule outputs. Risk is a normalized score, not a probability. Optical and thermal layers have different coverage limits. This is research decision support, not enforcement evidence.</a:t>
             </a:r>
           </a:p>
         </p:txBody>
@@ -1354,7 +1070,7 @@
           <a:lstStyle/>
           <a:p>
             <a:r>
-              <a:t>As of 2026-10-03, only 0.7 percent of the district is harvested, a normal pace. Based on three seasons of curves, the harvest wave peaks in the last two weeks of October. Our pre-season list tells operators where to book balers first.</a:t>
+              <a:t>Close by inviting the judges to inspect a real Muktsar field history, then show the separate synthetic dispatch and prototype QR metadata check. The next step is a bounded pilot with independent labels and real operator/buyer participation.</a:t>
             </a:r>
           </a:p>
         </p:txBody>
@@ -4356,7 +4072,7 @@
     <p:bg>
       <p:bgPr>
         <a:solidFill>
-          <a:srgbClr val="FCFCFB"/>
+          <a:srgbClr val="F8F9F5"/>
         </a:solidFill>
         <a:effectLst/>
       </p:bgPr>
@@ -4376,8 +4092,8 @@
         </p:nvSpPr>
         <p:spPr>
           <a:xfrm>
-            <a:off x="548640" y="566928"/>
-            <a:ext cx="11155680" cy="914400"/>
+            <a:off x="502920" y="256032"/>
+            <a:ext cx="10972800" cy="256032"/>
           </a:xfrm>
           <a:prstGeom prst="rect">
             <a:avLst/>
@@ -4392,17 +4108,17 @@
           <a:p>
             <a:pPr algn="l">
               <a:spcAft>
-                <a:spcPts val="600"/>
+                <a:spcPts val="500"/>
               </a:spcAft>
             </a:pPr>
             <a:r>
-              <a:rPr sz="2800" b="1">
-                <a:solidFill>
-                  <a:srgbClr val="0B0B0B"/>
-                </a:solidFill>
-                <a:latin typeface="Segoe UI"/>
-              </a:rPr>
-              <a:t/>
+              <a:rPr sz="1100" b="1">
+                <a:solidFill>
+                  <a:srgbClr val="1F6543"/>
+                </a:solidFill>
+                <a:latin typeface="Aptos"/>
+              </a:rPr>
+              <a:t>PROBLEM</a:t>
             </a:r>
           </a:p>
         </p:txBody>
@@ -4415,8 +4131,8 @@
         </p:nvSpPr>
         <p:spPr>
           <a:xfrm>
-            <a:off x="11155680" y="6400800"/>
-            <a:ext cx="640080" cy="365760"/>
+            <a:off x="502920" y="566928"/>
+            <a:ext cx="11064240" cy="685800"/>
           </a:xfrm>
           <a:prstGeom prst="rect">
             <a:avLst/>
@@ -4429,19 +4145,19 @@
           </a:bodyPr>
           <a:lstStyle/>
           <a:p>
-            <a:pPr algn="r">
+            <a:pPr algn="l">
               <a:spcAft>
-                <a:spcPts val="600"/>
+                <a:spcPts val="500"/>
               </a:spcAft>
             </a:pPr>
             <a:r>
-              <a:rPr sz="900" b="0">
-                <a:solidFill>
-                  <a:srgbClr val="898781"/>
-                </a:solidFill>
-                <a:latin typeface="Segoe UI"/>
-              </a:rPr>
-              <a:t>1</a:t>
+              <a:rPr sz="2700" b="1">
+                <a:solidFill>
+                  <a:srgbClr val="1B2821"/>
+                </a:solidFill>
+                <a:latin typeface="Aptos"/>
+              </a:rPr>
+              <a:t>After harvest, straw needs a buyer and a baler</a:t>
             </a:r>
           </a:p>
         </p:txBody>
@@ -4454,8 +4170,8 @@
         </p:nvSpPr>
         <p:spPr>
           <a:xfrm>
-            <a:off x="548640" y="502920"/>
-            <a:ext cx="6766560" cy="914400"/>
+            <a:off x="502920" y="6419088"/>
+            <a:ext cx="10698480" cy="256032"/>
           </a:xfrm>
           <a:prstGeom prst="rect">
             <a:avLst/>
@@ -4470,17 +4186,17 @@
           <a:p>
             <a:pPr algn="l">
               <a:spcAft>
-                <a:spcPts val="600"/>
+                <a:spcPts val="500"/>
               </a:spcAft>
             </a:pPr>
             <a:r>
-              <a:rPr sz="4400" b="1">
-                <a:solidFill>
-                  <a:srgbClr val="1D3D2B"/>
-                </a:solidFill>
-                <a:latin typeface="Segoe UI"/>
-              </a:rPr>
-              <a:t>Parali Se Paisa</a:t>
+              <a:rPr sz="800" b="0">
+                <a:solidFill>
+                  <a:srgbClr val="5B695F"/>
+                </a:solidFill>
+                <a:latin typeface="Aptos"/>
+              </a:rPr>
+              <a:t>Source: Parali Se Paisa concept note; operational workflow shown later is a synthetic prototype.</a:t>
             </a:r>
           </a:p>
         </p:txBody>
@@ -4493,8 +4209,8 @@
         </p:nvSpPr>
         <p:spPr>
           <a:xfrm>
-            <a:off x="548640" y="1508760"/>
-            <a:ext cx="6583680" cy="1463040"/>
+            <a:off x="11109960" y="6419088"/>
+            <a:ext cx="548640" cy="256032"/>
           </a:xfrm>
           <a:prstGeom prst="rect">
             <a:avLst/>
@@ -4507,19 +4223,19 @@
           </a:bodyPr>
           <a:lstStyle/>
           <a:p>
-            <a:pPr algn="l">
+            <a:pPr algn="r">
               <a:spcAft>
-                <a:spcPts val="600"/>
+                <a:spcPts val="500"/>
               </a:spcAft>
             </a:pPr>
             <a:r>
-              <a:rPr sz="2400" b="0">
-                <a:solidFill>
-                  <a:srgbClr val="52514E"/>
-                </a:solidFill>
-                <a:latin typeface="Segoe UI"/>
-              </a:rPr>
-              <a:t>The burns the fire satellites stopped seeing, and the balers that can reach them first</a:t>
+              <a:rPr sz="800" b="0">
+                <a:solidFill>
+                  <a:srgbClr val="5B695F"/>
+                </a:solidFill>
+                <a:latin typeface="Aptos"/>
+              </a:rPr>
+              <a:t>1</a:t>
             </a:r>
           </a:p>
         </p:txBody>
@@ -4532,8 +4248,8 @@
         </p:nvSpPr>
         <p:spPr>
           <a:xfrm>
-            <a:off x="548640" y="2971800"/>
-            <a:ext cx="6400800" cy="1097280"/>
+            <a:off x="640080" y="1645920"/>
+            <a:ext cx="5577840" cy="1965960"/>
           </a:xfrm>
           <a:prstGeom prst="rect">
             <a:avLst/>
@@ -4548,1561 +4264,221 @@
           <a:p>
             <a:pPr algn="l">
               <a:spcAft>
-                <a:spcPts val="600"/>
+                <a:spcPts val="500"/>
               </a:spcAft>
             </a:pPr>
             <a:r>
-              <a:rPr sz="1500" b="0">
-                <a:solidFill>
-                  <a:srgbClr val="52514E"/>
-                </a:solidFill>
-                <a:latin typeface="Segoe UI"/>
-              </a:rPr>
-              <a:t>Satellite AI that helps turn paddy straw into farmer income</a:t>
-            </a:r>
-          </a:p>
-          <a:p>
-            <a:pPr algn="l">
-              <a:spcAft>
-                <a:spcPts val="600"/>
-              </a:spcAft>
-            </a:pPr>
-            <a:r>
-              <a:rPr sz="1500" b="0">
-                <a:solidFill>
-                  <a:srgbClr val="52514E"/>
-                </a:solidFill>
-                <a:latin typeface="Segoe UI"/>
-              </a:rPr>
-              <a:t>Greenovators Hackathon 2026 · Waste to Wealth · Net Zero AI Architecture</a:t>
-            </a:r>
-          </a:p>
-        </p:txBody>
-      </p:sp>
-      <p:sp>
-        <p:nvSpPr>
-          <p:cNvPr id="7" name="TextBox 6"/>
-          <p:cNvSpPr txBox="1"/>
+              <a:rPr sz="2600" b="1">
+                <a:solidFill>
+                  <a:srgbClr val="1B2821"/>
+                </a:solidFill>
+                <a:latin typeface="Aptos"/>
+              </a:rPr>
+              <a:t>A narrow window. Many fields. Scattered machinery and demand.</a:t>
+            </a:r>
+          </a:p>
+        </p:txBody>
+      </p:sp>
+      <p:sp>
+        <p:nvSpPr>
+          <p:cNvPr id="7" name="Rounded Rectangle 6"/>
+          <p:cNvSpPr/>
           <p:nvPr/>
         </p:nvSpPr>
         <p:spPr>
           <a:xfrm>
-            <a:off x="548640" y="4754880"/>
-            <a:ext cx="6400800" cy="1097280"/>
-          </a:xfrm>
-          <a:prstGeom prst="rect">
+            <a:off x="6583680" y="1554480"/>
+            <a:ext cx="2331720" cy="2011680"/>
+          </a:xfrm>
+          <a:prstGeom prst="roundRect">
             <a:avLst/>
           </a:prstGeom>
-          <a:noFill/>
-        </p:spPr>
-        <p:txBody>
-          <a:bodyPr wrap="square">
-            <a:spAutoFit/>
-          </a:bodyPr>
-          <a:lstStyle/>
-          <a:p>
-            <a:pPr algn="l">
-              <a:spcAft>
-                <a:spcPts val="600"/>
-              </a:spcAft>
+          <a:solidFill>
+            <a:srgbClr val="FFFFFF"/>
+          </a:solidFill>
+          <a:ln>
+            <a:solidFill>
+              <a:srgbClr val="E6EFE6"/>
+            </a:solidFill>
+          </a:ln>
+        </p:spPr>
+        <p:style>
+          <a:lnRef idx="1">
+            <a:schemeClr val="accent1"/>
+          </a:lnRef>
+          <a:fillRef idx="3">
+            <a:schemeClr val="accent1"/>
+          </a:fillRef>
+          <a:effectRef idx="2">
+            <a:schemeClr val="accent1"/>
+          </a:effectRef>
+          <a:fontRef idx="minor">
+            <a:schemeClr val="lt1"/>
+          </a:fontRef>
+        </p:style>
+        <p:txBody>
+          <a:bodyPr rtlCol="0" anchor="ctr" wrap="square" lIns="146304" rIns="128016" tIns="109728"/>
+          <a:lstStyle/>
+          <a:p>
+            <a:pPr algn="ctr"/>
+            <a:r>
+              <a:rPr sz="1500" b="1">
+                <a:solidFill>
+                  <a:srgbClr val="1F6543"/>
+                </a:solidFill>
+              </a:rPr>
+              <a:t>Farmers</a:t>
+            </a:r>
+          </a:p>
+          <a:p>
+            <a:pPr>
+              <a:spcBef>
+                <a:spcPts val="800"/>
+              </a:spcBef>
             </a:pPr>
             <a:r>
-              <a:rPr sz="1300" b="0">
-                <a:solidFill>
-                  <a:srgbClr val="898781"/>
-                </a:solidFill>
-                <a:latin typeface="Segoe UI"/>
-              </a:rPr>
-              <a:t>Real data: Sentinel-2, VIIRS, MODIS and ERA5 for Sri Muktsar Sahib, Punjab, 2023–2026</a:t>
-            </a:r>
-          </a:p>
-          <a:p>
-            <a:pPr algn="l">
-              <a:spcAft>
-                <a:spcPts val="600"/>
-              </a:spcAft>
-            </a:pPr>
-            <a:r>
-              <a:rPr sz="1300" b="0">
-                <a:solidFill>
-                  <a:srgbClr val="898781"/>
-                </a:solidFill>
-                <a:latin typeface="Segoe UI"/>
-              </a:rPr>
-              <a:t>165,025 crop fields · 74 satellite scenes · 12.6 million field observations</a:t>
-            </a:r>
-          </a:p>
-        </p:txBody>
-      </p:sp>
-      <p:pic>
-        <p:nvPicPr>
-          <p:cNvPr id="8" name="Picture 7" descr="f8_burn_map_2025.png"/>
-          <p:cNvPicPr>
-            <a:picLocks noChangeAspect="1"/>
-          </p:cNvPicPr>
+              <a:rPr sz="1200">
+                <a:solidFill>
+                  <a:srgbClr val="1B2821"/>
+                </a:solidFill>
+              </a:rPr>
+              <a:t>Need a timely straw pickup option.</a:t>
+            </a:r>
+          </a:p>
+        </p:txBody>
+      </p:sp>
+      <p:sp>
+        <p:nvSpPr>
+          <p:cNvPr id="8" name="Rounded Rectangle 7"/>
+          <p:cNvSpPr/>
           <p:nvPr/>
-        </p:nvPicPr>
-        <p:blipFill>
-          <a:blip r:embed="rId3"/>
-          <a:stretch>
-            <a:fillRect/>
-          </a:stretch>
-        </p:blipFill>
-        <p:spPr>
-          <a:xfrm>
-            <a:off x="7680960" y="228600"/>
-            <a:ext cx="4763386" cy="6400800"/>
-          </a:xfrm>
-          <a:prstGeom prst="rect">
+        </p:nvSpPr>
+        <p:spPr>
+          <a:xfrm>
+            <a:off x="9098280" y="1554480"/>
+            <a:ext cx="2331720" cy="2011680"/>
+          </a:xfrm>
+          <a:prstGeom prst="roundRect">
             <a:avLst/>
           </a:prstGeom>
-        </p:spPr>
-      </p:pic>
-    </p:spTree>
-  </p:cSld>
-  <p:clrMapOvr>
-    <a:masterClrMapping/>
-  </p:clrMapOvr>
-</p:sld>
-</file>
-
-<file path=ppt/slides/slide10.xml><?xml version="1.0" encoding="utf-8"?>
-<p:sld xmlns:a="http://schemas.openxmlformats.org/drawingml/2006/main" xmlns:p="http://schemas.openxmlformats.org/presentationml/2006/main" xmlns:r="http://schemas.openxmlformats.org/officeDocument/2006/relationships">
-  <p:cSld>
-    <p:bg>
-      <p:bgPr>
-        <a:solidFill>
-          <a:srgbClr val="FCFCFB"/>
-        </a:solidFill>
-        <a:effectLst/>
-      </p:bgPr>
-    </p:bg>
-    <p:spTree>
-      <p:nvGrpSpPr>
-        <p:cNvPr id="1" name=""/>
-        <p:cNvGrpSpPr/>
-        <p:nvPr/>
-      </p:nvGrpSpPr>
-      <p:grpSpPr/>
-      <p:sp>
-        <p:nvSpPr>
-          <p:cNvPr id="2" name="TextBox 1"/>
-          <p:cNvSpPr txBox="1"/>
+          <a:solidFill>
+            <a:srgbClr val="FFFFFF"/>
+          </a:solidFill>
+          <a:ln>
+            <a:solidFill>
+              <a:srgbClr val="E6EFE6"/>
+            </a:solidFill>
+          </a:ln>
+        </p:spPr>
+        <p:style>
+          <a:lnRef idx="1">
+            <a:schemeClr val="accent1"/>
+          </a:lnRef>
+          <a:fillRef idx="3">
+            <a:schemeClr val="accent1"/>
+          </a:fillRef>
+          <a:effectRef idx="2">
+            <a:schemeClr val="accent1"/>
+          </a:effectRef>
+          <a:fontRef idx="minor">
+            <a:schemeClr val="lt1"/>
+          </a:fontRef>
+        </p:style>
+        <p:txBody>
+          <a:bodyPr rtlCol="0" anchor="ctr" wrap="square" lIns="146304" rIns="128016" tIns="109728"/>
+          <a:lstStyle/>
+          <a:p>
+            <a:pPr algn="ctr"/>
+            <a:r>
+              <a:rPr sz="1500" b="1">
+                <a:solidFill>
+                  <a:srgbClr val="1F6543"/>
+                </a:solidFill>
+              </a:rPr>
+              <a:t>Operators</a:t>
+            </a:r>
+          </a:p>
+          <a:p>
+            <a:pPr>
+              <a:spcBef>
+                <a:spcPts val="800"/>
+              </a:spcBef>
+            </a:pPr>
+            <a:r>
+              <a:rPr sz="1200">
+                <a:solidFill>
+                  <a:srgbClr val="1B2821"/>
+                </a:solidFill>
+              </a:rPr>
+              <a:t>Need a clear dispatch queue.</a:t>
+            </a:r>
+          </a:p>
+        </p:txBody>
+      </p:sp>
+      <p:sp>
+        <p:nvSpPr>
+          <p:cNvPr id="9" name="Rounded Rectangle 8"/>
+          <p:cNvSpPr/>
           <p:nvPr/>
         </p:nvSpPr>
         <p:spPr>
           <a:xfrm>
-            <a:off x="548640" y="292608"/>
-            <a:ext cx="10972800" cy="365760"/>
-          </a:xfrm>
-          <a:prstGeom prst="rect">
+            <a:off x="6583680" y="3794760"/>
+            <a:ext cx="4846320" cy="1417320"/>
+          </a:xfrm>
+          <a:prstGeom prst="roundRect">
             <a:avLst/>
           </a:prstGeom>
-          <a:noFill/>
-        </p:spPr>
-        <p:txBody>
-          <a:bodyPr wrap="square">
-            <a:spAutoFit/>
-          </a:bodyPr>
-          <a:lstStyle/>
-          <a:p>
-            <a:pPr algn="l">
-              <a:spcAft>
-                <a:spcPts val="600"/>
-              </a:spcAft>
+          <a:solidFill>
+            <a:srgbClr val="FFFFFF"/>
+          </a:solidFill>
+          <a:ln>
+            <a:solidFill>
+              <a:srgbClr val="E6EFE6"/>
+            </a:solidFill>
+          </a:ln>
+        </p:spPr>
+        <p:style>
+          <a:lnRef idx="1">
+            <a:schemeClr val="accent1"/>
+          </a:lnRef>
+          <a:fillRef idx="3">
+            <a:schemeClr val="accent1"/>
+          </a:fillRef>
+          <a:effectRef idx="2">
+            <a:schemeClr val="accent1"/>
+          </a:effectRef>
+          <a:fontRef idx="minor">
+            <a:schemeClr val="lt1"/>
+          </a:fontRef>
+        </p:style>
+        <p:txBody>
+          <a:bodyPr rtlCol="0" anchor="ctr" wrap="square" lIns="146304" rIns="128016" tIns="109728"/>
+          <a:lstStyle/>
+          <a:p>
+            <a:pPr algn="ctr"/>
+            <a:r>
+              <a:rPr sz="1500" b="1">
+                <a:solidFill>
+                  <a:srgbClr val="1F6543"/>
+                </a:solidFill>
+              </a:rPr>
+              <a:t>Buyers</a:t>
+            </a:r>
+          </a:p>
+          <a:p>
+            <a:pPr>
+              <a:spcBef>
+                <a:spcPts val="800"/>
+              </a:spcBef>
             </a:pPr>
             <a:r>
-              <a:rPr sz="1100" b="1">
-                <a:solidFill>
-                  <a:srgbClr val="2F6B4F"/>
-                </a:solidFill>
-                <a:latin typeface="Segoe UI"/>
-              </a:rPr>
-              <a:t>THE PRODUCT</a:t>
-            </a:r>
-          </a:p>
-        </p:txBody>
-      </p:sp>
-      <p:sp>
-        <p:nvSpPr>
-          <p:cNvPr id="3" name="TextBox 2"/>
-          <p:cNvSpPr txBox="1"/>
-          <p:nvPr/>
-        </p:nvSpPr>
-        <p:spPr>
-          <a:xfrm>
-            <a:off x="548640" y="566928"/>
-            <a:ext cx="11155680" cy="914400"/>
-          </a:xfrm>
-          <a:prstGeom prst="rect">
-            <a:avLst/>
-          </a:prstGeom>
-          <a:noFill/>
-        </p:spPr>
-        <p:txBody>
-          <a:bodyPr wrap="square">
-            <a:spAutoFit/>
-          </a:bodyPr>
-          <a:lstStyle/>
-          <a:p>
-            <a:pPr algn="l">
-              <a:spcAft>
-                <a:spcPts val="600"/>
-              </a:spcAft>
-            </a:pPr>
-            <a:r>
-              <a:rPr sz="2800" b="1">
-                <a:solidFill>
-                  <a:srgbClr val="0B0B0B"/>
-                </a:solidFill>
-                <a:latin typeface="Segoe UI"/>
-              </a:rPr>
-              <a:t>One data backbone for officials, balers, buyers and farmers</a:t>
-            </a:r>
-          </a:p>
-        </p:txBody>
-      </p:sp>
-      <p:sp>
-        <p:nvSpPr>
-          <p:cNvPr id="4" name="TextBox 3"/>
-          <p:cNvSpPr txBox="1"/>
-          <p:nvPr/>
-        </p:nvSpPr>
-        <p:spPr>
-          <a:xfrm>
-            <a:off x="548640" y="6400800"/>
-            <a:ext cx="10424160" cy="365760"/>
-          </a:xfrm>
-          <a:prstGeom prst="rect">
-            <a:avLst/>
-          </a:prstGeom>
-          <a:noFill/>
-        </p:spPr>
-        <p:txBody>
-          <a:bodyPr wrap="square">
-            <a:spAutoFit/>
-          </a:bodyPr>
-          <a:lstStyle/>
-          <a:p>
-            <a:pPr algn="l">
-              <a:spcAft>
-                <a:spcPts val="600"/>
-              </a:spcAft>
-            </a:pPr>
-            <a:r>
-              <a:rPr sz="900" b="0">
-                <a:solidFill>
-                  <a:srgbClr val="898781"/>
-                </a:solidFill>
-                <a:latin typeface="Segoe UI"/>
-              </a:rPr>
-              <a:t>FastAPI + React app; 197 backend tests plus new research tests; real-data mode is read-only; field-level burn data restricted to officials.</a:t>
-            </a:r>
-          </a:p>
-        </p:txBody>
-      </p:sp>
-      <p:sp>
-        <p:nvSpPr>
-          <p:cNvPr id="5" name="TextBox 4"/>
-          <p:cNvSpPr txBox="1"/>
-          <p:nvPr/>
-        </p:nvSpPr>
-        <p:spPr>
-          <a:xfrm>
-            <a:off x="11155680" y="6400800"/>
-            <a:ext cx="640080" cy="365760"/>
-          </a:xfrm>
-          <a:prstGeom prst="rect">
-            <a:avLst/>
-          </a:prstGeom>
-          <a:noFill/>
-        </p:spPr>
-        <p:txBody>
-          <a:bodyPr wrap="square">
-            <a:spAutoFit/>
-          </a:bodyPr>
-          <a:lstStyle/>
-          <a:p>
-            <a:pPr algn="r">
-              <a:spcAft>
-                <a:spcPts val="600"/>
-              </a:spcAft>
-            </a:pPr>
-            <a:r>
-              <a:rPr sz="900" b="0">
-                <a:solidFill>
-                  <a:srgbClr val="898781"/>
-                </a:solidFill>
-                <a:latin typeface="Segoe UI"/>
-              </a:rPr>
-              <a:t>10</a:t>
-            </a:r>
-          </a:p>
-        </p:txBody>
-      </p:sp>
-      <p:pic>
-        <p:nvPicPr>
-          <p:cNvPr id="6" name="Picture 5" descr="Research-top-1366.png"/>
-          <p:cNvPicPr>
-            <a:picLocks noChangeAspect="1"/>
-          </p:cNvPicPr>
-          <p:nvPr/>
-        </p:nvPicPr>
-        <p:blipFill>
-          <a:blip r:embed="rId3"/>
-          <a:stretch>
-            <a:fillRect/>
-          </a:stretch>
-        </p:blipFill>
-        <p:spPr>
-          <a:xfrm>
-            <a:off x="548640" y="1371600"/>
-            <a:ext cx="6949440" cy="3907152"/>
-          </a:xfrm>
-          <a:prstGeom prst="rect">
-            <a:avLst/>
-          </a:prstGeom>
-        </p:spPr>
-      </p:pic>
-      <p:pic>
-        <p:nvPicPr>
-          <p:cNvPr id="7" name="Picture 6" descr="_farmer_crop.png"/>
-          <p:cNvPicPr>
-            <a:picLocks noChangeAspect="1"/>
-          </p:cNvPicPr>
-          <p:nvPr/>
-        </p:nvPicPr>
-        <p:blipFill>
-          <a:blip r:embed="rId4"/>
-          <a:stretch>
-            <a:fillRect/>
-          </a:stretch>
-        </p:blipFill>
-        <p:spPr>
-          <a:xfrm>
-            <a:off x="7772400" y="1371600"/>
-            <a:ext cx="2377440" cy="4754880"/>
-          </a:xfrm>
-          <a:prstGeom prst="rect">
-            <a:avLst/>
-          </a:prstGeom>
-        </p:spPr>
-      </p:pic>
-      <p:pic>
-        <p:nvPicPr>
-          <p:cNvPr id="8" name="Picture 7" descr="_cert_crop.png"/>
-          <p:cNvPicPr>
-            <a:picLocks noChangeAspect="1"/>
-          </p:cNvPicPr>
-          <p:nvPr/>
-        </p:nvPicPr>
-        <p:blipFill>
-          <a:blip r:embed="rId5"/>
-          <a:stretch>
-            <a:fillRect/>
-          </a:stretch>
-        </p:blipFill>
-        <p:spPr>
-          <a:xfrm>
-            <a:off x="10241280" y="1371600"/>
-            <a:ext cx="1737360" cy="1089741"/>
-          </a:xfrm>
-          <a:prstGeom prst="rect">
-            <a:avLst/>
-          </a:prstGeom>
-        </p:spPr>
-      </p:pic>
-      <p:sp>
-        <p:nvSpPr>
-          <p:cNvPr id="9" name="TextBox 8"/>
-          <p:cNvSpPr txBox="1"/>
-          <p:nvPr/>
-        </p:nvSpPr>
-        <p:spPr>
-          <a:xfrm>
-            <a:off x="10241280" y="2560320"/>
-            <a:ext cx="1737360" cy="1828800"/>
-          </a:xfrm>
-          <a:prstGeom prst="rect">
-            <a:avLst/>
-          </a:prstGeom>
-          <a:noFill/>
-        </p:spPr>
-        <p:txBody>
-          <a:bodyPr wrap="square">
-            <a:spAutoFit/>
-          </a:bodyPr>
-          <a:lstStyle/>
-          <a:p>
-            <a:pPr algn="l">
-              <a:spcAft>
-                <a:spcPts val="600"/>
-              </a:spcAft>
-            </a:pPr>
-            <a:r>
-              <a:rPr sz="1100" b="0">
-                <a:solidFill>
-                  <a:srgbClr val="52514E"/>
-                </a:solidFill>
-                <a:latin typeface="Segoe UI"/>
-              </a:rPr>
-              <a:t>Prototype no-burn certificate with QR metadata check</a:t>
-            </a:r>
-          </a:p>
-        </p:txBody>
-      </p:sp>
-    </p:spTree>
-  </p:cSld>
-  <p:clrMapOvr>
-    <a:masterClrMapping/>
-  </p:clrMapOvr>
-</p:sld>
-</file>
-
-<file path=ppt/slides/slide11.xml><?xml version="1.0" encoding="utf-8"?>
-<p:sld xmlns:a="http://schemas.openxmlformats.org/drawingml/2006/main" xmlns:p="http://schemas.openxmlformats.org/presentationml/2006/main" xmlns:r="http://schemas.openxmlformats.org/officeDocument/2006/relationships">
-  <p:cSld>
-    <p:bg>
-      <p:bgPr>
-        <a:solidFill>
-          <a:srgbClr val="FCFCFB"/>
-        </a:solidFill>
-        <a:effectLst/>
-      </p:bgPr>
-    </p:bg>
-    <p:spTree>
-      <p:nvGrpSpPr>
-        <p:cNvPr id="1" name=""/>
-        <p:cNvGrpSpPr/>
-        <p:nvPr/>
-      </p:nvGrpSpPr>
-      <p:grpSpPr/>
-      <p:sp>
-        <p:nvSpPr>
-          <p:cNvPr id="2" name="TextBox 1"/>
-          <p:cNvSpPr txBox="1"/>
-          <p:nvPr/>
-        </p:nvSpPr>
-        <p:spPr>
-          <a:xfrm>
-            <a:off x="548640" y="292608"/>
-            <a:ext cx="10972800" cy="365760"/>
-          </a:xfrm>
-          <a:prstGeom prst="rect">
-            <a:avLst/>
-          </a:prstGeom>
-          <a:noFill/>
-        </p:spPr>
-        <p:txBody>
-          <a:bodyPr wrap="square">
-            <a:spAutoFit/>
-          </a:bodyPr>
-          <a:lstStyle/>
-          <a:p>
-            <a:pPr algn="l">
-              <a:spcAft>
-                <a:spcPts val="600"/>
-              </a:spcAft>
-            </a:pPr>
-            <a:r>
-              <a:rPr sz="1100" b="1">
-                <a:solidFill>
-                  <a:srgbClr val="2F6B4F"/>
-                </a:solidFill>
-                <a:latin typeface="Segoe UI"/>
-              </a:rPr>
-              <a:t>IMPACT AND SCALE</a:t>
-            </a:r>
-          </a:p>
-        </p:txBody>
-      </p:sp>
-      <p:sp>
-        <p:nvSpPr>
-          <p:cNvPr id="3" name="TextBox 2"/>
-          <p:cNvSpPr txBox="1"/>
-          <p:nvPr/>
-        </p:nvSpPr>
-        <p:spPr>
-          <a:xfrm>
-            <a:off x="548640" y="566928"/>
-            <a:ext cx="11155680" cy="914400"/>
-          </a:xfrm>
-          <a:prstGeom prst="rect">
-            <a:avLst/>
-          </a:prstGeom>
-          <a:noFill/>
-        </p:spPr>
-        <p:txBody>
-          <a:bodyPr wrap="square">
-            <a:spAutoFit/>
-          </a:bodyPr>
-          <a:lstStyle/>
-          <a:p>
-            <a:pPr algn="l">
-              <a:spcAft>
-                <a:spcPts val="600"/>
-              </a:spcAft>
-            </a:pPr>
-            <a:r>
-              <a:rPr sz="2800" b="1">
-                <a:solidFill>
-                  <a:srgbClr val="0B0B0B"/>
-                </a:solidFill>
-                <a:latin typeface="Segoe UI"/>
-              </a:rPr>
-              <a:t>Waste to wealth at district scale, with no hardware</a:t>
-            </a:r>
-          </a:p>
-        </p:txBody>
-      </p:sp>
-      <p:sp>
-        <p:nvSpPr>
-          <p:cNvPr id="4" name="TextBox 3"/>
-          <p:cNvSpPr txBox="1"/>
-          <p:nvPr/>
-        </p:nvSpPr>
-        <p:spPr>
-          <a:xfrm>
-            <a:off x="548640" y="6400800"/>
-            <a:ext cx="10424160" cy="365760"/>
-          </a:xfrm>
-          <a:prstGeom prst="rect">
-            <a:avLst/>
-          </a:prstGeom>
-          <a:noFill/>
-        </p:spPr>
-        <p:txBody>
-          <a:bodyPr wrap="square">
-            <a:spAutoFit/>
-          </a:bodyPr>
-          <a:lstStyle/>
-          <a:p>
-            <a:pPr algn="l">
-              <a:spcAft>
-                <a:spcPts val="600"/>
-              </a:spcAft>
-            </a:pPr>
-            <a:r>
-              <a:rPr sz="900" b="0">
-                <a:solidFill>
-                  <a:srgbClr val="898781"/>
-                </a:solidFill>
-                <a:latin typeface="Segoe UI"/>
-              </a:rPr>
-              <a:t>Straw price ₹169/quintal (biomass plants, concept note [11]); emission factors Andreae (2019); CO₂e excludes biogenic CO₂.</a:t>
-            </a:r>
-          </a:p>
-        </p:txBody>
-      </p:sp>
-      <p:sp>
-        <p:nvSpPr>
-          <p:cNvPr id="5" name="TextBox 4"/>
-          <p:cNvSpPr txBox="1"/>
-          <p:nvPr/>
-        </p:nvSpPr>
-        <p:spPr>
-          <a:xfrm>
-            <a:off x="11155680" y="6400800"/>
-            <a:ext cx="640080" cy="365760"/>
-          </a:xfrm>
-          <a:prstGeom prst="rect">
-            <a:avLst/>
-          </a:prstGeom>
-          <a:noFill/>
-        </p:spPr>
-        <p:txBody>
-          <a:bodyPr wrap="square">
-            <a:spAutoFit/>
-          </a:bodyPr>
-          <a:lstStyle/>
-          <a:p>
-            <a:pPr algn="r">
-              <a:spcAft>
-                <a:spcPts val="600"/>
-              </a:spcAft>
-            </a:pPr>
-            <a:r>
-              <a:rPr sz="900" b="0">
-                <a:solidFill>
-                  <a:srgbClr val="898781"/>
-                </a:solidFill>
-                <a:latin typeface="Segoe UI"/>
-              </a:rPr>
-              <a:t>11</a:t>
-            </a:r>
-          </a:p>
-        </p:txBody>
-      </p:sp>
-      <p:sp>
-        <p:nvSpPr>
-          <p:cNvPr id="6" name="TextBox 5"/>
-          <p:cNvSpPr txBox="1"/>
-          <p:nvPr/>
-        </p:nvSpPr>
-        <p:spPr>
-          <a:xfrm>
-            <a:off x="548640" y="1645920"/>
-            <a:ext cx="3657600" cy="822960"/>
-          </a:xfrm>
-          <a:prstGeom prst="rect">
-            <a:avLst/>
-          </a:prstGeom>
-          <a:noFill/>
-        </p:spPr>
-        <p:txBody>
-          <a:bodyPr wrap="square">
-            <a:spAutoFit/>
-          </a:bodyPr>
-          <a:lstStyle/>
-          <a:p>
-            <a:pPr algn="l">
-              <a:spcAft>
-                <a:spcPts val="600"/>
-              </a:spcAft>
-            </a:pPr>
-            <a:r>
-              <a:rPr sz="4000" b="1">
-                <a:solidFill>
-                  <a:srgbClr val="1D3D2B"/>
-                </a:solidFill>
-                <a:latin typeface="Segoe UI"/>
-              </a:rPr>
-              <a:t>₹194 cr</a:t>
-            </a:r>
-          </a:p>
-        </p:txBody>
-      </p:sp>
-      <p:sp>
-        <p:nvSpPr>
-          <p:cNvPr id="7" name="TextBox 6"/>
-          <p:cNvSpPr txBox="1"/>
-          <p:nvPr/>
-        </p:nvSpPr>
-        <p:spPr>
-          <a:xfrm>
-            <a:off x="548640" y="2514600"/>
-            <a:ext cx="3657600" cy="914400"/>
-          </a:xfrm>
-          <a:prstGeom prst="rect">
-            <a:avLst/>
-          </a:prstGeom>
-          <a:noFill/>
-        </p:spPr>
-        <p:txBody>
-          <a:bodyPr wrap="square">
-            <a:spAutoFit/>
-          </a:bodyPr>
-          <a:lstStyle/>
-          <a:p>
-            <a:pPr algn="l">
-              <a:spcAft>
-                <a:spcPts val="600"/>
-              </a:spcAft>
-            </a:pPr>
-            <a:r>
-              <a:rPr sz="1300" b="0">
-                <a:solidFill>
-                  <a:srgbClr val="52514E"/>
-                </a:solidFill>
-                <a:latin typeface="Segoe UI"/>
-              </a:rPr>
-              <a:t>value of Muktsar's ≈11.5 lakh t of straw at ₹169/quintal</a:t>
-            </a:r>
-          </a:p>
-        </p:txBody>
-      </p:sp>
-      <p:sp>
-        <p:nvSpPr>
-          <p:cNvPr id="8" name="TextBox 7"/>
-          <p:cNvSpPr txBox="1"/>
-          <p:nvPr/>
-        </p:nvSpPr>
-        <p:spPr>
-          <a:xfrm>
-            <a:off x="4389120" y="1645920"/>
-            <a:ext cx="3657600" cy="822960"/>
-          </a:xfrm>
-          <a:prstGeom prst="rect">
-            <a:avLst/>
-          </a:prstGeom>
-          <a:noFill/>
-        </p:spPr>
-        <p:txBody>
-          <a:bodyPr wrap="square">
-            <a:spAutoFit/>
-          </a:bodyPr>
-          <a:lstStyle/>
-          <a:p>
-            <a:pPr algn="l">
-              <a:spcAft>
-                <a:spcPts val="600"/>
-              </a:spcAft>
-            </a:pPr>
-            <a:r>
-              <a:rPr sz="4000" b="1">
-                <a:solidFill>
-                  <a:srgbClr val="2A78D6"/>
-                </a:solidFill>
-                <a:latin typeface="Segoe UI"/>
-              </a:rPr>
-              <a:t>741 t</a:t>
-            </a:r>
-          </a:p>
-        </p:txBody>
-      </p:sp>
-      <p:sp>
-        <p:nvSpPr>
-          <p:cNvPr id="9" name="TextBox 8"/>
-          <p:cNvSpPr txBox="1"/>
-          <p:nvPr/>
-        </p:nvSpPr>
-        <p:spPr>
-          <a:xfrm>
-            <a:off x="4389120" y="2514600"/>
-            <a:ext cx="3657600" cy="914400"/>
-          </a:xfrm>
-          <a:prstGeom prst="rect">
-            <a:avLst/>
-          </a:prstGeom>
-          <a:noFill/>
-        </p:spPr>
-        <p:txBody>
-          <a:bodyPr wrap="square">
-            <a:spAutoFit/>
-          </a:bodyPr>
-          <a:lstStyle/>
-          <a:p>
-            <a:pPr algn="l">
-              <a:spcAft>
-                <a:spcPts val="600"/>
-              </a:spcAft>
-            </a:pPr>
-            <a:r>
-              <a:rPr sz="1300" b="0">
-                <a:solidFill>
-                  <a:srgbClr val="52514E"/>
-                </a:solidFill>
-                <a:latin typeface="Segoe UI"/>
-              </a:rPr>
-              <a:t>CO₂e (CH₄ + N₂O) avoided per 1,000 ha not burned, plus 34 t PM2.5</a:t>
-            </a:r>
-          </a:p>
-        </p:txBody>
-      </p:sp>
-      <p:sp>
-        <p:nvSpPr>
-          <p:cNvPr id="10" name="TextBox 9"/>
-          <p:cNvSpPr txBox="1"/>
-          <p:nvPr/>
-        </p:nvSpPr>
-        <p:spPr>
-          <a:xfrm>
-            <a:off x="8229600" y="1645920"/>
-            <a:ext cx="3474720" cy="822960"/>
-          </a:xfrm>
-          <a:prstGeom prst="rect">
-            <a:avLst/>
-          </a:prstGeom>
-          <a:noFill/>
-        </p:spPr>
-        <p:txBody>
-          <a:bodyPr wrap="square">
-            <a:spAutoFit/>
-          </a:bodyPr>
-          <a:lstStyle/>
-          <a:p>
-            <a:pPr algn="l">
-              <a:spcAft>
-                <a:spcPts val="600"/>
-              </a:spcAft>
-            </a:pPr>
-            <a:r>
-              <a:rPr sz="4000" b="1">
-                <a:solidFill>
-                  <a:srgbClr val="1D3D2B"/>
-                </a:solidFill>
-                <a:latin typeface="Segoe UI"/>
-              </a:rPr>
-              <a:t>₹0</a:t>
-            </a:r>
-          </a:p>
-        </p:txBody>
-      </p:sp>
-      <p:sp>
-        <p:nvSpPr>
-          <p:cNvPr id="11" name="TextBox 10"/>
-          <p:cNvSpPr txBox="1"/>
-          <p:nvPr/>
-        </p:nvSpPr>
-        <p:spPr>
-          <a:xfrm>
-            <a:off x="8229600" y="2514600"/>
-            <a:ext cx="3474720" cy="914400"/>
-          </a:xfrm>
-          <a:prstGeom prst="rect">
-            <a:avLst/>
-          </a:prstGeom>
-          <a:noFill/>
-        </p:spPr>
-        <p:txBody>
-          <a:bodyPr wrap="square">
-            <a:spAutoFit/>
-          </a:bodyPr>
-          <a:lstStyle/>
-          <a:p>
-            <a:pPr algn="l">
-              <a:spcAft>
-                <a:spcPts val="600"/>
-              </a:spcAft>
-            </a:pPr>
-            <a:r>
-              <a:rPr sz="1300" b="0">
-                <a:solidFill>
-                  <a:srgbClr val="52514E"/>
-                </a:solidFill>
-                <a:latin typeface="Segoe UI"/>
-              </a:rPr>
-              <a:t>hardware: free Sentinel-2 / VIIRS / ERA5 and open-source tools</a:t>
-            </a:r>
-          </a:p>
-        </p:txBody>
-      </p:sp>
-      <p:sp>
-        <p:nvSpPr>
-          <p:cNvPr id="12" name="TextBox 11"/>
-          <p:cNvSpPr txBox="1"/>
-          <p:nvPr/>
-        </p:nvSpPr>
-        <p:spPr>
-          <a:xfrm>
-            <a:off x="548640" y="4023360"/>
-            <a:ext cx="10972800" cy="2286000"/>
-          </a:xfrm>
-          <a:prstGeom prst="rect">
-            <a:avLst/>
-          </a:prstGeom>
-          <a:noFill/>
-        </p:spPr>
-        <p:txBody>
-          <a:bodyPr wrap="square">
-            <a:spAutoFit/>
-          </a:bodyPr>
-          <a:lstStyle/>
-          <a:p>
-            <a:pPr>
-              <a:spcAft>
-                <a:spcPts val="1000"/>
-              </a:spcAft>
-            </a:pPr>
-            <a:r>
-              <a:rPr sz="1400" b="1">
-                <a:solidFill>
-                  <a:srgbClr val="0B0B0B"/>
-                </a:solidFill>
-                <a:latin typeface="Segoe UI"/>
-              </a:rPr>
-              <a:t>Who pays: </a:t>
-            </a:r>
-            <a:r>
-              <a:rPr sz="1400">
-                <a:solidFill>
-                  <a:srgbClr val="52514E"/>
-                </a:solidFill>
-                <a:latin typeface="Segoe UI"/>
-              </a:rPr>
-              <a:t>state CRM schemes for verified no-burn incentives (Haryana pays ₹1,200/acre after inspection); buyers pay per traceable tonne for ESG supply chains</a:t>
-            </a:r>
-          </a:p>
-          <a:p>
-            <a:pPr>
-              <a:spcAft>
-                <a:spcPts val="1000"/>
-              </a:spcAft>
-            </a:pPr>
-            <a:r>
-              <a:rPr sz="1400" b="1">
-                <a:solidFill>
-                  <a:srgbClr val="0B0B0B"/>
-                </a:solidFill>
-                <a:latin typeface="Segoe UI"/>
-              </a:rPr>
-              <a:t>Scale: </a:t>
-            </a:r>
-            <a:r>
-              <a:rPr sz="1400">
-                <a:solidFill>
-                  <a:srgbClr val="52514E"/>
-                </a:solidFill>
-                <a:latin typeface="Segoe UI"/>
-              </a:rPr>
-              <a:t>same code for any district; Punjab has 23 and Haryana 22, using the same satellite tiles and fire archives</a:t>
-            </a:r>
-          </a:p>
-          <a:p>
-            <a:pPr>
-              <a:spcAft>
-                <a:spcPts val="1000"/>
-              </a:spcAft>
-            </a:pPr>
-            <a:r>
-              <a:rPr sz="1400" b="1">
-                <a:solidFill>
-                  <a:srgbClr val="0B0B0B"/>
-                </a:solidFill>
-                <a:latin typeface="Segoe UI"/>
-              </a:rPr>
-              <a:t>SDGs: </a:t>
-            </a:r>
-            <a:r>
-              <a:rPr sz="1400">
-                <a:solidFill>
-                  <a:srgbClr val="52514E"/>
-                </a:solidFill>
-                <a:latin typeface="Segoe UI"/>
-              </a:rPr>
-              <a:t>12 responsible production · 13 climate action · 11 clean air in cities · 9 innovation</a:t>
-            </a:r>
-          </a:p>
-        </p:txBody>
-      </p:sp>
-    </p:spTree>
-  </p:cSld>
-  <p:clrMapOvr>
-    <a:masterClrMapping/>
-  </p:clrMapOvr>
-</p:sld>
-</file>
-
-<file path=ppt/slides/slide12.xml><?xml version="1.0" encoding="utf-8"?>
-<p:sld xmlns:a="http://schemas.openxmlformats.org/drawingml/2006/main" xmlns:p="http://schemas.openxmlformats.org/presentationml/2006/main" xmlns:r="http://schemas.openxmlformats.org/officeDocument/2006/relationships">
-  <p:cSld>
-    <p:bg>
-      <p:bgPr>
-        <a:solidFill>
-          <a:srgbClr val="FCFCFB"/>
-        </a:solidFill>
-        <a:effectLst/>
-      </p:bgPr>
-    </p:bg>
-    <p:spTree>
-      <p:nvGrpSpPr>
-        <p:cNvPr id="1" name=""/>
-        <p:cNvGrpSpPr/>
-        <p:nvPr/>
-      </p:nvGrpSpPr>
-      <p:grpSpPr/>
-      <p:sp>
-        <p:nvSpPr>
-          <p:cNvPr id="2" name="TextBox 1"/>
-          <p:cNvSpPr txBox="1"/>
-          <p:nvPr/>
-        </p:nvSpPr>
-        <p:spPr>
-          <a:xfrm>
-            <a:off x="548640" y="292608"/>
-            <a:ext cx="10972800" cy="365760"/>
-          </a:xfrm>
-          <a:prstGeom prst="rect">
-            <a:avLst/>
-          </a:prstGeom>
-          <a:noFill/>
-        </p:spPr>
-        <p:txBody>
-          <a:bodyPr wrap="square">
-            <a:spAutoFit/>
-          </a:bodyPr>
-          <a:lstStyle/>
-          <a:p>
-            <a:pPr algn="l">
-              <a:spcAft>
-                <a:spcPts val="600"/>
-              </a:spcAft>
-            </a:pPr>
-            <a:r>
-              <a:rPr sz="1100" b="1">
-                <a:solidFill>
-                  <a:srgbClr val="2F6B4F"/>
-                </a:solidFill>
-                <a:latin typeface="Segoe UI"/>
-              </a:rPr>
-              <a:t>HONEST LIMITS</a:t>
-            </a:r>
-          </a:p>
-        </p:txBody>
-      </p:sp>
-      <p:sp>
-        <p:nvSpPr>
-          <p:cNvPr id="3" name="TextBox 2"/>
-          <p:cNvSpPr txBox="1"/>
-          <p:nvPr/>
-        </p:nvSpPr>
-        <p:spPr>
-          <a:xfrm>
-            <a:off x="548640" y="566928"/>
-            <a:ext cx="11155680" cy="914400"/>
-          </a:xfrm>
-          <a:prstGeom prst="rect">
-            <a:avLst/>
-          </a:prstGeom>
-          <a:noFill/>
-        </p:spPr>
-        <p:txBody>
-          <a:bodyPr wrap="square">
-            <a:spAutoFit/>
-          </a:bodyPr>
-          <a:lstStyle/>
-          <a:p>
-            <a:pPr algn="l">
-              <a:spcAft>
-                <a:spcPts val="600"/>
-              </a:spcAft>
-            </a:pPr>
-            <a:r>
-              <a:rPr sz="2800" b="1">
-                <a:solidFill>
-                  <a:srgbClr val="0B0B0B"/>
-                </a:solidFill>
-                <a:latin typeface="Segoe UI"/>
-              </a:rPr>
-              <a:t>What we have not shown yet, and how we will</a:t>
-            </a:r>
-          </a:p>
-        </p:txBody>
-      </p:sp>
-      <p:sp>
-        <p:nvSpPr>
-          <p:cNvPr id="4" name="TextBox 3"/>
-          <p:cNvSpPr txBox="1"/>
-          <p:nvPr/>
-        </p:nvSpPr>
-        <p:spPr>
-          <a:xfrm>
-            <a:off x="548640" y="6400800"/>
-            <a:ext cx="10424160" cy="365760"/>
-          </a:xfrm>
-          <a:prstGeom prst="rect">
-            <a:avLst/>
-          </a:prstGeom>
-          <a:noFill/>
-        </p:spPr>
-        <p:txBody>
-          <a:bodyPr wrap="square">
-            <a:spAutoFit/>
-          </a:bodyPr>
-          <a:lstStyle/>
-          <a:p>
-            <a:pPr algn="l">
-              <a:spcAft>
-                <a:spcPts val="600"/>
-              </a:spcAft>
-            </a:pPr>
-            <a:r>
-              <a:rPr sz="900" b="0">
-                <a:solidFill>
-                  <a:srgbClr val="898781"/>
-                </a:solidFill>
-                <a:latin typeface="Segoe UI"/>
-              </a:rPr>
-              <a:t>Full limitations: docs/RESEARCH_METHODS.md §11.</a:t>
-            </a:r>
-          </a:p>
-        </p:txBody>
-      </p:sp>
-      <p:sp>
-        <p:nvSpPr>
-          <p:cNvPr id="5" name="TextBox 4"/>
-          <p:cNvSpPr txBox="1"/>
-          <p:nvPr/>
-        </p:nvSpPr>
-        <p:spPr>
-          <a:xfrm>
-            <a:off x="11155680" y="6400800"/>
-            <a:ext cx="640080" cy="365760"/>
-          </a:xfrm>
-          <a:prstGeom prst="rect">
-            <a:avLst/>
-          </a:prstGeom>
-          <a:noFill/>
-        </p:spPr>
-        <p:txBody>
-          <a:bodyPr wrap="square">
-            <a:spAutoFit/>
-          </a:bodyPr>
-          <a:lstStyle/>
-          <a:p>
-            <a:pPr algn="r">
-              <a:spcAft>
-                <a:spcPts val="600"/>
-              </a:spcAft>
-            </a:pPr>
-            <a:r>
-              <a:rPr sz="900" b="0">
-                <a:solidFill>
-                  <a:srgbClr val="898781"/>
-                </a:solidFill>
-                <a:latin typeface="Segoe UI"/>
-              </a:rPr>
-              <a:t>12</a:t>
-            </a:r>
-          </a:p>
-        </p:txBody>
-      </p:sp>
-      <p:sp>
-        <p:nvSpPr>
-          <p:cNvPr id="6" name="TextBox 5"/>
-          <p:cNvSpPr txBox="1"/>
-          <p:nvPr/>
-        </p:nvSpPr>
-        <p:spPr>
-          <a:xfrm>
-            <a:off x="548640" y="1554480"/>
-            <a:ext cx="5486400" cy="4572000"/>
-          </a:xfrm>
-          <a:prstGeom prst="rect">
-            <a:avLst/>
-          </a:prstGeom>
-          <a:noFill/>
-        </p:spPr>
-        <p:txBody>
-          <a:bodyPr wrap="square">
-            <a:spAutoFit/>
-          </a:bodyPr>
-          <a:lstStyle/>
-          <a:p>
-            <a:pPr>
-              <a:spcAft>
-                <a:spcPts val="1000"/>
-              </a:spcAft>
-            </a:pPr>
-            <a:r>
-              <a:rPr sz="1400" b="1">
-                <a:solidFill>
-                  <a:srgbClr val="0B0B0B"/>
-                </a:solidFill>
-                <a:latin typeface="Segoe UI"/>
-              </a:rPr>
-              <a:t>Precision: </a:t>
-            </a:r>
-            <a:r>
-              <a:rPr sz="1400">
-                <a:solidFill>
-                  <a:srgbClr val="52514E"/>
-                </a:solidFill>
-                <a:latin typeface="Segoe UI"/>
-              </a:rPr>
-              <a:t>blind stratified labels in progress (AI-assisted check: about 7–8 of 10 strict detections show char)</a:t>
-            </a:r>
-          </a:p>
-          <a:p>
-            <a:pPr>
-              <a:spcAft>
-                <a:spcPts val="1000"/>
-              </a:spcAft>
-            </a:pPr>
-            <a:r>
-              <a:rPr sz="1400" b="1">
-                <a:solidFill>
-                  <a:srgbClr val="0B0B0B"/>
-                </a:solidFill>
-                <a:latin typeface="Segoe UI"/>
-              </a:rPr>
-              <a:t>Lower bounds: </a:t>
-            </a:r>
-            <a:r>
-              <a:rPr sz="1400">
-                <a:solidFill>
-                  <a:srgbClr val="52514E"/>
-                </a:solidFill>
-                <a:latin typeface="Segoe UI"/>
-              </a:rPr>
-              <a:t>small or quickly tilled burns between revisits are missed</a:t>
-            </a:r>
-          </a:p>
-          <a:p>
-            <a:pPr>
-              <a:spcAft>
-                <a:spcPts val="1000"/>
-              </a:spcAft>
-            </a:pPr>
-            <a:r>
-              <a:rPr sz="1400" b="1">
-                <a:solidFill>
-                  <a:srgbClr val="0B0B0B"/>
-                </a:solidFill>
-                <a:latin typeface="Segoe UI"/>
-              </a:rPr>
-              <a:t>Crop type: </a:t>
-            </a:r>
-            <a:r>
-              <a:rPr sz="1400">
-                <a:solidFill>
-                  <a:srgbClr val="52514E"/>
-                </a:solidFill>
-                <a:latin typeface="Segoe UI"/>
-              </a:rPr>
-              <a:t>the cotton-growing south needs a Sentinel-1 paddy mask</a:t>
-            </a:r>
-          </a:p>
-          <a:p>
-            <a:pPr>
-              <a:spcAft>
-                <a:spcPts val="1000"/>
-              </a:spcAft>
-            </a:pPr>
-            <a:r>
-              <a:rPr sz="1400" b="1">
-                <a:solidFill>
-                  <a:srgbClr val="0B0B0B"/>
-                </a:solidFill>
-                <a:latin typeface="Segoe UI"/>
-              </a:rPr>
-              <a:t>Replay assumptions: </a:t>
-            </a:r>
-            <a:r>
-              <a:rPr sz="1400">
-                <a:solidFill>
-                  <a:srgbClr val="52514E"/>
-                </a:solidFill>
-                <a:latin typeface="Segoe UI"/>
-              </a:rPr>
-              <a:t>baling prevents burning; no travel time; no farmer acceptance yet</a:t>
-            </a:r>
-          </a:p>
-        </p:txBody>
-      </p:sp>
-      <p:sp>
-        <p:nvSpPr>
-          <p:cNvPr id="7" name="TextBox 6"/>
-          <p:cNvSpPr txBox="1"/>
-          <p:nvPr/>
-        </p:nvSpPr>
-        <p:spPr>
-          <a:xfrm>
-            <a:off x="6309360" y="1554480"/>
-            <a:ext cx="5486400" cy="4572000"/>
-          </a:xfrm>
-          <a:prstGeom prst="rect">
-            <a:avLst/>
-          </a:prstGeom>
-          <a:noFill/>
-        </p:spPr>
-        <p:txBody>
-          <a:bodyPr wrap="square">
-            <a:spAutoFit/>
-          </a:bodyPr>
-          <a:lstStyle/>
-          <a:p>
-            <a:pPr>
-              <a:spcAft>
-                <a:spcPts val="1000"/>
-              </a:spcAft>
-            </a:pPr>
-            <a:r>
-              <a:rPr sz="1400" b="1">
-                <a:solidFill>
-                  <a:srgbClr val="0B0B0B"/>
-                </a:solidFill>
-                <a:latin typeface="Segoe UI"/>
-              </a:rPr>
-              <a:t>Week 1: </a:t>
-            </a:r>
-            <a:r>
-              <a:rPr sz="1400">
-                <a:solidFill>
-                  <a:srgbClr val="52514E"/>
-                </a:solidFill>
-                <a:latin typeface="Segoe UI"/>
-              </a:rPr>
-              <a:t>finish labels → publish precision, recall and area with 95% CI</a:t>
-            </a:r>
-          </a:p>
-          <a:p>
-            <a:pPr>
-              <a:spcAft>
-                <a:spcPts val="1000"/>
-              </a:spcAft>
-            </a:pPr>
-            <a:r>
-              <a:rPr sz="1400" b="1">
-                <a:solidFill>
-                  <a:srgbClr val="0B0B0B"/>
-                </a:solidFill>
-                <a:latin typeface="Segoe UI"/>
-              </a:rPr>
-              <a:t>Month 1: </a:t>
-            </a:r>
-            <a:r>
-              <a:rPr sz="1400">
-                <a:solidFill>
-                  <a:srgbClr val="52514E"/>
-                </a:solidFill>
-                <a:latin typeface="Segoe UI"/>
-              </a:rPr>
-              <a:t>Sentinel-1 radar for smog gaps and a paddy mask</a:t>
-            </a:r>
-          </a:p>
-          <a:p>
-            <a:pPr>
-              <a:spcAft>
-                <a:spcPts val="1000"/>
-              </a:spcAft>
-            </a:pPr>
-            <a:r>
-              <a:rPr sz="1400" b="1">
-                <a:solidFill>
-                  <a:srgbClr val="0B0B0B"/>
-                </a:solidFill>
-                <a:latin typeface="Segoe UI"/>
-              </a:rPr>
-              <a:t>Season 2026: </a:t>
-            </a:r>
-            <a:r>
-              <a:rPr sz="1400">
-                <a:solidFill>
-                  <a:srgbClr val="52514E"/>
-                </a:solidFill>
-                <a:latin typeface="Segoe UI"/>
-              </a:rPr>
-              <a:t>pilot in one block with a baler cooperative and a straw buyer</a:t>
-            </a:r>
-          </a:p>
-          <a:p>
-            <a:pPr>
-              <a:spcAft>
-                <a:spcPts val="1000"/>
-              </a:spcAft>
-            </a:pPr>
-            <a:r>
-              <a:rPr sz="1400" b="1">
-                <a:solidFill>
-                  <a:srgbClr val="0B0B0B"/>
-                </a:solidFill>
-                <a:latin typeface="Segoe UI"/>
-              </a:rPr>
-              <a:t>Policy: </a:t>
-            </a:r>
-            <a:r>
-              <a:rPr sz="1400">
-                <a:solidFill>
-                  <a:srgbClr val="52514E"/>
-                </a:solidFill>
-                <a:latin typeface="Segoe UI"/>
-              </a:rPr>
-              <a:t>propose burn-scar area, not fire counts, as the official indicator</a:t>
-            </a:r>
-          </a:p>
-        </p:txBody>
-      </p:sp>
-    </p:spTree>
-  </p:cSld>
-  <p:clrMapOvr>
-    <a:masterClrMapping/>
-  </p:clrMapOvr>
-</p:sld>
-</file>
-
-<file path=ppt/slides/slide13.xml><?xml version="1.0" encoding="utf-8"?>
-<p:sld xmlns:a="http://schemas.openxmlformats.org/drawingml/2006/main" xmlns:p="http://schemas.openxmlformats.org/presentationml/2006/main" xmlns:r="http://schemas.openxmlformats.org/officeDocument/2006/relationships">
-  <p:cSld>
-    <p:bg>
-      <p:bgPr>
-        <a:solidFill>
-          <a:srgbClr val="FCFCFB"/>
-        </a:solidFill>
-        <a:effectLst/>
-      </p:bgPr>
-    </p:bg>
-    <p:spTree>
-      <p:nvGrpSpPr>
-        <p:cNvPr id="1" name=""/>
-        <p:cNvGrpSpPr/>
-        <p:nvPr/>
-      </p:nvGrpSpPr>
-      <p:grpSpPr/>
-      <p:sp>
-        <p:nvSpPr>
-          <p:cNvPr id="2" name="TextBox 1"/>
-          <p:cNvSpPr txBox="1"/>
-          <p:nvPr/>
-        </p:nvSpPr>
-        <p:spPr>
-          <a:xfrm>
-            <a:off x="548640" y="566928"/>
-            <a:ext cx="11155680" cy="914400"/>
-          </a:xfrm>
-          <a:prstGeom prst="rect">
-            <a:avLst/>
-          </a:prstGeom>
-          <a:noFill/>
-        </p:spPr>
-        <p:txBody>
-          <a:bodyPr wrap="square">
-            <a:spAutoFit/>
-          </a:bodyPr>
-          <a:lstStyle/>
-          <a:p>
-            <a:pPr algn="l">
-              <a:spcAft>
-                <a:spcPts val="600"/>
-              </a:spcAft>
-            </a:pPr>
-            <a:r>
-              <a:rPr sz="2800" b="1">
-                <a:solidFill>
-                  <a:srgbClr val="0B0B0B"/>
-                </a:solidFill>
-                <a:latin typeface="Segoe UI"/>
-              </a:rPr>
-              <a:t>Measure burns, not alerts. Pay for straw, not fines.</a:t>
-            </a:r>
-          </a:p>
-        </p:txBody>
-      </p:sp>
-      <p:sp>
-        <p:nvSpPr>
-          <p:cNvPr id="3" name="TextBox 2"/>
-          <p:cNvSpPr txBox="1"/>
-          <p:nvPr/>
-        </p:nvSpPr>
-        <p:spPr>
-          <a:xfrm>
-            <a:off x="11155680" y="6400800"/>
-            <a:ext cx="640080" cy="365760"/>
-          </a:xfrm>
-          <a:prstGeom prst="rect">
-            <a:avLst/>
-          </a:prstGeom>
-          <a:noFill/>
-        </p:spPr>
-        <p:txBody>
-          <a:bodyPr wrap="square">
-            <a:spAutoFit/>
-          </a:bodyPr>
-          <a:lstStyle/>
-          <a:p>
-            <a:pPr algn="r">
-              <a:spcAft>
-                <a:spcPts val="600"/>
-              </a:spcAft>
-            </a:pPr>
-            <a:r>
-              <a:rPr sz="900" b="0">
-                <a:solidFill>
-                  <a:srgbClr val="898781"/>
-                </a:solidFill>
-                <a:latin typeface="Segoe UI"/>
-              </a:rPr>
-              <a:t>13</a:t>
-            </a:r>
-          </a:p>
-        </p:txBody>
-      </p:sp>
-      <p:sp>
-        <p:nvSpPr>
-          <p:cNvPr id="4" name="TextBox 3"/>
-          <p:cNvSpPr txBox="1"/>
-          <p:nvPr/>
-        </p:nvSpPr>
-        <p:spPr>
-          <a:xfrm>
-            <a:off x="548640" y="1828800"/>
-            <a:ext cx="10972800" cy="2286000"/>
-          </a:xfrm>
-          <a:prstGeom prst="rect">
-            <a:avLst/>
-          </a:prstGeom>
-          <a:noFill/>
-        </p:spPr>
-        <p:txBody>
-          <a:bodyPr wrap="square">
-            <a:spAutoFit/>
-          </a:bodyPr>
-          <a:lstStyle/>
-          <a:p>
-            <a:pPr algn="l">
-              <a:spcAft>
-                <a:spcPts val="600"/>
-              </a:spcAft>
-            </a:pPr>
-            <a:r>
-              <a:rPr sz="2000" b="0">
-                <a:solidFill>
-                  <a:srgbClr val="52514E"/>
-                </a:solidFill>
-                <a:latin typeface="Segoe UI"/>
-              </a:rPr>
-              <a:t>Fire alerts −79% · burn scars unchanged · 92% of strict-tier burn candidates unseen by fire satellites (2025)</a:t>
-            </a:r>
-          </a:p>
-          <a:p>
-            <a:pPr algn="l">
-              <a:spcAft>
-                <a:spcPts val="600"/>
-              </a:spcAft>
-            </a:pPr>
-            <a:r>
-              <a:rPr sz="2000" b="0">
-                <a:solidFill>
-                  <a:srgbClr val="52514E"/>
-                </a:solidFill>
-                <a:latin typeface="Segoe UI"/>
-              </a:rPr>
-              <a:t>2.6× more burns pre-empted with the same 100 balers · live 2026 nowcast for Muktsar</a:t>
-            </a:r>
-          </a:p>
-        </p:txBody>
-      </p:sp>
-      <p:sp>
-        <p:nvSpPr>
-          <p:cNvPr id="5" name="TextBox 4"/>
-          <p:cNvSpPr txBox="1"/>
-          <p:nvPr/>
-        </p:nvSpPr>
-        <p:spPr>
-          <a:xfrm>
-            <a:off x="548640" y="4206240"/>
-            <a:ext cx="10972800" cy="1371600"/>
-          </a:xfrm>
-          <a:prstGeom prst="rect">
-            <a:avLst/>
-          </a:prstGeom>
-          <a:noFill/>
-        </p:spPr>
-        <p:txBody>
-          <a:bodyPr wrap="square">
-            <a:spAutoFit/>
-          </a:bodyPr>
-          <a:lstStyle/>
-          <a:p>
-            <a:pPr algn="l">
-              <a:spcAft>
-                <a:spcPts val="600"/>
-              </a:spcAft>
-            </a:pPr>
-            <a:r>
-              <a:rPr sz="1400" b="0">
-                <a:solidFill>
-                  <a:srgbClr val="898781"/>
-                </a:solidFill>
-                <a:latin typeface="Segoe UI"/>
-              </a:rPr>
-              <a:t>Parali Se Paisa · Greenovators Hackathon 2026 · Amity University Noida</a:t>
-            </a:r>
-          </a:p>
-          <a:p>
-            <a:pPr algn="l">
-              <a:spcAft>
-                <a:spcPts val="600"/>
-              </a:spcAft>
-            </a:pPr>
-            <a:r>
-              <a:rPr sz="1400" b="0">
-                <a:solidFill>
-                  <a:srgbClr val="898781"/>
-                </a:solidFill>
-                <a:latin typeface="Segoe UI"/>
-              </a:rPr>
-              <a:t>Reproducible: scripts/run_research.py · docs/RESEARCH_METHODS.md · reports/research/RESEARCH_SUMMARY.md</a:t>
+              <a:rPr sz="1200">
+                <a:solidFill>
+                  <a:srgbClr val="1B2821"/>
+                </a:solidFill>
+              </a:rPr>
+              <a:t>Need visible, traceable supply; this prototype does not establish actual demand.</a:t>
             </a:r>
           </a:p>
         </p:txBody>
@@ -6121,7 +4497,7 @@
     <p:bg>
       <p:bgPr>
         <a:solidFill>
-          <a:srgbClr val="FCFCFB"/>
+          <a:srgbClr val="F8F9F5"/>
         </a:solidFill>
         <a:effectLst/>
       </p:bgPr>
@@ -6141,8 +4517,8 @@
         </p:nvSpPr>
         <p:spPr>
           <a:xfrm>
-            <a:off x="548640" y="292608"/>
-            <a:ext cx="10972800" cy="365760"/>
+            <a:off x="502920" y="256032"/>
+            <a:ext cx="10972800" cy="256032"/>
           </a:xfrm>
           <a:prstGeom prst="rect">
             <a:avLst/>
@@ -6157,17 +4533,17 @@
           <a:p>
             <a:pPr algn="l">
               <a:spcAft>
-                <a:spcPts val="600"/>
+                <a:spcPts val="500"/>
               </a:spcAft>
             </a:pPr>
             <a:r>
               <a:rPr sz="1100" b="1">
                 <a:solidFill>
-                  <a:srgbClr val="2F6B4F"/>
-                </a:solidFill>
-                <a:latin typeface="Segoe UI"/>
-              </a:rPr>
-              <a:t>THE PROBLEM</a:t>
+                  <a:srgbClr val="1F6543"/>
+                </a:solidFill>
+                <a:latin typeface="Aptos"/>
+              </a:rPr>
+              <a:t>SOLUTION</a:t>
             </a:r>
           </a:p>
         </p:txBody>
@@ -6180,8 +4556,8 @@
         </p:nvSpPr>
         <p:spPr>
           <a:xfrm>
-            <a:off x="548640" y="566928"/>
-            <a:ext cx="11155680" cy="914400"/>
+            <a:off x="502920" y="566928"/>
+            <a:ext cx="11064240" cy="685800"/>
           </a:xfrm>
           <a:prstGeom prst="rect">
             <a:avLst/>
@@ -6196,17 +4572,17 @@
           <a:p>
             <a:pPr algn="l">
               <a:spcAft>
-                <a:spcPts val="600"/>
+                <a:spcPts val="500"/>
               </a:spcAft>
             </a:pPr>
             <a:r>
-              <a:rPr sz="2800" b="1">
-                <a:solidFill>
-                  <a:srgbClr val="0B0B0B"/>
-                </a:solidFill>
-                <a:latin typeface="Segoe UI"/>
-              </a:rPr>
-              <a:t>The official indicator is going blind</a:t>
+              <a:rPr sz="2700" b="1">
+                <a:solidFill>
+                  <a:srgbClr val="1B2821"/>
+                </a:solidFill>
+                <a:latin typeface="Aptos"/>
+              </a:rPr>
+              <a:t>One evidence-to-action workflow</a:t>
             </a:r>
           </a:p>
         </p:txBody>
@@ -6219,8 +4595,8 @@
         </p:nvSpPr>
         <p:spPr>
           <a:xfrm>
-            <a:off x="548640" y="6400800"/>
-            <a:ext cx="10424160" cy="365760"/>
+            <a:off x="502920" y="6419088"/>
+            <a:ext cx="10698480" cy="256032"/>
           </a:xfrm>
           <a:prstGeom prst="rect">
             <a:avLst/>
@@ -6235,17 +4611,17 @@
           <a:p>
             <a:pPr algn="l">
               <a:spcAft>
-                <a:spcPts val="600"/>
+                <a:spcPts val="500"/>
               </a:spcAft>
             </a:pPr>
             <a:r>
-              <a:rPr sz="900" b="0">
-                <a:solidFill>
-                  <a:srgbClr val="898781"/>
-                </a:solidFill>
-                <a:latin typeface="Segoe UI"/>
-              </a:rPr>
-              <a:t>iFOREST Stubble Burning Status Report 2025 (SEVIRI geostationary data); NASA Earth Observatory, Dec 2025; concept-note references for straw volume.</a:t>
+              <a:rPr sz="800" b="0">
+                <a:solidFill>
+                  <a:srgbClr val="5B695F"/>
+                </a:solidFill>
+                <a:latin typeface="Aptos"/>
+              </a:rPr>
+              <a:t>Source: application prototype; see README for real-data and synthetic-mode boundaries.</a:t>
             </a:r>
           </a:p>
         </p:txBody>
@@ -6258,8 +4634,8 @@
         </p:nvSpPr>
         <p:spPr>
           <a:xfrm>
-            <a:off x="11155680" y="6400800"/>
-            <a:ext cx="640080" cy="365760"/>
+            <a:off x="11109960" y="6419088"/>
+            <a:ext cx="548640" cy="256032"/>
           </a:xfrm>
           <a:prstGeom prst="rect">
             <a:avLst/>
@@ -6274,15 +4650,15 @@
           <a:p>
             <a:pPr algn="r">
               <a:spcAft>
-                <a:spcPts val="600"/>
+                <a:spcPts val="500"/>
               </a:spcAft>
             </a:pPr>
             <a:r>
-              <a:rPr sz="900" b="0">
-                <a:solidFill>
-                  <a:srgbClr val="898781"/>
-                </a:solidFill>
-                <a:latin typeface="Segoe UI"/>
+              <a:rPr sz="800" b="0">
+                <a:solidFill>
+                  <a:srgbClr val="5B695F"/>
+                </a:solidFill>
+                <a:latin typeface="Aptos"/>
               </a:rPr>
               <a:t>2</a:t>
             </a:r>
@@ -6291,14 +4667,286 @@
       </p:sp>
       <p:sp>
         <p:nvSpPr>
-          <p:cNvPr id="6" name="TextBox 5"/>
+          <p:cNvPr id="6" name="Rounded Rectangle 5"/>
+          <p:cNvSpPr/>
+          <p:nvPr/>
+        </p:nvSpPr>
+        <p:spPr>
+          <a:xfrm>
+            <a:off x="594360" y="1874519"/>
+            <a:ext cx="2560320" cy="2103120"/>
+          </a:xfrm>
+          <a:prstGeom prst="roundRect">
+            <a:avLst/>
+          </a:prstGeom>
+          <a:solidFill>
+            <a:srgbClr val="FFFFFF"/>
+          </a:solidFill>
+          <a:ln>
+            <a:solidFill>
+              <a:srgbClr val="E6EFE6"/>
+            </a:solidFill>
+          </a:ln>
+        </p:spPr>
+        <p:style>
+          <a:lnRef idx="1">
+            <a:schemeClr val="accent1"/>
+          </a:lnRef>
+          <a:fillRef idx="3">
+            <a:schemeClr val="accent1"/>
+          </a:fillRef>
+          <a:effectRef idx="2">
+            <a:schemeClr val="accent1"/>
+          </a:effectRef>
+          <a:fontRef idx="minor">
+            <a:schemeClr val="lt1"/>
+          </a:fontRef>
+        </p:style>
+        <p:txBody>
+          <a:bodyPr rtlCol="0" anchor="ctr" wrap="square" lIns="146304" rIns="128016" tIns="109728"/>
+          <a:lstStyle/>
+          <a:p>
+            <a:pPr algn="ctr"/>
+            <a:r>
+              <a:rPr sz="1500" b="1">
+                <a:solidFill>
+                  <a:srgbClr val="1F6543"/>
+                </a:solidFill>
+              </a:rPr>
+              <a:t>Observe</a:t>
+            </a:r>
+          </a:p>
+          <a:p>
+            <a:pPr>
+              <a:spcBef>
+                <a:spcPts val="800"/>
+              </a:spcBef>
+            </a:pPr>
+            <a:r>
+              <a:rPr sz="1200">
+                <a:solidFill>
+                  <a:srgbClr val="1B2821"/>
+                </a:solidFill>
+              </a:rPr>
+              <a:t>Sentinel-2 field histories</a:t>
+            </a:r>
+          </a:p>
+        </p:txBody>
+      </p:sp>
+      <p:sp>
+        <p:nvSpPr>
+          <p:cNvPr id="7" name="Rounded Rectangle 6"/>
+          <p:cNvSpPr/>
+          <p:nvPr/>
+        </p:nvSpPr>
+        <p:spPr>
+          <a:xfrm>
+            <a:off x="3474720" y="1874519"/>
+            <a:ext cx="2560320" cy="2103120"/>
+          </a:xfrm>
+          <a:prstGeom prst="roundRect">
+            <a:avLst/>
+          </a:prstGeom>
+          <a:solidFill>
+            <a:srgbClr val="FFFFFF"/>
+          </a:solidFill>
+          <a:ln>
+            <a:solidFill>
+              <a:srgbClr val="E6EFE6"/>
+            </a:solidFill>
+          </a:ln>
+        </p:spPr>
+        <p:style>
+          <a:lnRef idx="1">
+            <a:schemeClr val="accent1"/>
+          </a:lnRef>
+          <a:fillRef idx="3">
+            <a:schemeClr val="accent1"/>
+          </a:fillRef>
+          <a:effectRef idx="2">
+            <a:schemeClr val="accent1"/>
+          </a:effectRef>
+          <a:fontRef idx="minor">
+            <a:schemeClr val="lt1"/>
+          </a:fontRef>
+        </p:style>
+        <p:txBody>
+          <a:bodyPr rtlCol="0" anchor="ctr" wrap="square" lIns="146304" rIns="128016" tIns="109728"/>
+          <a:lstStyle/>
+          <a:p>
+            <a:pPr algn="ctr"/>
+            <a:r>
+              <a:rPr sz="1500" b="1">
+                <a:solidFill>
+                  <a:srgbClr val="1F6543"/>
+                </a:solidFill>
+              </a:rPr>
+              <a:t>Prioritize</a:t>
+            </a:r>
+          </a:p>
+          <a:p>
+            <a:pPr>
+              <a:spcBef>
+                <a:spcPts val="800"/>
+              </a:spcBef>
+            </a:pPr>
+            <a:r>
+              <a:rPr sz="1200">
+                <a:solidFill>
+                  <a:srgbClr val="1B2821"/>
+                </a:solidFill>
+              </a:rPr>
+              <a:t>Normalized burn risk score, not probability</a:t>
+            </a:r>
+          </a:p>
+        </p:txBody>
+      </p:sp>
+      <p:sp>
+        <p:nvSpPr>
+          <p:cNvPr id="8" name="Rounded Rectangle 7"/>
+          <p:cNvSpPr/>
+          <p:nvPr/>
+        </p:nvSpPr>
+        <p:spPr>
+          <a:xfrm>
+            <a:off x="6355080" y="1874519"/>
+            <a:ext cx="2560320" cy="2103120"/>
+          </a:xfrm>
+          <a:prstGeom prst="roundRect">
+            <a:avLst/>
+          </a:prstGeom>
+          <a:solidFill>
+            <a:srgbClr val="FFFFFF"/>
+          </a:solidFill>
+          <a:ln>
+            <a:solidFill>
+              <a:srgbClr val="E6EFE6"/>
+            </a:solidFill>
+          </a:ln>
+        </p:spPr>
+        <p:style>
+          <a:lnRef idx="1">
+            <a:schemeClr val="accent1"/>
+          </a:lnRef>
+          <a:fillRef idx="3">
+            <a:schemeClr val="accent1"/>
+          </a:fillRef>
+          <a:effectRef idx="2">
+            <a:schemeClr val="accent1"/>
+          </a:effectRef>
+          <a:fontRef idx="minor">
+            <a:schemeClr val="lt1"/>
+          </a:fontRef>
+        </p:style>
+        <p:txBody>
+          <a:bodyPr rtlCol="0" anchor="ctr" wrap="square" lIns="146304" rIns="128016" tIns="109728"/>
+          <a:lstStyle/>
+          <a:p>
+            <a:pPr algn="ctr"/>
+            <a:r>
+              <a:rPr sz="1500" b="1">
+                <a:solidFill>
+                  <a:srgbClr val="1F6543"/>
+                </a:solidFill>
+              </a:rPr>
+              <a:t>Coordinate</a:t>
+            </a:r>
+          </a:p>
+          <a:p>
+            <a:pPr>
+              <a:spcBef>
+                <a:spcPts val="800"/>
+              </a:spcBef>
+            </a:pPr>
+            <a:r>
+              <a:rPr sz="1200">
+                <a:solidFill>
+                  <a:srgbClr val="1B2821"/>
+                </a:solidFill>
+              </a:rPr>
+              <a:t>Demo baler/buyer workflow</a:t>
+            </a:r>
+          </a:p>
+        </p:txBody>
+      </p:sp>
+      <p:sp>
+        <p:nvSpPr>
+          <p:cNvPr id="9" name="Rounded Rectangle 8"/>
+          <p:cNvSpPr/>
+          <p:nvPr/>
+        </p:nvSpPr>
+        <p:spPr>
+          <a:xfrm>
+            <a:off x="9235440" y="1874519"/>
+            <a:ext cx="2560320" cy="2103120"/>
+          </a:xfrm>
+          <a:prstGeom prst="roundRect">
+            <a:avLst/>
+          </a:prstGeom>
+          <a:solidFill>
+            <a:srgbClr val="FFFFFF"/>
+          </a:solidFill>
+          <a:ln>
+            <a:solidFill>
+              <a:srgbClr val="E6EFE6"/>
+            </a:solidFill>
+          </a:ln>
+        </p:spPr>
+        <p:style>
+          <a:lnRef idx="1">
+            <a:schemeClr val="accent1"/>
+          </a:lnRef>
+          <a:fillRef idx="3">
+            <a:schemeClr val="accent1"/>
+          </a:fillRef>
+          <a:effectRef idx="2">
+            <a:schemeClr val="accent1"/>
+          </a:effectRef>
+          <a:fontRef idx="minor">
+            <a:schemeClr val="lt1"/>
+          </a:fontRef>
+        </p:style>
+        <p:txBody>
+          <a:bodyPr rtlCol="0" anchor="ctr" wrap="square" lIns="146304" rIns="128016" tIns="109728"/>
+          <a:lstStyle/>
+          <a:p>
+            <a:pPr algn="ctr"/>
+            <a:r>
+              <a:rPr sz="1500" b="1">
+                <a:solidFill>
+                  <a:srgbClr val="1F6543"/>
+                </a:solidFill>
+              </a:rPr>
+              <a:t>Record</a:t>
+            </a:r>
+          </a:p>
+          <a:p>
+            <a:pPr>
+              <a:spcBef>
+                <a:spcPts val="800"/>
+              </a:spcBef>
+            </a:pPr>
+            <a:r>
+              <a:rPr sz="1200">
+                <a:solidFill>
+                  <a:srgbClr val="1B2821"/>
+                </a:solidFill>
+              </a:rPr>
+              <a:t>Prototype QR metadata check</a:t>
+            </a:r>
+          </a:p>
+        </p:txBody>
+      </p:sp>
+      <p:sp>
+        <p:nvSpPr>
+          <p:cNvPr id="10" name="TextBox 9"/>
           <p:cNvSpPr txBox="1"/>
           <p:nvPr/>
         </p:nvSpPr>
         <p:spPr>
           <a:xfrm>
-            <a:off x="548640" y="1737360"/>
-            <a:ext cx="3474720" cy="822960"/>
+            <a:off x="685800" y="4846320"/>
+            <a:ext cx="10789920" cy="731520"/>
           </a:xfrm>
           <a:prstGeom prst="rect">
             <a:avLst/>
@@ -6311,269 +4959,19 @@
           </a:bodyPr>
           <a:lstStyle/>
           <a:p>
-            <a:pPr algn="l">
+            <a:pPr algn="ctr">
               <a:spcAft>
-                <a:spcPts val="600"/>
+                <a:spcPts val="500"/>
               </a:spcAft>
             </a:pPr>
             <a:r>
-              <a:rPr sz="4000" b="1">
-                <a:solidFill>
-                  <a:srgbClr val="1D3D2B"/>
-                </a:solidFill>
-                <a:latin typeface="Segoe UI"/>
-              </a:rPr>
-              <a:t>18.8 Mt</a:t>
-            </a:r>
-          </a:p>
-        </p:txBody>
-      </p:sp>
-      <p:sp>
-        <p:nvSpPr>
-          <p:cNvPr id="7" name="TextBox 6"/>
-          <p:cNvSpPr txBox="1"/>
-          <p:nvPr/>
-        </p:nvSpPr>
-        <p:spPr>
-          <a:xfrm>
-            <a:off x="548640" y="2606039"/>
-            <a:ext cx="3474720" cy="914400"/>
-          </a:xfrm>
-          <a:prstGeom prst="rect">
-            <a:avLst/>
-          </a:prstGeom>
-          <a:noFill/>
-        </p:spPr>
-        <p:txBody>
-          <a:bodyPr wrap="square">
-            <a:spAutoFit/>
-          </a:bodyPr>
-          <a:lstStyle/>
-          <a:p>
-            <a:pPr algn="l">
-              <a:spcAft>
-                <a:spcPts val="600"/>
-              </a:spcAft>
-            </a:pPr>
-            <a:r>
-              <a:rPr sz="1300" b="0">
-                <a:solidFill>
-                  <a:srgbClr val="52514E"/>
-                </a:solidFill>
-                <a:latin typeface="Segoe UI"/>
-              </a:rPr>
-              <a:t>paddy straw expected in Punjab in 2026, most of it with a 2–3 week window before wheat sowing</a:t>
-            </a:r>
-          </a:p>
-        </p:txBody>
-      </p:sp>
-      <p:sp>
-        <p:nvSpPr>
-          <p:cNvPr id="8" name="TextBox 7"/>
-          <p:cNvSpPr txBox="1"/>
-          <p:nvPr/>
-        </p:nvSpPr>
-        <p:spPr>
-          <a:xfrm>
-            <a:off x="4297680" y="1737360"/>
-            <a:ext cx="3474720" cy="822960"/>
-          </a:xfrm>
-          <a:prstGeom prst="rect">
-            <a:avLst/>
-          </a:prstGeom>
-          <a:noFill/>
-        </p:spPr>
-        <p:txBody>
-          <a:bodyPr wrap="square">
-            <a:spAutoFit/>
-          </a:bodyPr>
-          <a:lstStyle/>
-          <a:p>
-            <a:pPr algn="l">
-              <a:spcAft>
-                <a:spcPts val="600"/>
-              </a:spcAft>
-            </a:pPr>
-            <a:r>
-              <a:rPr sz="4000" b="1">
-                <a:solidFill>
-                  <a:srgbClr val="D03B3B"/>
-                </a:solidFill>
-                <a:latin typeface="Segoe UI"/>
-              </a:rPr>
-              <a:t>−92%</a:t>
-            </a:r>
-          </a:p>
-        </p:txBody>
-      </p:sp>
-      <p:sp>
-        <p:nvSpPr>
-          <p:cNvPr id="9" name="TextBox 8"/>
-          <p:cNvSpPr txBox="1"/>
-          <p:nvPr/>
-        </p:nvSpPr>
-        <p:spPr>
-          <a:xfrm>
-            <a:off x="4297680" y="2606039"/>
-            <a:ext cx="3474720" cy="914400"/>
-          </a:xfrm>
-          <a:prstGeom prst="rect">
-            <a:avLst/>
-          </a:prstGeom>
-          <a:noFill/>
-        </p:spPr>
-        <p:txBody>
-          <a:bodyPr wrap="square">
-            <a:spAutoFit/>
-          </a:bodyPr>
-          <a:lstStyle/>
-          <a:p>
-            <a:pPr algn="l">
-              <a:spcAft>
-                <a:spcPts val="600"/>
-              </a:spcAft>
-            </a:pPr>
-            <a:r>
-              <a:rPr sz="1300" b="0">
-                <a:solidFill>
-                  <a:srgbClr val="52514E"/>
-                </a:solidFill>
-                <a:latin typeface="Segoe UI"/>
-              </a:rPr>
-              <a:t>active-fire counts in Punjab since the 2021 peak (MODIS/VIIRS)</a:t>
-            </a:r>
-          </a:p>
-        </p:txBody>
-      </p:sp>
-      <p:sp>
-        <p:nvSpPr>
-          <p:cNvPr id="10" name="TextBox 9"/>
-          <p:cNvSpPr txBox="1"/>
-          <p:nvPr/>
-        </p:nvSpPr>
-        <p:spPr>
-          <a:xfrm>
-            <a:off x="8046720" y="1737360"/>
-            <a:ext cx="3566160" cy="822960"/>
-          </a:xfrm>
-          <a:prstGeom prst="rect">
-            <a:avLst/>
-          </a:prstGeom>
-          <a:noFill/>
-        </p:spPr>
-        <p:txBody>
-          <a:bodyPr wrap="square">
-            <a:spAutoFit/>
-          </a:bodyPr>
-          <a:lstStyle/>
-          <a:p>
-            <a:pPr algn="l">
-              <a:spcAft>
-                <a:spcPts val="600"/>
-              </a:spcAft>
-            </a:pPr>
-            <a:r>
-              <a:rPr sz="4000" b="1">
-                <a:solidFill>
-                  <a:srgbClr val="D03B3B"/>
-                </a:solidFill>
-                <a:latin typeface="Segoe UI"/>
-              </a:rPr>
-              <a:t>&gt;90%</a:t>
-            </a:r>
-          </a:p>
-        </p:txBody>
-      </p:sp>
-      <p:sp>
-        <p:nvSpPr>
-          <p:cNvPr id="11" name="TextBox 10"/>
-          <p:cNvSpPr txBox="1"/>
-          <p:nvPr/>
-        </p:nvSpPr>
-        <p:spPr>
-          <a:xfrm>
-            <a:off x="8046720" y="2606039"/>
-            <a:ext cx="3566160" cy="914400"/>
-          </a:xfrm>
-          <a:prstGeom prst="rect">
-            <a:avLst/>
-          </a:prstGeom>
-          <a:noFill/>
-        </p:spPr>
-        <p:txBody>
-          <a:bodyPr wrap="square">
-            <a:spAutoFit/>
-          </a:bodyPr>
-          <a:lstStyle/>
-          <a:p>
-            <a:pPr algn="l">
-              <a:spcAft>
-                <a:spcPts val="600"/>
-              </a:spcAft>
-            </a:pPr>
-            <a:r>
-              <a:rPr sz="1300" b="0">
-                <a:solidFill>
-                  <a:srgbClr val="52514E"/>
-                </a:solidFill>
-                <a:latin typeface="Segoe UI"/>
-              </a:rPr>
-              <a:t>of large farm fires in 2024–25 lit after 3 PM, after polar satellites pass (3% in 2021)</a:t>
-            </a:r>
-          </a:p>
-        </p:txBody>
-      </p:sp>
-      <p:sp>
-        <p:nvSpPr>
-          <p:cNvPr id="12" name="TextBox 11"/>
-          <p:cNvSpPr txBox="1"/>
-          <p:nvPr/>
-        </p:nvSpPr>
-        <p:spPr>
-          <a:xfrm>
-            <a:off x="548640" y="4206240"/>
-            <a:ext cx="10972800" cy="1280160"/>
-          </a:xfrm>
-          <a:prstGeom prst="rect">
-            <a:avLst/>
-          </a:prstGeom>
-          <a:noFill/>
-        </p:spPr>
-        <p:txBody>
-          <a:bodyPr wrap="square">
-            <a:spAutoFit/>
-          </a:bodyPr>
-          <a:lstStyle/>
-          <a:p>
-            <a:pPr algn="l">
-              <a:spcAft>
-                <a:spcPts val="600"/>
-              </a:spcAft>
-            </a:pPr>
-            <a:r>
-              <a:rPr sz="1700" b="0">
-                <a:solidFill>
-                  <a:srgbClr val="0B0B0B"/>
-                </a:solidFill>
-                <a:latin typeface="Segoe UI"/>
-              </a:rPr>
-              <a:t>Burnt area fell only 25–35% while fire counts fell more than 95%. Money, machines and monitoring cannot target fields nobody can see.</a:t>
-            </a:r>
-          </a:p>
-          <a:p>
-            <a:pPr algn="l">
-              <a:spcAft>
-                <a:spcPts val="600"/>
-              </a:spcAft>
-            </a:pPr>
-            <a:r>
-              <a:rPr sz="1700" b="0">
-                <a:solidFill>
-                  <a:srgbClr val="0B0B0B"/>
-                </a:solidFill>
-                <a:latin typeface="Segoe UI"/>
-              </a:rPr>
-              <a:t>Question: can free satellite data see every field's burn, and send balers before the fire?</a:t>
+              <a:rPr sz="1500" b="1">
+                <a:solidFill>
+                  <a:srgbClr val="1F6543"/>
+                </a:solidFill>
+                <a:latin typeface="Aptos"/>
+              </a:rPr>
+              <a:t>REAL DATA  →  RULE-BASED INTERPRETATION  →  DEMO/SYNTHETIC OPERATIONS  →  PROTOTYPE RECORD</a:t>
             </a:r>
           </a:p>
         </p:txBody>
@@ -6592,7 +4990,7 @@
     <p:bg>
       <p:bgPr>
         <a:solidFill>
-          <a:srgbClr val="FCFCFB"/>
+          <a:srgbClr val="F8F9F5"/>
         </a:solidFill>
         <a:effectLst/>
       </p:bgPr>
@@ -6612,8 +5010,8 @@
         </p:nvSpPr>
         <p:spPr>
           <a:xfrm>
-            <a:off x="548640" y="292608"/>
-            <a:ext cx="10972800" cy="365760"/>
+            <a:off x="502920" y="256032"/>
+            <a:ext cx="10972800" cy="256032"/>
           </a:xfrm>
           <a:prstGeom prst="rect">
             <a:avLst/>
@@ -6628,17 +5026,17 @@
           <a:p>
             <a:pPr algn="l">
               <a:spcAft>
-                <a:spcPts val="600"/>
+                <a:spcPts val="500"/>
               </a:spcAft>
             </a:pPr>
             <a:r>
               <a:rPr sz="1100" b="1">
                 <a:solidFill>
-                  <a:srgbClr val="2F6B4F"/>
-                </a:solidFill>
-                <a:latin typeface="Segoe UI"/>
-              </a:rPr>
-              <a:t>OUR APPROACH</a:t>
+                  <a:srgbClr val="1F6543"/>
+                </a:solidFill>
+                <a:latin typeface="Aptos"/>
+              </a:rPr>
+              <a:t>REAL DATA</a:t>
             </a:r>
           </a:p>
         </p:txBody>
@@ -6651,8 +5049,8 @@
         </p:nvSpPr>
         <p:spPr>
           <a:xfrm>
-            <a:off x="548640" y="566928"/>
-            <a:ext cx="11155680" cy="914400"/>
+            <a:off x="502920" y="566928"/>
+            <a:ext cx="11064240" cy="685800"/>
           </a:xfrm>
           <a:prstGeom prst="rect">
             <a:avLst/>
@@ -6667,17 +5065,17 @@
           <a:p>
             <a:pPr algn="l">
               <a:spcAft>
-                <a:spcPts val="600"/>
+                <a:spcPts val="500"/>
               </a:spcAft>
             </a:pPr>
             <a:r>
-              <a:rPr sz="2800" b="1">
-                <a:solidFill>
-                  <a:srgbClr val="0B0B0B"/>
-                </a:solidFill>
-                <a:latin typeface="Segoe UI"/>
-              </a:rPr>
-              <a:t>Every field, every 2–5 days, from free satellite data</a:t>
+              <a:rPr sz="2700" b="1">
+                <a:solidFill>
+                  <a:srgbClr val="1B2821"/>
+                </a:solidFill>
+                <a:latin typeface="Aptos"/>
+              </a:rPr>
+              <a:t>Muktsar map and one field history, 2023–2026</a:t>
             </a:r>
           </a:p>
         </p:txBody>
@@ -6690,8 +5088,8 @@
         </p:nvSpPr>
         <p:spPr>
           <a:xfrm>
-            <a:off x="548640" y="6400800"/>
-            <a:ext cx="10424160" cy="365760"/>
+            <a:off x="502920" y="6419088"/>
+            <a:ext cx="10698480" cy="256032"/>
           </a:xfrm>
           <a:prstGeom prst="rect">
             <a:avLst/>
@@ -6706,17 +5104,17 @@
           <a:p>
             <a:pPr algn="l">
               <a:spcAft>
-                <a:spcPts val="600"/>
+                <a:spcPts val="500"/>
               </a:spcAft>
             </a:pPr>
             <a:r>
-              <a:rPr sz="900" b="0">
-                <a:solidFill>
-                  <a:srgbClr val="898781"/>
-                </a:solidFill>
-                <a:latin typeface="Segoe UI"/>
-              </a:rPr>
-              <a:t>Runs end to end on a laptop CPU: download 45 min, extraction 5 min, analysis 70 s. No GPU and no paid data.</a:t>
+              <a:rPr sz="800" b="0">
+                <a:solidFill>
+                  <a:srgbClr val="5B695F"/>
+                </a:solidFill>
+                <a:latin typeface="Aptos"/>
+              </a:rPr>
+              <a:t>Source: fresh screenshots from isolated read-only real-data mode; 74 Sentinel-2 scenes, 12.6 million field-date observations; Fields of The World boundaries are model-derived.</a:t>
             </a:r>
           </a:p>
         </p:txBody>
@@ -6729,8 +5127,8 @@
         </p:nvSpPr>
         <p:spPr>
           <a:xfrm>
-            <a:off x="11155680" y="6400800"/>
-            <a:ext cx="640080" cy="365760"/>
+            <a:off x="11109960" y="6419088"/>
+            <a:ext cx="548640" cy="256032"/>
           </a:xfrm>
           <a:prstGeom prst="rect">
             <a:avLst/>
@@ -6745,17 +5143,364 @@
           <a:p>
             <a:pPr algn="r">
               <a:spcAft>
-                <a:spcPts val="600"/>
+                <a:spcPts val="500"/>
               </a:spcAft>
             </a:pPr>
             <a:r>
-              <a:rPr sz="900" b="0">
-                <a:solidFill>
-                  <a:srgbClr val="898781"/>
-                </a:solidFill>
-                <a:latin typeface="Segoe UI"/>
+              <a:rPr sz="800" b="0">
+                <a:solidFill>
+                  <a:srgbClr val="5B695F"/>
+                </a:solidFill>
+                <a:latin typeface="Aptos"/>
               </a:rPr>
               <a:t>3</a:t>
+            </a:r>
+          </a:p>
+        </p:txBody>
+      </p:sp>
+      <p:sp>
+        <p:nvSpPr>
+          <p:cNvPr id="6" name="TextBox 5"/>
+          <p:cNvSpPr txBox="1"/>
+          <p:nvPr/>
+        </p:nvSpPr>
+        <p:spPr>
+          <a:xfrm>
+            <a:off x="640080" y="1307592"/>
+            <a:ext cx="10972800" cy="320040"/>
+          </a:xfrm>
+          <a:prstGeom prst="rect">
+            <a:avLst/>
+          </a:prstGeom>
+          <a:noFill/>
+        </p:spPr>
+        <p:txBody>
+          <a:bodyPr wrap="square">
+            <a:spAutoFit/>
+          </a:bodyPr>
+          <a:lstStyle/>
+          <a:p>
+            <a:pPr algn="l">
+              <a:spcAft>
+                <a:spcPts val="500"/>
+              </a:spcAft>
+            </a:pPr>
+            <a:r>
+              <a:rPr sz="1300" b="1">
+                <a:solidFill>
+                  <a:srgbClr val="1F6543"/>
+                </a:solidFill>
+                <a:latin typeface="Aptos"/>
+              </a:rPr>
+              <a:t>74 Sentinel-2 scenes  ·  12.6 million field-date observations</a:t>
+            </a:r>
+          </a:p>
+        </p:txBody>
+      </p:sp>
+      <p:pic>
+        <p:nvPicPr>
+          <p:cNvPr id="7" name="Picture 6" descr="research-real-map.png"/>
+          <p:cNvPicPr>
+            <a:picLocks noChangeAspect="1"/>
+          </p:cNvPicPr>
+          <p:nvPr/>
+        </p:nvPicPr>
+        <p:blipFill>
+          <a:blip r:embed="rId3"/>
+          <a:stretch>
+            <a:fillRect/>
+          </a:stretch>
+        </p:blipFill>
+        <p:spPr>
+          <a:xfrm>
+            <a:off x="787630" y="1691640"/>
+            <a:ext cx="4916978" cy="4160520"/>
+          </a:xfrm>
+          <a:prstGeom prst="rect">
+            <a:avLst/>
+          </a:prstGeom>
+        </p:spPr>
+      </p:pic>
+      <p:pic>
+        <p:nvPicPr>
+          <p:cNvPr id="8" name="Picture 7" descr="field-history-real.png"/>
+          <p:cNvPicPr>
+            <a:picLocks noChangeAspect="1"/>
+          </p:cNvPicPr>
+          <p:nvPr/>
+        </p:nvPicPr>
+        <p:blipFill>
+          <a:blip r:embed="rId4"/>
+          <a:stretch>
+            <a:fillRect/>
+          </a:stretch>
+        </p:blipFill>
+        <p:spPr>
+          <a:xfrm>
+            <a:off x="6217920" y="1866899"/>
+            <a:ext cx="5486400" cy="3810000"/>
+          </a:xfrm>
+          <a:prstGeom prst="rect">
+            <a:avLst/>
+          </a:prstGeom>
+        </p:spPr>
+      </p:pic>
+      <p:sp>
+        <p:nvSpPr>
+          <p:cNvPr id="9" name="TextBox 8"/>
+          <p:cNvSpPr txBox="1"/>
+          <p:nvPr/>
+        </p:nvSpPr>
+        <p:spPr>
+          <a:xfrm>
+            <a:off x="658368" y="5879592"/>
+            <a:ext cx="5303520" cy="292608"/>
+          </a:xfrm>
+          <a:prstGeom prst="rect">
+            <a:avLst/>
+          </a:prstGeom>
+          <a:noFill/>
+        </p:spPr>
+        <p:txBody>
+          <a:bodyPr wrap="square">
+            <a:spAutoFit/>
+          </a:bodyPr>
+          <a:lstStyle/>
+          <a:p>
+            <a:pPr algn="l">
+              <a:spcAft>
+                <a:spcPts val="500"/>
+              </a:spcAft>
+            </a:pPr>
+            <a:r>
+              <a:rPr sz="1100" b="1">
+                <a:solidFill>
+                  <a:srgbClr val="1F6543"/>
+                </a:solidFill>
+                <a:latin typeface="Aptos"/>
+              </a:rPr>
+              <a:t>REAL DATA · rule-based candidate map</a:t>
+            </a:r>
+          </a:p>
+        </p:txBody>
+      </p:sp>
+      <p:sp>
+        <p:nvSpPr>
+          <p:cNvPr id="10" name="TextBox 9"/>
+          <p:cNvSpPr txBox="1"/>
+          <p:nvPr/>
+        </p:nvSpPr>
+        <p:spPr>
+          <a:xfrm>
+            <a:off x="6355080" y="5879592"/>
+            <a:ext cx="5303520" cy="292608"/>
+          </a:xfrm>
+          <a:prstGeom prst="rect">
+            <a:avLst/>
+          </a:prstGeom>
+          <a:noFill/>
+        </p:spPr>
+        <p:txBody>
+          <a:bodyPr wrap="square">
+            <a:spAutoFit/>
+          </a:bodyPr>
+          <a:lstStyle/>
+          <a:p>
+            <a:pPr algn="l">
+              <a:spcAft>
+                <a:spcPts val="500"/>
+              </a:spcAft>
+            </a:pPr>
+            <a:r>
+              <a:rPr sz="1100" b="1">
+                <a:solidFill>
+                  <a:srgbClr val="1F6543"/>
+                </a:solidFill>
+                <a:latin typeface="Aptos"/>
+              </a:rPr>
+              <a:t>REAL DATA · one field, stored observations</a:t>
+            </a:r>
+          </a:p>
+        </p:txBody>
+      </p:sp>
+    </p:spTree>
+  </p:cSld>
+  <p:clrMapOvr>
+    <a:masterClrMapping/>
+  </p:clrMapOvr>
+</p:sld>
+</file>
+
+<file path=ppt/slides/slide4.xml><?xml version="1.0" encoding="utf-8"?>
+<p:sld xmlns:a="http://schemas.openxmlformats.org/drawingml/2006/main" xmlns:p="http://schemas.openxmlformats.org/presentationml/2006/main" xmlns:r="http://schemas.openxmlformats.org/officeDocument/2006/relationships">
+  <p:cSld>
+    <p:bg>
+      <p:bgPr>
+        <a:solidFill>
+          <a:srgbClr val="F8F9F5"/>
+        </a:solidFill>
+        <a:effectLst/>
+      </p:bgPr>
+    </p:bg>
+    <p:spTree>
+      <p:nvGrpSpPr>
+        <p:cNvPr id="1" name=""/>
+        <p:cNvGrpSpPr/>
+        <p:nvPr/>
+      </p:nvGrpSpPr>
+      <p:grpSpPr/>
+      <p:sp>
+        <p:nvSpPr>
+          <p:cNvPr id="2" name="TextBox 1"/>
+          <p:cNvSpPr txBox="1"/>
+          <p:nvPr/>
+        </p:nvSpPr>
+        <p:spPr>
+          <a:xfrm>
+            <a:off x="502920" y="256032"/>
+            <a:ext cx="10972800" cy="256032"/>
+          </a:xfrm>
+          <a:prstGeom prst="rect">
+            <a:avLst/>
+          </a:prstGeom>
+          <a:noFill/>
+        </p:spPr>
+        <p:txBody>
+          <a:bodyPr wrap="square">
+            <a:spAutoFit/>
+          </a:bodyPr>
+          <a:lstStyle/>
+          <a:p>
+            <a:pPr algn="l">
+              <a:spcAft>
+                <a:spcPts val="500"/>
+              </a:spcAft>
+            </a:pPr>
+            <a:r>
+              <a:rPr sz="1100" b="1">
+                <a:solidFill>
+                  <a:srgbClr val="1F6543"/>
+                </a:solidFill>
+                <a:latin typeface="Aptos"/>
+              </a:rPr>
+              <a:t>REAL DATA · RULE-BASED</a:t>
+            </a:r>
+          </a:p>
+        </p:txBody>
+      </p:sp>
+      <p:sp>
+        <p:nvSpPr>
+          <p:cNvPr id="3" name="TextBox 2"/>
+          <p:cNvSpPr txBox="1"/>
+          <p:nvPr/>
+        </p:nvSpPr>
+        <p:spPr>
+          <a:xfrm>
+            <a:off x="502920" y="566928"/>
+            <a:ext cx="11064240" cy="685800"/>
+          </a:xfrm>
+          <a:prstGeom prst="rect">
+            <a:avLst/>
+          </a:prstGeom>
+          <a:noFill/>
+        </p:spPr>
+        <p:txBody>
+          <a:bodyPr wrap="square">
+            <a:spAutoFit/>
+          </a:bodyPr>
+          <a:lstStyle/>
+          <a:p>
+            <a:pPr algn="l">
+              <a:spcAft>
+                <a:spcPts val="500"/>
+              </a:spcAft>
+            </a:pPr>
+            <a:r>
+              <a:rPr sz="2700" b="1">
+                <a:solidFill>
+                  <a:srgbClr val="1B2821"/>
+                </a:solidFill>
+                <a:latin typeface="Aptos"/>
+              </a:rPr>
+              <a:t>Candidate area depends on the rule tier</a:t>
+            </a:r>
+          </a:p>
+        </p:txBody>
+      </p:sp>
+      <p:sp>
+        <p:nvSpPr>
+          <p:cNvPr id="4" name="TextBox 3"/>
+          <p:cNvSpPr txBox="1"/>
+          <p:nvPr/>
+        </p:nvSpPr>
+        <p:spPr>
+          <a:xfrm>
+            <a:off x="502920" y="6419088"/>
+            <a:ext cx="10698480" cy="256032"/>
+          </a:xfrm>
+          <a:prstGeom prst="rect">
+            <a:avLst/>
+          </a:prstGeom>
+          <a:noFill/>
+        </p:spPr>
+        <p:txBody>
+          <a:bodyPr wrap="square">
+            <a:spAutoFit/>
+          </a:bodyPr>
+          <a:lstStyle/>
+          <a:p>
+            <a:pPr algn="l">
+              <a:spcAft>
+                <a:spcPts val="500"/>
+              </a:spcAft>
+            </a:pPr>
+            <a:r>
+              <a:rPr sz="800" b="0">
+                <a:solidFill>
+                  <a:srgbClr val="5B695F"/>
+                </a:solidFill>
+                <a:latin typeface="Aptos"/>
+              </a:rPr>
+              <a:t>Source: burn_candidate_summary.json and FINAL_JUDGE_EVIDENCE.md; full-revisit areas use non-overlapping 20 m pixels.</a:t>
+            </a:r>
+          </a:p>
+        </p:txBody>
+      </p:sp>
+      <p:sp>
+        <p:nvSpPr>
+          <p:cNvPr id="5" name="TextBox 4"/>
+          <p:cNvSpPr txBox="1"/>
+          <p:nvPr/>
+        </p:nvSpPr>
+        <p:spPr>
+          <a:xfrm>
+            <a:off x="11109960" y="6419088"/>
+            <a:ext cx="548640" cy="256032"/>
+          </a:xfrm>
+          <a:prstGeom prst="rect">
+            <a:avLst/>
+          </a:prstGeom>
+          <a:noFill/>
+        </p:spPr>
+        <p:txBody>
+          <a:bodyPr wrap="square">
+            <a:spAutoFit/>
+          </a:bodyPr>
+          <a:lstStyle/>
+          <a:p>
+            <a:pPr algn="r">
+              <a:spcAft>
+                <a:spcPts val="500"/>
+              </a:spcAft>
+            </a:pPr>
+            <a:r>
+              <a:rPr sz="800" b="0">
+                <a:solidFill>
+                  <a:srgbClr val="5B695F"/>
+                </a:solidFill>
+                <a:latin typeface="Aptos"/>
+              </a:rPr>
+              <a:t>4</a:t>
             </a:r>
           </a:p>
         </p:txBody>
@@ -6768,23 +5513,20 @@
         </p:nvSpPr>
         <p:spPr>
           <a:xfrm>
-            <a:off x="548640" y="1645920"/>
-            <a:ext cx="2377440" cy="1188720"/>
+            <a:off x="685800" y="1554480"/>
+            <a:ext cx="5212080" cy="3566160"/>
           </a:xfrm>
           <a:prstGeom prst="roundRect">
-            <a:avLst>
-              <a:gd name="adj" fmla="val 8000"/>
-            </a:avLst>
+            <a:avLst/>
           </a:prstGeom>
           <a:solidFill>
             <a:srgbClr val="FFFFFF"/>
           </a:solidFill>
           <a:ln>
             <a:solidFill>
-              <a:srgbClr val="D9DCD5"/>
+              <a:srgbClr val="E6EFE6"/>
             </a:solidFill>
           </a:ln>
-          <a:effectLst/>
         </p:spPr>
         <p:style>
           <a:lnRef idx="1">
@@ -6801,29 +5543,32 @@
           </a:fontRef>
         </p:style>
         <p:txBody>
-          <a:bodyPr rtlCol="0" anchor="ctr" wrap="square" lIns="109728" rIns="109728"/>
+          <a:bodyPr rtlCol="0" anchor="ctr" wrap="square" lIns="146304" rIns="128016" tIns="109728"/>
           <a:lstStyle/>
           <a:p>
             <a:pPr algn="ctr"/>
             <a:r>
-              <a:rPr sz="1300" b="1">
-                <a:solidFill>
-                  <a:srgbClr val="0B0B0B"/>
-                </a:solidFill>
-                <a:latin typeface="Segoe UI"/>
-              </a:rPr>
-              <a:t>Sentinel-2 L2A</a:t>
-            </a:r>
-          </a:p>
-          <a:p>
-            <a:r>
-              <a:rPr sz="1050">
-                <a:solidFill>
-                  <a:srgbClr val="52514E"/>
-                </a:solidFill>
-                <a:latin typeface="Segoe UI"/>
-              </a:rPr>
-              <a:t>74 scenes 2023–2026 on one 20 m grid; reflectance offset harmonised</a:t>
+              <a:rPr sz="1500" b="1">
+                <a:solidFill>
+                  <a:srgbClr val="1F6543"/>
+                </a:solidFill>
+              </a:rPr>
+              <a:t>LOOSE_BURN_CANDIDATE</a:t>
+            </a:r>
+          </a:p>
+          <a:p>
+            <a:pPr>
+              <a:spcBef>
+                <a:spcPts val="800"/>
+              </a:spcBef>
+            </a:pPr>
+            <a:r>
+              <a:rPr sz="1200">
+                <a:solidFill>
+                  <a:srgbClr val="1B2821"/>
+                </a:solidFill>
+              </a:rPr>
+              <a:t>2023: 21,121 ha  |  2024: 10,566 ha  |  2025: 22,941 ha. Full-revisit, exploratory rule-based area.</a:t>
             </a:r>
           </a:p>
         </p:txBody>
@@ -6836,23 +5581,20 @@
         </p:nvSpPr>
         <p:spPr>
           <a:xfrm>
-            <a:off x="3291840" y="1645920"/>
-            <a:ext cx="2560320" cy="1188720"/>
+            <a:off x="6263640" y="1554480"/>
+            <a:ext cx="5212080" cy="3566160"/>
           </a:xfrm>
           <a:prstGeom prst="roundRect">
-            <a:avLst>
-              <a:gd name="adj" fmla="val 8000"/>
-            </a:avLst>
+            <a:avLst/>
           </a:prstGeom>
           <a:solidFill>
             <a:srgbClr val="FFFFFF"/>
           </a:solidFill>
           <a:ln>
             <a:solidFill>
-              <a:srgbClr val="D9DCD5"/>
+              <a:srgbClr val="E6EFE6"/>
             </a:solidFill>
           </a:ln>
-          <a:effectLst/>
         </p:spPr>
         <p:style>
           <a:lnRef idx="1">
@@ -6869,29 +5611,331 @@
           </a:fontRef>
         </p:style>
         <p:txBody>
-          <a:bodyPr rtlCol="0" anchor="ctr" wrap="square" lIns="109728" rIns="109728"/>
+          <a:bodyPr rtlCol="0" anchor="ctr" wrap="square" lIns="146304" rIns="128016" tIns="109728"/>
           <a:lstStyle/>
           <a:p>
             <a:pPr algn="ctr"/>
             <a:r>
+              <a:rPr sz="1500" b="1">
+                <a:solidFill>
+                  <a:srgbClr val="DEA639"/>
+                </a:solidFill>
+              </a:rPr>
+              <a:t>STRICT_BURN_CANDIDATE</a:t>
+            </a:r>
+          </a:p>
+          <a:p>
+            <a:pPr>
+              <a:spcBef>
+                <a:spcPts val="800"/>
+              </a:spcBef>
+            </a:pPr>
+            <a:r>
+              <a:rPr sz="1200">
+                <a:solidFill>
+                  <a:srgbClr val="1B2821"/>
+                </a:solidFill>
+              </a:rPr>
+              <a:t>2023: 649 ha  |  2024: 1,022 ha  |  2025: 2,269 ha. Not a trend: haze/cloud changes clean pre-event coverage.</a:t>
+            </a:r>
+          </a:p>
+        </p:txBody>
+      </p:sp>
+      <p:sp>
+        <p:nvSpPr>
+          <p:cNvPr id="8" name="TextBox 7"/>
+          <p:cNvSpPr txBox="1"/>
+          <p:nvPr/>
+        </p:nvSpPr>
+        <p:spPr>
+          <a:xfrm>
+            <a:off x="777240" y="5440680"/>
+            <a:ext cx="10424160" cy="457200"/>
+          </a:xfrm>
+          <a:prstGeom prst="rect">
+            <a:avLst/>
+          </a:prstGeom>
+          <a:noFill/>
+        </p:spPr>
+        <p:txBody>
+          <a:bodyPr wrap="square">
+            <a:spAutoFit/>
+          </a:bodyPr>
+          <a:lstStyle/>
+          <a:p>
+            <a:pPr algn="l">
+              <a:spcAft>
+                <a:spcPts val="500"/>
+              </a:spcAft>
+            </a:pPr>
+            <a:r>
               <a:rPr sz="1300" b="1">
                 <a:solidFill>
-                  <a:srgbClr val="0B0B0B"/>
-                </a:solidFill>
-                <a:latin typeface="Segoe UI"/>
-              </a:rPr>
-              <a:t>170,623 field time series</a:t>
-            </a:r>
-          </a:p>
-          <a:p>
-            <a:r>
-              <a:rPr sz="1050">
-                <a:solidFill>
-                  <a:srgbClr val="52514E"/>
-                </a:solidFill>
-                <a:latin typeface="Segoe UI"/>
-              </a:rPr>
-              <a:t>12.6 M observations · Fields of The World boundaries</a:t>
+                  <a:srgbClr val="1B2821"/>
+                </a:solidFill>
+                <a:latin typeface="Aptos"/>
+              </a:rPr>
+              <a:t>All outputs are RULE-BASED BURN CANDIDATES. Human review labels completed: 0.</a:t>
+            </a:r>
+          </a:p>
+        </p:txBody>
+      </p:sp>
+    </p:spTree>
+  </p:cSld>
+  <p:clrMapOvr>
+    <a:masterClrMapping/>
+  </p:clrMapOvr>
+</p:sld>
+</file>
+
+<file path=ppt/slides/slide5.xml><?xml version="1.0" encoding="utf-8"?>
+<p:sld xmlns:a="http://schemas.openxmlformats.org/drawingml/2006/main" xmlns:p="http://schemas.openxmlformats.org/presentationml/2006/main" xmlns:r="http://schemas.openxmlformats.org/officeDocument/2006/relationships">
+  <p:cSld>
+    <p:bg>
+      <p:bgPr>
+        <a:solidFill>
+          <a:srgbClr val="F8F9F5"/>
+        </a:solidFill>
+        <a:effectLst/>
+      </p:bgPr>
+    </p:bg>
+    <p:spTree>
+      <p:nvGrpSpPr>
+        <p:cNvPr id="1" name=""/>
+        <p:cNvGrpSpPr/>
+        <p:nvPr/>
+      </p:nvGrpSpPr>
+      <p:grpSpPr/>
+      <p:sp>
+        <p:nvSpPr>
+          <p:cNvPr id="2" name="TextBox 1"/>
+          <p:cNvSpPr txBox="1"/>
+          <p:nvPr/>
+        </p:nvSpPr>
+        <p:spPr>
+          <a:xfrm>
+            <a:off x="502920" y="256032"/>
+            <a:ext cx="10972800" cy="256032"/>
+          </a:xfrm>
+          <a:prstGeom prst="rect">
+            <a:avLst/>
+          </a:prstGeom>
+          <a:noFill/>
+        </p:spPr>
+        <p:txBody>
+          <a:bodyPr wrap="square">
+            <a:spAutoFit/>
+          </a:bodyPr>
+          <a:lstStyle/>
+          <a:p>
+            <a:pPr algn="l">
+              <a:spcAft>
+                <a:spcPts val="500"/>
+              </a:spcAft>
+            </a:pPr>
+            <a:r>
+              <a:rPr sz="1100" b="1">
+                <a:solidFill>
+                  <a:srgbClr val="1F6543"/>
+                </a:solidFill>
+                <a:latin typeface="Aptos"/>
+              </a:rPr>
+              <a:t>DIFFERENTIATOR</a:t>
+            </a:r>
+          </a:p>
+        </p:txBody>
+      </p:sp>
+      <p:sp>
+        <p:nvSpPr>
+          <p:cNvPr id="3" name="TextBox 2"/>
+          <p:cNvSpPr txBox="1"/>
+          <p:nvPr/>
+        </p:nvSpPr>
+        <p:spPr>
+          <a:xfrm>
+            <a:off x="502920" y="566928"/>
+            <a:ext cx="11064240" cy="685800"/>
+          </a:xfrm>
+          <a:prstGeom prst="rect">
+            <a:avLst/>
+          </a:prstGeom>
+          <a:noFill/>
+        </p:spPr>
+        <p:txBody>
+          <a:bodyPr wrap="square">
+            <a:spAutoFit/>
+          </a:bodyPr>
+          <a:lstStyle/>
+          <a:p>
+            <a:pPr algn="l">
+              <a:spcAft>
+                <a:spcPts val="500"/>
+              </a:spcAft>
+            </a:pPr>
+            <a:r>
+              <a:rPr sz="2700" b="1">
+                <a:solidFill>
+                  <a:srgbClr val="1B2821"/>
+                </a:solidFill>
+                <a:latin typeface="Aptos"/>
+              </a:rPr>
+              <a:t>Optical candidates and thermal context answer different questions</a:t>
+            </a:r>
+          </a:p>
+        </p:txBody>
+      </p:sp>
+      <p:sp>
+        <p:nvSpPr>
+          <p:cNvPr id="4" name="TextBox 3"/>
+          <p:cNvSpPr txBox="1"/>
+          <p:nvPr/>
+        </p:nvSpPr>
+        <p:spPr>
+          <a:xfrm>
+            <a:off x="502920" y="6419088"/>
+            <a:ext cx="10698480" cy="256032"/>
+          </a:xfrm>
+          <a:prstGeom prst="rect">
+            <a:avLst/>
+          </a:prstGeom>
+          <a:noFill/>
+        </p:spPr>
+        <p:txBody>
+          <a:bodyPr wrap="square">
+            <a:spAutoFit/>
+          </a:bodyPr>
+          <a:lstStyle/>
+          <a:p>
+            <a:pPr algn="l">
+              <a:spcAft>
+                <a:spcPts val="500"/>
+              </a:spcAft>
+            </a:pPr>
+            <a:r>
+              <a:rPr sz="800" b="0">
+                <a:solidFill>
+                  <a:srgbClr val="5B695F"/>
+                </a:solidFill>
+                <a:latin typeface="Aptos"/>
+              </a:rPr>
+              <a:t>Source: 2025 strict-candidate / VIIRS matching analysis; defined ≤5-day evidence window; 500 m centroid radius.</a:t>
+            </a:r>
+          </a:p>
+        </p:txBody>
+      </p:sp>
+      <p:sp>
+        <p:nvSpPr>
+          <p:cNvPr id="5" name="TextBox 4"/>
+          <p:cNvSpPr txBox="1"/>
+          <p:nvPr/>
+        </p:nvSpPr>
+        <p:spPr>
+          <a:xfrm>
+            <a:off x="11109960" y="6419088"/>
+            <a:ext cx="548640" cy="256032"/>
+          </a:xfrm>
+          <a:prstGeom prst="rect">
+            <a:avLst/>
+          </a:prstGeom>
+          <a:noFill/>
+        </p:spPr>
+        <p:txBody>
+          <a:bodyPr wrap="square">
+            <a:spAutoFit/>
+          </a:bodyPr>
+          <a:lstStyle/>
+          <a:p>
+            <a:pPr algn="r">
+              <a:spcAft>
+                <a:spcPts val="500"/>
+              </a:spcAft>
+            </a:pPr>
+            <a:r>
+              <a:rPr sz="800" b="0">
+                <a:solidFill>
+                  <a:srgbClr val="5B695F"/>
+                </a:solidFill>
+                <a:latin typeface="Aptos"/>
+              </a:rPr>
+              <a:t>5</a:t>
+            </a:r>
+          </a:p>
+        </p:txBody>
+      </p:sp>
+      <p:sp>
+        <p:nvSpPr>
+          <p:cNvPr id="6" name="TextBox 5"/>
+          <p:cNvSpPr txBox="1"/>
+          <p:nvPr/>
+        </p:nvSpPr>
+        <p:spPr>
+          <a:xfrm>
+            <a:off x="777240" y="1645920"/>
+            <a:ext cx="4023360" cy="1097280"/>
+          </a:xfrm>
+          <a:prstGeom prst="rect">
+            <a:avLst/>
+          </a:prstGeom>
+          <a:noFill/>
+        </p:spPr>
+        <p:txBody>
+          <a:bodyPr wrap="square">
+            <a:spAutoFit/>
+          </a:bodyPr>
+          <a:lstStyle/>
+          <a:p>
+            <a:pPr algn="l">
+              <a:spcAft>
+                <a:spcPts val="500"/>
+              </a:spcAft>
+            </a:pPr>
+            <a:r>
+              <a:rPr sz="4800" b="1">
+                <a:solidFill>
+                  <a:srgbClr val="1F6543"/>
+                </a:solidFill>
+                <a:latin typeface="Aptos"/>
+              </a:rPr>
+              <a:t>8.8%</a:t>
+            </a:r>
+          </a:p>
+        </p:txBody>
+      </p:sp>
+      <p:sp>
+        <p:nvSpPr>
+          <p:cNvPr id="7" name="TextBox 6"/>
+          <p:cNvSpPr txBox="1"/>
+          <p:nvPr/>
+        </p:nvSpPr>
+        <p:spPr>
+          <a:xfrm>
+            <a:off x="822960" y="2743200"/>
+            <a:ext cx="3840480" cy="914400"/>
+          </a:xfrm>
+          <a:prstGeom prst="rect">
+            <a:avLst/>
+          </a:prstGeom>
+          <a:noFill/>
+        </p:spPr>
+        <p:txBody>
+          <a:bodyPr wrap="square">
+            <a:spAutoFit/>
+          </a:bodyPr>
+          <a:lstStyle/>
+          <a:p>
+            <a:pPr algn="l">
+              <a:spcAft>
+                <a:spcPts val="500"/>
+              </a:spcAft>
+            </a:pPr>
+            <a:r>
+              <a:rPr sz="1600" b="0">
+                <a:solidFill>
+                  <a:srgbClr val="1B2821"/>
+                </a:solidFill>
+                <a:latin typeface="Aptos"/>
+              </a:rPr>
+              <a:t>of 2025 strict optical candidates had a matched VIIRS active-fire detection within the defined window.</a:t>
             </a:r>
           </a:p>
         </p:txBody>
@@ -6904,23 +5948,20 @@
         </p:nvSpPr>
         <p:spPr>
           <a:xfrm>
-            <a:off x="6217920" y="1645920"/>
-            <a:ext cx="2651760" cy="1188720"/>
+            <a:off x="4800600" y="1645920"/>
+            <a:ext cx="6537960" cy="1691640"/>
           </a:xfrm>
           <a:prstGeom prst="roundRect">
-            <a:avLst>
-              <a:gd name="adj" fmla="val 8000"/>
-            </a:avLst>
+            <a:avLst/>
           </a:prstGeom>
           <a:solidFill>
             <a:srgbClr val="FFFFFF"/>
           </a:solidFill>
           <a:ln>
             <a:solidFill>
-              <a:srgbClr val="D9DCD5"/>
+              <a:srgbClr val="E6EFE6"/>
             </a:solidFill>
           </a:ln>
-          <a:effectLst/>
         </p:spPr>
         <p:style>
           <a:lnRef idx="1">
@@ -6937,29 +5978,32 @@
           </a:fontRef>
         </p:style>
         <p:txBody>
-          <a:bodyPr rtlCol="0" anchor="ctr" wrap="square" lIns="109728" rIns="109728"/>
+          <a:bodyPr rtlCol="0" anchor="ctr" wrap="square" lIns="146304" rIns="128016" tIns="109728"/>
           <a:lstStyle/>
           <a:p>
             <a:pPr algn="ctr"/>
             <a:r>
-              <a:rPr sz="1300" b="1">
-                <a:solidFill>
-                  <a:srgbClr val="0B0B0B"/>
-                </a:solidFill>
-                <a:latin typeface="Segoe UI"/>
-              </a:rPr>
-              <a:t>Harvest-aware, smoke-robust events</a:t>
-            </a:r>
-          </a:p>
-          <a:p>
-            <a:r>
-              <a:rPr sz="1050">
-                <a:solidFill>
-                  <a:srgbClr val="52514E"/>
-                </a:solidFill>
-                <a:latin typeface="Segoe UI"/>
-              </a:rPr>
-              <a:t>NIR/SWIR change logic dates harvest and burn per field</a:t>
+              <a:rPr sz="1500" b="1">
+                <a:solidFill>
+                  <a:srgbClr val="1F6543"/>
+                </a:solidFill>
+              </a:rPr>
+              <a:t>What the match means</a:t>
+            </a:r>
+          </a:p>
+          <a:p>
+            <a:pPr>
+              <a:spcBef>
+                <a:spcPts val="800"/>
+              </a:spcBef>
+            </a:pPr>
+            <a:r>
+              <a:rPr sz="1200">
+                <a:solidFill>
+                  <a:srgbClr val="1B2821"/>
+                </a:solidFill>
+              </a:rPr>
+              <a:t>About 9 in 10 strict optical burn candidates had no matched VIIRS active-fire detection within the defined matching window.</a:t>
             </a:r>
           </a:p>
         </p:txBody>
@@ -6972,23 +6016,20 @@
         </p:nvSpPr>
         <p:spPr>
           <a:xfrm>
-            <a:off x="9235440" y="1645920"/>
-            <a:ext cx="2377440" cy="1188720"/>
+            <a:off x="4800600" y="3657600"/>
+            <a:ext cx="6537960" cy="1371600"/>
           </a:xfrm>
           <a:prstGeom prst="roundRect">
-            <a:avLst>
-              <a:gd name="adj" fmla="val 8000"/>
-            </a:avLst>
+            <a:avLst/>
           </a:prstGeom>
           <a:solidFill>
             <a:srgbClr val="FFFFFF"/>
           </a:solidFill>
           <a:ln>
             <a:solidFill>
-              <a:srgbClr val="D9DCD5"/>
+              <a:srgbClr val="E6EFE6"/>
             </a:solidFill>
           </a:ln>
-          <a:effectLst/>
         </p:spPr>
         <p:style>
           <a:lnRef idx="1">
@@ -7005,166 +6046,240 @@
           </a:fontRef>
         </p:style>
         <p:txBody>
-          <a:bodyPr rtlCol="0" anchor="ctr" wrap="square" lIns="109728" rIns="109728"/>
+          <a:bodyPr rtlCol="0" anchor="ctr" wrap="square" lIns="146304" rIns="128016" tIns="109728"/>
           <a:lstStyle/>
           <a:p>
             <a:pPr algn="ctr"/>
             <a:r>
-              <a:rPr sz="1300" b="1">
-                <a:solidFill>
-                  <a:srgbClr val="0B0B0B"/>
-                </a:solidFill>
-                <a:latin typeface="Segoe UI"/>
-              </a:rPr>
-              <a:t>Research Evidence app</a:t>
-            </a:r>
-          </a:p>
-          <a:p>
-            <a:r>
-              <a:rPr sz="1050">
-                <a:solidFill>
-                  <a:srgbClr val="52514E"/>
-                </a:solidFill>
-                <a:latin typeface="Segoe UI"/>
-              </a:rPr>
-              <a:t>Map, figures, forecast, pre-booking list</a:t>
-            </a:r>
-          </a:p>
-        </p:txBody>
-      </p:sp>
-      <p:cxnSp>
-        <p:nvCxnSpPr>
-          <p:cNvPr id="10" name="Connector 9"/>
-          <p:cNvCxnSpPr/>
+              <a:rPr sz="1500" b="1">
+                <a:solidFill>
+                  <a:srgbClr val="DEA639"/>
+                </a:solidFill>
+              </a:rPr>
+              <a:t>Interpretation</a:t>
+            </a:r>
+          </a:p>
+          <a:p>
+            <a:pPr>
+              <a:spcBef>
+                <a:spcPts val="800"/>
+              </a:spcBef>
+            </a:pPr>
+            <a:r>
+              <a:rPr sz="1200">
+                <a:solidFill>
+                  <a:srgbClr val="1B2821"/>
+                </a:solidFill>
+              </a:rPr>
+              <a:t>VIIRS is corroborative thermal context, not ground truth or a field-level confirmation.</a:t>
+            </a:r>
+          </a:p>
+        </p:txBody>
+      </p:sp>
+    </p:spTree>
+  </p:cSld>
+  <p:clrMapOvr>
+    <a:masterClrMapping/>
+  </p:clrMapOvr>
+</p:sld>
+</file>
+
+<file path=ppt/slides/slide6.xml><?xml version="1.0" encoding="utf-8"?>
+<p:sld xmlns:a="http://schemas.openxmlformats.org/drawingml/2006/main" xmlns:p="http://schemas.openxmlformats.org/presentationml/2006/main" xmlns:r="http://schemas.openxmlformats.org/officeDocument/2006/relationships">
+  <p:cSld>
+    <p:bg>
+      <p:bgPr>
+        <a:solidFill>
+          <a:srgbClr val="F8F9F5"/>
+        </a:solidFill>
+        <a:effectLst/>
+      </p:bgPr>
+    </p:bg>
+    <p:spTree>
+      <p:nvGrpSpPr>
+        <p:cNvPr id="1" name=""/>
+        <p:cNvGrpSpPr/>
+        <p:nvPr/>
+      </p:nvGrpSpPr>
+      <p:grpSpPr/>
+      <p:sp>
+        <p:nvSpPr>
+          <p:cNvPr id="2" name="TextBox 1"/>
+          <p:cNvSpPr txBox="1"/>
           <p:nvPr/>
-        </p:nvCxnSpPr>
-        <p:spPr>
-          <a:xfrm>
-            <a:off x="2926080" y="2240280"/>
-            <a:ext cx="365760" cy="0"/>
-          </a:xfrm>
-          <a:prstGeom prst="line">
+        </p:nvSpPr>
+        <p:spPr>
+          <a:xfrm>
+            <a:off x="502920" y="256032"/>
+            <a:ext cx="10972800" cy="256032"/>
+          </a:xfrm>
+          <a:prstGeom prst="rect">
             <a:avLst/>
           </a:prstGeom>
-          <a:ln w="19050">
-            <a:solidFill>
-              <a:srgbClr val="898781"/>
-            </a:solidFill>
-            <a:tailEnd type="triangle"/>
-          </a:ln>
-        </p:spPr>
-        <p:style>
-          <a:lnRef idx="2">
-            <a:schemeClr val="accent1"/>
-          </a:lnRef>
-          <a:fillRef idx="0">
-            <a:schemeClr val="accent1"/>
-          </a:fillRef>
-          <a:effectRef idx="1">
-            <a:schemeClr val="accent1"/>
-          </a:effectRef>
-          <a:fontRef idx="minor">
-            <a:schemeClr val="tx1"/>
-          </a:fontRef>
-        </p:style>
-      </p:cxnSp>
-      <p:cxnSp>
-        <p:nvCxnSpPr>
-          <p:cNvPr id="11" name="Connector 10"/>
-          <p:cNvCxnSpPr/>
+          <a:noFill/>
+        </p:spPr>
+        <p:txBody>
+          <a:bodyPr wrap="square">
+            <a:spAutoFit/>
+          </a:bodyPr>
+          <a:lstStyle/>
+          <a:p>
+            <a:pPr algn="l">
+              <a:spcAft>
+                <a:spcPts val="500"/>
+              </a:spcAft>
+            </a:pPr>
+            <a:r>
+              <a:rPr sz="1100" b="1">
+                <a:solidFill>
+                  <a:srgbClr val="1F6543"/>
+                </a:solidFill>
+                <a:latin typeface="Aptos"/>
+              </a:rPr>
+              <a:t>ACTION CONTEXT</a:t>
+            </a:r>
+          </a:p>
+        </p:txBody>
+      </p:sp>
+      <p:sp>
+        <p:nvSpPr>
+          <p:cNvPr id="3" name="TextBox 2"/>
+          <p:cNvSpPr txBox="1"/>
           <p:nvPr/>
-        </p:nvCxnSpPr>
-        <p:spPr>
-          <a:xfrm>
-            <a:off x="5852160" y="2240280"/>
-            <a:ext cx="365760" cy="0"/>
-          </a:xfrm>
-          <a:prstGeom prst="line">
+        </p:nvSpPr>
+        <p:spPr>
+          <a:xfrm>
+            <a:off x="502920" y="566928"/>
+            <a:ext cx="11064240" cy="685800"/>
+          </a:xfrm>
+          <a:prstGeom prst="rect">
             <a:avLst/>
           </a:prstGeom>
-          <a:ln w="19050">
-            <a:solidFill>
-              <a:srgbClr val="898781"/>
-            </a:solidFill>
-            <a:tailEnd type="triangle"/>
-          </a:ln>
-        </p:spPr>
-        <p:style>
-          <a:lnRef idx="2">
-            <a:schemeClr val="accent1"/>
-          </a:lnRef>
-          <a:fillRef idx="0">
-            <a:schemeClr val="accent1"/>
-          </a:fillRef>
-          <a:effectRef idx="1">
-            <a:schemeClr val="accent1"/>
-          </a:effectRef>
-          <a:fontRef idx="minor">
-            <a:schemeClr val="tx1"/>
-          </a:fontRef>
-        </p:style>
-      </p:cxnSp>
-      <p:cxnSp>
-        <p:nvCxnSpPr>
-          <p:cNvPr id="12" name="Connector 11"/>
-          <p:cNvCxnSpPr/>
+          <a:noFill/>
+        </p:spPr>
+        <p:txBody>
+          <a:bodyPr wrap="square">
+            <a:spAutoFit/>
+          </a:bodyPr>
+          <a:lstStyle/>
+          <a:p>
+            <a:pPr algn="l">
+              <a:spcAft>
+                <a:spcPts val="500"/>
+              </a:spcAft>
+            </a:pPr>
+            <a:r>
+              <a:rPr sz="2700" b="1">
+                <a:solidFill>
+                  <a:srgbClr val="1B2821"/>
+                </a:solidFill>
+                <a:latin typeface="Aptos"/>
+              </a:rPr>
+              <a:t>A reported straw figure needs its source</a:t>
+            </a:r>
+          </a:p>
+        </p:txBody>
+      </p:sp>
+      <p:sp>
+        <p:nvSpPr>
+          <p:cNvPr id="4" name="TextBox 3"/>
+          <p:cNvSpPr txBox="1"/>
           <p:nvPr/>
-        </p:nvCxnSpPr>
-        <p:spPr>
-          <a:xfrm>
-            <a:off x="8869680" y="2240280"/>
-            <a:ext cx="365760" cy="0"/>
-          </a:xfrm>
-          <a:prstGeom prst="line">
+        </p:nvSpPr>
+        <p:spPr>
+          <a:xfrm>
+            <a:off x="502920" y="6419088"/>
+            <a:ext cx="10698480" cy="256032"/>
+          </a:xfrm>
+          <a:prstGeom prst="rect">
             <a:avLst/>
           </a:prstGeom>
-          <a:ln w="19050">
-            <a:solidFill>
-              <a:srgbClr val="898781"/>
-            </a:solidFill>
-            <a:tailEnd type="triangle"/>
-          </a:ln>
-        </p:spPr>
-        <p:style>
-          <a:lnRef idx="2">
-            <a:schemeClr val="accent1"/>
-          </a:lnRef>
-          <a:fillRef idx="0">
-            <a:schemeClr val="accent1"/>
-          </a:fillRef>
-          <a:effectRef idx="1">
-            <a:schemeClr val="accent1"/>
-          </a:effectRef>
-          <a:fontRef idx="minor">
-            <a:schemeClr val="tx1"/>
-          </a:fontRef>
-        </p:style>
-      </p:cxnSp>
-      <p:sp>
-        <p:nvSpPr>
-          <p:cNvPr id="13" name="Rounded Rectangle 12"/>
+          <a:noFill/>
+        </p:spPr>
+        <p:txBody>
+          <a:bodyPr wrap="square">
+            <a:spAutoFit/>
+          </a:bodyPr>
+          <a:lstStyle/>
+          <a:p>
+            <a:pPr algn="l">
+              <a:spcAft>
+                <a:spcPts val="500"/>
+              </a:spcAft>
+            </a:pPr>
+            <a:r>
+              <a:rPr sz="800" b="0">
+                <a:solidFill>
+                  <a:srgbClr val="5B695F"/>
+                </a:solidFill>
+                <a:latin typeface="Aptos"/>
+              </a:rPr>
+              <a:t>Source: The Tribune, as cited in reference 11 of Parali Se Paisa Concept Note; news-reported estimate, not an official statistic.</a:t>
+            </a:r>
+          </a:p>
+        </p:txBody>
+      </p:sp>
+      <p:sp>
+        <p:nvSpPr>
+          <p:cNvPr id="5" name="TextBox 4"/>
+          <p:cNvSpPr txBox="1"/>
+          <p:nvPr/>
+        </p:nvSpPr>
+        <p:spPr>
+          <a:xfrm>
+            <a:off x="11109960" y="6419088"/>
+            <a:ext cx="548640" cy="256032"/>
+          </a:xfrm>
+          <a:prstGeom prst="rect">
+            <a:avLst/>
+          </a:prstGeom>
+          <a:noFill/>
+        </p:spPr>
+        <p:txBody>
+          <a:bodyPr wrap="square">
+            <a:spAutoFit/>
+          </a:bodyPr>
+          <a:lstStyle/>
+          <a:p>
+            <a:pPr algn="r">
+              <a:spcAft>
+                <a:spcPts val="500"/>
+              </a:spcAft>
+            </a:pPr>
+            <a:r>
+              <a:rPr sz="800" b="0">
+                <a:solidFill>
+                  <a:srgbClr val="5B695F"/>
+                </a:solidFill>
+                <a:latin typeface="Aptos"/>
+              </a:rPr>
+              <a:t>6</a:t>
+            </a:r>
+          </a:p>
+        </p:txBody>
+      </p:sp>
+      <p:sp>
+        <p:nvSpPr>
+          <p:cNvPr id="6" name="Rounded Rectangle 5"/>
           <p:cNvSpPr/>
           <p:nvPr/>
         </p:nvSpPr>
         <p:spPr>
           <a:xfrm>
-            <a:off x="548640" y="3520440"/>
-            <a:ext cx="2560320" cy="1143000"/>
+            <a:off x="731520" y="1691640"/>
+            <a:ext cx="5029200" cy="2286000"/>
           </a:xfrm>
           <a:prstGeom prst="roundRect">
-            <a:avLst>
-              <a:gd name="adj" fmla="val 8000"/>
-            </a:avLst>
+            <a:avLst/>
           </a:prstGeom>
           <a:solidFill>
-            <a:srgbClr val="F0F4EF"/>
+            <a:srgbClr val="FFFFFF"/>
           </a:solidFill>
           <a:ln>
             <a:solidFill>
-              <a:srgbClr val="D9DCD5"/>
+              <a:srgbClr val="E6EFE6"/>
             </a:solidFill>
           </a:ln>
-          <a:effectLst/>
         </p:spPr>
         <p:style>
           <a:lnRef idx="1">
@@ -7181,58 +6296,58 @@
           </a:fontRef>
         </p:style>
         <p:txBody>
-          <a:bodyPr rtlCol="0" anchor="ctr" wrap="square" lIns="109728" rIns="109728"/>
+          <a:bodyPr rtlCol="0" anchor="ctr" wrap="square" lIns="146304" rIns="128016" tIns="109728"/>
           <a:lstStyle/>
           <a:p>
             <a:pPr algn="ctr"/>
             <a:r>
-              <a:rPr sz="1300" b="1">
-                <a:solidFill>
-                  <a:srgbClr val="0B0B0B"/>
-                </a:solidFill>
-                <a:latin typeface="Segoe UI"/>
-              </a:rPr>
-              <a:t>Thermal blind spot</a:t>
-            </a:r>
-          </a:p>
-          <a:p>
-            <a:r>
-              <a:rPr sz="1050">
-                <a:solidFill>
-                  <a:srgbClr val="52514E"/>
-                </a:solidFill>
-                <a:latin typeface="Segoe UI"/>
-              </a:rPr>
-              <a:t>match every burn with VIIRS/MODIS alerts, with proximity controls</a:t>
-            </a:r>
-          </a:p>
-        </p:txBody>
-      </p:sp>
-      <p:sp>
-        <p:nvSpPr>
-          <p:cNvPr id="14" name="Rounded Rectangle 13"/>
+              <a:rPr sz="1500" b="1">
+                <a:solidFill>
+                  <a:srgbClr val="DEA639"/>
+                </a:solidFill>
+              </a:rPr>
+              <a:t>12.1 lakh tonnes</a:t>
+            </a:r>
+          </a:p>
+          <a:p>
+            <a:pPr>
+              <a:spcBef>
+                <a:spcPts val="800"/>
+              </a:spcBef>
+            </a:pPr>
+            <a:r>
+              <a:rPr sz="1200">
+                <a:solidFill>
+                  <a:srgbClr val="1B2821"/>
+                </a:solidFill>
+              </a:rPr>
+              <a:t>The Tribune reported this straw estimate. It is not an official statistic.</a:t>
+            </a:r>
+          </a:p>
+        </p:txBody>
+      </p:sp>
+      <p:sp>
+        <p:nvSpPr>
+          <p:cNvPr id="7" name="Rounded Rectangle 6"/>
           <p:cNvSpPr/>
           <p:nvPr/>
         </p:nvSpPr>
         <p:spPr>
           <a:xfrm>
-            <a:off x="3337560" y="3520440"/>
-            <a:ext cx="2560320" cy="1143000"/>
+            <a:off x="6172200" y="1691640"/>
+            <a:ext cx="5212080" cy="2286000"/>
           </a:xfrm>
           <a:prstGeom prst="roundRect">
-            <a:avLst>
-              <a:gd name="adj" fmla="val 8000"/>
-            </a:avLst>
+            <a:avLst/>
           </a:prstGeom>
           <a:solidFill>
-            <a:srgbClr val="F0F4EF"/>
+            <a:srgbClr val="FFFFFF"/>
           </a:solidFill>
           <a:ln>
             <a:solidFill>
-              <a:srgbClr val="D9DCD5"/>
+              <a:srgbClr val="E6EFE6"/>
             </a:solidFill>
           </a:ln>
-          <a:effectLst/>
         </p:spPr>
         <p:style>
           <a:lnRef idx="1">
@@ -7249,58 +6364,587 @@
           </a:fontRef>
         </p:style>
         <p:txBody>
-          <a:bodyPr rtlCol="0" anchor="ctr" wrap="square" lIns="109728" rIns="109728"/>
+          <a:bodyPr rtlCol="0" anchor="ctr" wrap="square" lIns="146304" rIns="128016" tIns="109728"/>
           <a:lstStyle/>
           <a:p>
             <a:pPr algn="ctr"/>
             <a:r>
-              <a:rPr sz="1300" b="1">
-                <a:solidFill>
-                  <a:srgbClr val="0B0B0B"/>
-                </a:solidFill>
-                <a:latin typeface="Segoe UI"/>
-              </a:rPr>
-              <a:t>Burn-risk model</a:t>
-            </a:r>
-          </a:p>
-          <a:p>
-            <a:r>
-              <a:rPr sz="1050">
-                <a:solidFill>
-                  <a:srgbClr val="52514E"/>
-                </a:solidFill>
-                <a:latin typeface="Segoe UI"/>
-              </a:rPr>
-              <a:t>trained on 2024, tested on the unseen 2025 season</a:t>
-            </a:r>
-          </a:p>
-        </p:txBody>
-      </p:sp>
-      <p:sp>
-        <p:nvSpPr>
-          <p:cNvPr id="15" name="Rounded Rectangle 14"/>
+              <a:rPr sz="1500" b="1">
+                <a:solidFill>
+                  <a:srgbClr val="1F6543"/>
+                </a:solidFill>
+              </a:rPr>
+              <a:t>From estimate to action</a:t>
+            </a:r>
+          </a:p>
+          <a:p>
+            <a:pPr>
+              <a:spcBef>
+                <a:spcPts val="800"/>
+              </a:spcBef>
+            </a:pPr>
+            <a:r>
+              <a:rPr sz="1200">
+                <a:solidFill>
+                  <a:srgbClr val="1B2821"/>
+                </a:solidFill>
+              </a:rPr>
+              <a:t>The product concept connects field evidence to straw pickup planning; actual supply and buyer demand still need field confirmation.</a:t>
+            </a:r>
+          </a:p>
+        </p:txBody>
+      </p:sp>
+      <p:sp>
+        <p:nvSpPr>
+          <p:cNvPr id="8" name="TextBox 7"/>
+          <p:cNvSpPr txBox="1"/>
+          <p:nvPr/>
+        </p:nvSpPr>
+        <p:spPr>
+          <a:xfrm>
+            <a:off x="822960" y="4572000"/>
+            <a:ext cx="10424160" cy="822960"/>
+          </a:xfrm>
+          <a:prstGeom prst="rect">
+            <a:avLst/>
+          </a:prstGeom>
+          <a:noFill/>
+        </p:spPr>
+        <p:txBody>
+          <a:bodyPr wrap="square">
+            <a:spAutoFit/>
+          </a:bodyPr>
+          <a:lstStyle/>
+          <a:p>
+            <a:pPr algn="l">
+              <a:spcAft>
+                <a:spcPts val="500"/>
+              </a:spcAft>
+            </a:pPr>
+            <a:r>
+              <a:rPr sz="1400" b="0">
+                <a:solidFill>
+                  <a:srgbClr val="5B695F"/>
+                </a:solidFill>
+                <a:latin typeface="Aptos"/>
+              </a:rPr>
+              <a:t>Attribution stays with the number wherever it appears: The Tribune (reference 11 in the concept note).</a:t>
+            </a:r>
+          </a:p>
+        </p:txBody>
+      </p:sp>
+    </p:spTree>
+  </p:cSld>
+  <p:clrMapOvr>
+    <a:masterClrMapping/>
+  </p:clrMapOvr>
+</p:sld>
+</file>
+
+<file path=ppt/slides/slide7.xml><?xml version="1.0" encoding="utf-8"?>
+<p:sld xmlns:a="http://schemas.openxmlformats.org/drawingml/2006/main" xmlns:p="http://schemas.openxmlformats.org/presentationml/2006/main" xmlns:r="http://schemas.openxmlformats.org/officeDocument/2006/relationships">
+  <p:cSld>
+    <p:bg>
+      <p:bgPr>
+        <a:solidFill>
+          <a:srgbClr val="F8F9F5"/>
+        </a:solidFill>
+        <a:effectLst/>
+      </p:bgPr>
+    </p:bg>
+    <p:spTree>
+      <p:nvGrpSpPr>
+        <p:cNvPr id="1" name=""/>
+        <p:cNvGrpSpPr/>
+        <p:nvPr/>
+      </p:nvGrpSpPr>
+      <p:grpSpPr/>
+      <p:sp>
+        <p:nvSpPr>
+          <p:cNvPr id="2" name="TextBox 1"/>
+          <p:cNvSpPr txBox="1"/>
+          <p:nvPr/>
+        </p:nvSpPr>
+        <p:spPr>
+          <a:xfrm>
+            <a:off x="502920" y="256032"/>
+            <a:ext cx="10972800" cy="256032"/>
+          </a:xfrm>
+          <a:prstGeom prst="rect">
+            <a:avLst/>
+          </a:prstGeom>
+          <a:noFill/>
+        </p:spPr>
+        <p:txBody>
+          <a:bodyPr wrap="square">
+            <a:spAutoFit/>
+          </a:bodyPr>
+          <a:lstStyle/>
+          <a:p>
+            <a:pPr algn="l">
+              <a:spcAft>
+                <a:spcPts val="500"/>
+              </a:spcAft>
+            </a:pPr>
+            <a:r>
+              <a:rPr sz="1100" b="1">
+                <a:solidFill>
+                  <a:srgbClr val="1F6543"/>
+                </a:solidFill>
+                <a:latin typeface="Aptos"/>
+              </a:rPr>
+              <a:t>DEMO / SYNTHETIC</a:t>
+            </a:r>
+          </a:p>
+        </p:txBody>
+      </p:sp>
+      <p:sp>
+        <p:nvSpPr>
+          <p:cNvPr id="3" name="TextBox 2"/>
+          <p:cNvSpPr txBox="1"/>
+          <p:nvPr/>
+        </p:nvSpPr>
+        <p:spPr>
+          <a:xfrm>
+            <a:off x="502920" y="566928"/>
+            <a:ext cx="11064240" cy="685800"/>
+          </a:xfrm>
+          <a:prstGeom prst="rect">
+            <a:avLst/>
+          </a:prstGeom>
+          <a:noFill/>
+        </p:spPr>
+        <p:txBody>
+          <a:bodyPr wrap="square">
+            <a:spAutoFit/>
+          </a:bodyPr>
+          <a:lstStyle/>
+          <a:p>
+            <a:pPr algn="l">
+              <a:spcAft>
+                <a:spcPts val="500"/>
+              </a:spcAft>
+            </a:pPr>
+            <a:r>
+              <a:rPr sz="2700" b="1">
+                <a:solidFill>
+                  <a:srgbClr val="1B2821"/>
+                </a:solidFill>
+                <a:latin typeface="Aptos"/>
+              </a:rPr>
+              <a:t>Dispatch is an operational prototype</a:t>
+            </a:r>
+          </a:p>
+        </p:txBody>
+      </p:sp>
+      <p:sp>
+        <p:nvSpPr>
+          <p:cNvPr id="4" name="TextBox 3"/>
+          <p:cNvSpPr txBox="1"/>
+          <p:nvPr/>
+        </p:nvSpPr>
+        <p:spPr>
+          <a:xfrm>
+            <a:off x="502920" y="6419088"/>
+            <a:ext cx="10698480" cy="256032"/>
+          </a:xfrm>
+          <a:prstGeom prst="rect">
+            <a:avLst/>
+          </a:prstGeom>
+          <a:noFill/>
+        </p:spPr>
+        <p:txBody>
+          <a:bodyPr wrap="square">
+            <a:spAutoFit/>
+          </a:bodyPr>
+          <a:lstStyle/>
+          <a:p>
+            <a:pPr algn="l">
+              <a:spcAft>
+                <a:spcPts val="500"/>
+              </a:spcAft>
+            </a:pPr>
+            <a:r>
+              <a:rPr sz="800" b="0">
+                <a:solidFill>
+                  <a:srgbClr val="5B695F"/>
+                </a:solidFill>
+                <a:latin typeface="Aptos"/>
+              </a:rPr>
+              <a:t>Source: isolated local server, synthetic demo fixtures; route is a straight-line GEODESIC_PROXY only.</a:t>
+            </a:r>
+          </a:p>
+        </p:txBody>
+      </p:sp>
+      <p:sp>
+        <p:nvSpPr>
+          <p:cNvPr id="5" name="TextBox 4"/>
+          <p:cNvSpPr txBox="1"/>
+          <p:nvPr/>
+        </p:nvSpPr>
+        <p:spPr>
+          <a:xfrm>
+            <a:off x="11109960" y="6419088"/>
+            <a:ext cx="548640" cy="256032"/>
+          </a:xfrm>
+          <a:prstGeom prst="rect">
+            <a:avLst/>
+          </a:prstGeom>
+          <a:noFill/>
+        </p:spPr>
+        <p:txBody>
+          <a:bodyPr wrap="square">
+            <a:spAutoFit/>
+          </a:bodyPr>
+          <a:lstStyle/>
+          <a:p>
+            <a:pPr algn="r">
+              <a:spcAft>
+                <a:spcPts val="500"/>
+              </a:spcAft>
+            </a:pPr>
+            <a:r>
+              <a:rPr sz="800" b="0">
+                <a:solidFill>
+                  <a:srgbClr val="5B695F"/>
+                </a:solidFill>
+                <a:latin typeface="Aptos"/>
+              </a:rPr>
+              <a:t>7</a:t>
+            </a:r>
+          </a:p>
+        </p:txBody>
+      </p:sp>
+      <p:pic>
+        <p:nvPicPr>
+          <p:cNvPr id="6" name="Picture 5" descr="prototype-dispatch.png"/>
+          <p:cNvPicPr>
+            <a:picLocks noChangeAspect="1"/>
+          </p:cNvPicPr>
+          <p:nvPr/>
+        </p:nvPicPr>
+        <p:blipFill>
+          <a:blip r:embed="rId3"/>
+          <a:stretch>
+            <a:fillRect/>
+          </a:stretch>
+        </p:blipFill>
+        <p:spPr>
+          <a:xfrm>
+            <a:off x="594360" y="1417320"/>
+            <a:ext cx="5394960" cy="4206240"/>
+          </a:xfrm>
+          <a:prstGeom prst="rect">
+            <a:avLst/>
+          </a:prstGeom>
+        </p:spPr>
+      </p:pic>
+      <p:pic>
+        <p:nvPicPr>
+          <p:cNvPr id="7" name="Picture 6" descr="prototype-certificate-detail.png"/>
+          <p:cNvPicPr>
+            <a:picLocks noChangeAspect="1"/>
+          </p:cNvPicPr>
+          <p:nvPr/>
+        </p:nvPicPr>
+        <p:blipFill>
+          <a:blip r:embed="rId4"/>
+          <a:stretch>
+            <a:fillRect/>
+          </a:stretch>
+        </p:blipFill>
+        <p:spPr>
+          <a:xfrm>
+            <a:off x="6217920" y="1417320"/>
+            <a:ext cx="5394960" cy="4206240"/>
+          </a:xfrm>
+          <a:prstGeom prst="rect">
+            <a:avLst/>
+          </a:prstGeom>
+        </p:spPr>
+      </p:pic>
+      <p:sp>
+        <p:nvSpPr>
+          <p:cNvPr id="8" name="TextBox 7"/>
+          <p:cNvSpPr txBox="1"/>
+          <p:nvPr/>
+        </p:nvSpPr>
+        <p:spPr>
+          <a:xfrm>
+            <a:off x="640080" y="5715000"/>
+            <a:ext cx="5212080" cy="411480"/>
+          </a:xfrm>
+          <a:prstGeom prst="rect">
+            <a:avLst/>
+          </a:prstGeom>
+          <a:noFill/>
+        </p:spPr>
+        <p:txBody>
+          <a:bodyPr wrap="square">
+            <a:spAutoFit/>
+          </a:bodyPr>
+          <a:lstStyle/>
+          <a:p>
+            <a:pPr algn="l">
+              <a:spcAft>
+                <a:spcPts val="500"/>
+              </a:spcAft>
+            </a:pPr>
+            <a:r>
+              <a:rPr sz="1100" b="1">
+                <a:solidFill>
+                  <a:srgbClr val="1F6543"/>
+                </a:solidFill>
+                <a:latin typeface="Aptos"/>
+              </a:rPr>
+              <a:t>DEMO/SYNTHETIC · route proxy</a:t>
+            </a:r>
+          </a:p>
+        </p:txBody>
+      </p:sp>
+      <p:sp>
+        <p:nvSpPr>
+          <p:cNvPr id="9" name="TextBox 8"/>
+          <p:cNvSpPr txBox="1"/>
+          <p:nvPr/>
+        </p:nvSpPr>
+        <p:spPr>
+          <a:xfrm>
+            <a:off x="6263640" y="5715000"/>
+            <a:ext cx="5212080" cy="411480"/>
+          </a:xfrm>
+          <a:prstGeom prst="rect">
+            <a:avLst/>
+          </a:prstGeom>
+          <a:noFill/>
+        </p:spPr>
+        <p:txBody>
+          <a:bodyPr wrap="square">
+            <a:spAutoFit/>
+          </a:bodyPr>
+          <a:lstStyle/>
+          <a:p>
+            <a:pPr algn="l">
+              <a:spcAft>
+                <a:spcPts val="500"/>
+              </a:spcAft>
+            </a:pPr>
+            <a:r>
+              <a:rPr sz="1100" b="1">
+                <a:solidFill>
+                  <a:srgbClr val="1F6543"/>
+                </a:solidFill>
+                <a:latin typeface="Aptos"/>
+              </a:rPr>
+              <a:t>PROTOTYPE · QR metadata only</a:t>
+            </a:r>
+          </a:p>
+        </p:txBody>
+      </p:sp>
+    </p:spTree>
+  </p:cSld>
+  <p:clrMapOvr>
+    <a:masterClrMapping/>
+  </p:clrMapOvr>
+</p:sld>
+</file>
+
+<file path=ppt/slides/slide8.xml><?xml version="1.0" encoding="utf-8"?>
+<p:sld xmlns:a="http://schemas.openxmlformats.org/drawingml/2006/main" xmlns:p="http://schemas.openxmlformats.org/presentationml/2006/main" xmlns:r="http://schemas.openxmlformats.org/officeDocument/2006/relationships">
+  <p:cSld>
+    <p:bg>
+      <p:bgPr>
+        <a:solidFill>
+          <a:srgbClr val="F8F9F5"/>
+        </a:solidFill>
+        <a:effectLst/>
+      </p:bgPr>
+    </p:bg>
+    <p:spTree>
+      <p:nvGrpSpPr>
+        <p:cNvPr id="1" name=""/>
+        <p:cNvGrpSpPr/>
+        <p:nvPr/>
+      </p:nvGrpSpPr>
+      <p:grpSpPr/>
+      <p:sp>
+        <p:nvSpPr>
+          <p:cNvPr id="2" name="TextBox 1"/>
+          <p:cNvSpPr txBox="1"/>
+          <p:nvPr/>
+        </p:nvSpPr>
+        <p:spPr>
+          <a:xfrm>
+            <a:off x="502920" y="256032"/>
+            <a:ext cx="10972800" cy="256032"/>
+          </a:xfrm>
+          <a:prstGeom prst="rect">
+            <a:avLst/>
+          </a:prstGeom>
+          <a:noFill/>
+        </p:spPr>
+        <p:txBody>
+          <a:bodyPr wrap="square">
+            <a:spAutoFit/>
+          </a:bodyPr>
+          <a:lstStyle/>
+          <a:p>
+            <a:pPr algn="l">
+              <a:spcAft>
+                <a:spcPts val="500"/>
+              </a:spcAft>
+            </a:pPr>
+            <a:r>
+              <a:rPr sz="1100" b="1">
+                <a:solidFill>
+                  <a:srgbClr val="1F6543"/>
+                </a:solidFill>
+                <a:latin typeface="Aptos"/>
+              </a:rPr>
+              <a:t>LIMITS</a:t>
+            </a:r>
+          </a:p>
+        </p:txBody>
+      </p:sp>
+      <p:sp>
+        <p:nvSpPr>
+          <p:cNvPr id="3" name="TextBox 2"/>
+          <p:cNvSpPr txBox="1"/>
+          <p:nvPr/>
+        </p:nvSpPr>
+        <p:spPr>
+          <a:xfrm>
+            <a:off x="502920" y="566928"/>
+            <a:ext cx="11064240" cy="685800"/>
+          </a:xfrm>
+          <a:prstGeom prst="rect">
+            <a:avLst/>
+          </a:prstGeom>
+          <a:noFill/>
+        </p:spPr>
+        <p:txBody>
+          <a:bodyPr wrap="square">
+            <a:spAutoFit/>
+          </a:bodyPr>
+          <a:lstStyle/>
+          <a:p>
+            <a:pPr algn="l">
+              <a:spcAft>
+                <a:spcPts val="500"/>
+              </a:spcAft>
+            </a:pPr>
+            <a:r>
+              <a:rPr sz="2700" b="1">
+                <a:solidFill>
+                  <a:srgbClr val="1B2821"/>
+                </a:solidFill>
+                <a:latin typeface="Aptos"/>
+              </a:rPr>
+              <a:t>What the evidence can and cannot support</a:t>
+            </a:r>
+          </a:p>
+        </p:txBody>
+      </p:sp>
+      <p:sp>
+        <p:nvSpPr>
+          <p:cNvPr id="4" name="TextBox 3"/>
+          <p:cNvSpPr txBox="1"/>
+          <p:nvPr/>
+        </p:nvSpPr>
+        <p:spPr>
+          <a:xfrm>
+            <a:off x="502920" y="6419088"/>
+            <a:ext cx="10698480" cy="256032"/>
+          </a:xfrm>
+          <a:prstGeom prst="rect">
+            <a:avLst/>
+          </a:prstGeom>
+          <a:noFill/>
+        </p:spPr>
+        <p:txBody>
+          <a:bodyPr wrap="square">
+            <a:spAutoFit/>
+          </a:bodyPr>
+          <a:lstStyle/>
+          <a:p>
+            <a:pPr algn="l">
+              <a:spcAft>
+                <a:spcPts val="500"/>
+              </a:spcAft>
+            </a:pPr>
+            <a:r>
+              <a:rPr sz="800" b="0">
+                <a:solidFill>
+                  <a:srgbClr val="5B695F"/>
+                </a:solidFill>
+                <a:latin typeface="Aptos"/>
+              </a:rPr>
+              <a:t>Source: FINAL_JUDGE_EVIDENCE.md; RESEARCH_SUMMARY.md; RESEARCH_METHODS.md.</a:t>
+            </a:r>
+          </a:p>
+        </p:txBody>
+      </p:sp>
+      <p:sp>
+        <p:nvSpPr>
+          <p:cNvPr id="5" name="TextBox 4"/>
+          <p:cNvSpPr txBox="1"/>
+          <p:nvPr/>
+        </p:nvSpPr>
+        <p:spPr>
+          <a:xfrm>
+            <a:off x="11109960" y="6419088"/>
+            <a:ext cx="548640" cy="256032"/>
+          </a:xfrm>
+          <a:prstGeom prst="rect">
+            <a:avLst/>
+          </a:prstGeom>
+          <a:noFill/>
+        </p:spPr>
+        <p:txBody>
+          <a:bodyPr wrap="square">
+            <a:spAutoFit/>
+          </a:bodyPr>
+          <a:lstStyle/>
+          <a:p>
+            <a:pPr algn="r">
+              <a:spcAft>
+                <a:spcPts val="500"/>
+              </a:spcAft>
+            </a:pPr>
+            <a:r>
+              <a:rPr sz="800" b="0">
+                <a:solidFill>
+                  <a:srgbClr val="5B695F"/>
+                </a:solidFill>
+                <a:latin typeface="Aptos"/>
+              </a:rPr>
+              <a:t>8</a:t>
+            </a:r>
+          </a:p>
+        </p:txBody>
+      </p:sp>
+      <p:sp>
+        <p:nvSpPr>
+          <p:cNvPr id="6" name="Rounded Rectangle 5"/>
           <p:cNvSpPr/>
           <p:nvPr/>
         </p:nvSpPr>
         <p:spPr>
           <a:xfrm>
-            <a:off x="6126479" y="3520440"/>
-            <a:ext cx="2560320" cy="1143000"/>
+            <a:off x="640080" y="1645920"/>
+            <a:ext cx="5029200" cy="1554480"/>
           </a:xfrm>
           <a:prstGeom prst="roundRect">
-            <a:avLst>
-              <a:gd name="adj" fmla="val 8000"/>
-            </a:avLst>
+            <a:avLst/>
           </a:prstGeom>
           <a:solidFill>
-            <a:srgbClr val="F0F4EF"/>
+            <a:srgbClr val="FFFFFF"/>
           </a:solidFill>
           <a:ln>
             <a:solidFill>
-              <a:srgbClr val="D9DCD5"/>
+              <a:srgbClr val="E6EFE6"/>
             </a:solidFill>
           </a:ln>
-          <a:effectLst/>
         </p:spPr>
         <p:style>
           <a:lnRef idx="1">
@@ -7317,58 +6961,58 @@
           </a:fontRef>
         </p:style>
         <p:txBody>
-          <a:bodyPr rtlCol="0" anchor="ctr" wrap="square" lIns="109728" rIns="109728"/>
+          <a:bodyPr rtlCol="0" anchor="ctr" wrap="square" lIns="146304" rIns="128016" tIns="109728"/>
           <a:lstStyle/>
           <a:p>
             <a:pPr algn="ctr"/>
             <a:r>
-              <a:rPr sz="1300" b="1">
-                <a:solidFill>
-                  <a:srgbClr val="0B0B0B"/>
-                </a:solidFill>
-                <a:latin typeface="Segoe UI"/>
-              </a:rPr>
-              <a:t>Season-replay twin</a:t>
-            </a:r>
-          </a:p>
-          <a:p>
-            <a:r>
-              <a:rPr sz="1050">
-                <a:solidFill>
-                  <a:srgbClr val="52514E"/>
-                </a:solidFill>
-                <a:latin typeface="Segoe UI"/>
-              </a:rPr>
-              <a:t>replay real 2025 harvests and burns with baler fleets</a:t>
-            </a:r>
-          </a:p>
-        </p:txBody>
-      </p:sp>
-      <p:sp>
-        <p:nvSpPr>
-          <p:cNvPr id="16" name="Rounded Rectangle 15"/>
+              <a:rPr sz="1500" b="1">
+                <a:solidFill>
+                  <a:srgbClr val="DEA639"/>
+                </a:solidFill>
+              </a:rPr>
+              <a:t>No human validation yet</a:t>
+            </a:r>
+          </a:p>
+          <a:p>
+            <a:pPr>
+              <a:spcBef>
+                <a:spcPts val="800"/>
+              </a:spcBef>
+            </a:pPr>
+            <a:r>
+              <a:rPr sz="1200">
+                <a:solidFill>
+                  <a:srgbClr val="1B2821"/>
+                </a:solidFill>
+              </a:rPr>
+              <a:t>0 completed blinded labels</a:t>
+            </a:r>
+          </a:p>
+        </p:txBody>
+      </p:sp>
+      <p:sp>
+        <p:nvSpPr>
+          <p:cNvPr id="7" name="Rounded Rectangle 6"/>
           <p:cNvSpPr/>
           <p:nvPr/>
         </p:nvSpPr>
         <p:spPr>
           <a:xfrm>
-            <a:off x="8915399" y="3520440"/>
-            <a:ext cx="2560320" cy="1143000"/>
+            <a:off x="6263640" y="1645920"/>
+            <a:ext cx="5029200" cy="1554480"/>
           </a:xfrm>
           <a:prstGeom prst="roundRect">
-            <a:avLst>
-              <a:gd name="adj" fmla="val 8000"/>
-            </a:avLst>
+            <a:avLst/>
           </a:prstGeom>
           <a:solidFill>
-            <a:srgbClr val="F0F4EF"/>
+            <a:srgbClr val="FFFFFF"/>
           </a:solidFill>
           <a:ln>
             <a:solidFill>
-              <a:srgbClr val="D9DCD5"/>
+              <a:srgbClr val="E6EFE6"/>
             </a:solidFill>
           </a:ln>
-          <a:effectLst/>
         </p:spPr>
         <p:style>
           <a:lnRef idx="1">
@@ -7385,1797 +7029,168 @@
           </a:fontRef>
         </p:style>
         <p:txBody>
-          <a:bodyPr rtlCol="0" anchor="ctr" wrap="square" lIns="109728" rIns="109728"/>
+          <a:bodyPr rtlCol="0" anchor="ctr" wrap="square" lIns="146304" rIns="128016" tIns="109728"/>
           <a:lstStyle/>
           <a:p>
             <a:pPr algn="ctr"/>
             <a:r>
-              <a:rPr sz="1300" b="1">
-                <a:solidFill>
-                  <a:srgbClr val="0B0B0B"/>
-                </a:solidFill>
-                <a:latin typeface="Segoe UI"/>
-              </a:rPr>
-              <a:t>Live 2026 nowcast</a:t>
-            </a:r>
-          </a:p>
-          <a:p>
-            <a:r>
-              <a:rPr sz="1050">
-                <a:solidFill>
-                  <a:srgbClr val="52514E"/>
-                </a:solidFill>
-                <a:latin typeface="Segoe UI"/>
-              </a:rPr>
-              <a:t>harvest progress, weekly straw supply, pre-booking</a:t>
-            </a:r>
-          </a:p>
-        </p:txBody>
-      </p:sp>
-      <p:cxnSp>
-        <p:nvCxnSpPr>
-          <p:cNvPr id="17" name="Connector 16"/>
-          <p:cNvCxnSpPr/>
+              <a:rPr sz="1500" b="1">
+                <a:solidFill>
+                  <a:srgbClr val="DEA639"/>
+                </a:solidFill>
+              </a:rPr>
+              <a:t>No strict trend</a:t>
+            </a:r>
+          </a:p>
+          <a:p>
+            <a:pPr>
+              <a:spcBef>
+                <a:spcPts val="800"/>
+              </a:spcBef>
+            </a:pPr>
+            <a:r>
+              <a:rPr sz="1200">
+                <a:solidFill>
+                  <a:srgbClr val="1B2821"/>
+                </a:solidFill>
+              </a:rPr>
+              <a:t>Pre-event clarity varies by season</a:t>
+            </a:r>
+          </a:p>
+        </p:txBody>
+      </p:sp>
+      <p:sp>
+        <p:nvSpPr>
+          <p:cNvPr id="8" name="Rounded Rectangle 7"/>
+          <p:cNvSpPr/>
           <p:nvPr/>
-        </p:nvCxnSpPr>
-        <p:spPr>
-          <a:xfrm>
-            <a:off x="7543800" y="2834640"/>
-            <a:ext cx="0" cy="685800"/>
-          </a:xfrm>
-          <a:prstGeom prst="line">
+        </p:nvSpPr>
+        <p:spPr>
+          <a:xfrm>
+            <a:off x="640080" y="3657600"/>
+            <a:ext cx="5029200" cy="1554480"/>
+          </a:xfrm>
+          <a:prstGeom prst="roundRect">
             <a:avLst/>
           </a:prstGeom>
-          <a:ln w="19050">
+          <a:solidFill>
+            <a:srgbClr val="FFFFFF"/>
+          </a:solidFill>
+          <a:ln>
             <a:solidFill>
-              <a:srgbClr val="898781"/>
+              <a:srgbClr val="E6EFE6"/>
             </a:solidFill>
-            <a:tailEnd type="triangle"/>
           </a:ln>
         </p:spPr>
         <p:style>
-          <a:lnRef idx="2">
+          <a:lnRef idx="1">
             <a:schemeClr val="accent1"/>
           </a:lnRef>
-          <a:fillRef idx="0">
+          <a:fillRef idx="3">
             <a:schemeClr val="accent1"/>
           </a:fillRef>
-          <a:effectRef idx="1">
+          <a:effectRef idx="2">
             <a:schemeClr val="accent1"/>
           </a:effectRef>
           <a:fontRef idx="minor">
-            <a:schemeClr val="tx1"/>
+            <a:schemeClr val="lt1"/>
           </a:fontRef>
         </p:style>
-      </p:cxnSp>
-      <p:sp>
-        <p:nvSpPr>
-          <p:cNvPr id="18" name="TextBox 17"/>
-          <p:cNvSpPr txBox="1"/>
+        <p:txBody>
+          <a:bodyPr rtlCol="0" anchor="ctr" wrap="square" lIns="146304" rIns="128016" tIns="109728"/>
+          <a:lstStyle/>
+          <a:p>
+            <a:pPr algn="ctr"/>
+            <a:r>
+              <a:rPr sz="1500" b="1">
+                <a:solidFill>
+                  <a:srgbClr val="DEA639"/>
+                </a:solidFill>
+              </a:rPr>
+              <a:t>No ground truth claim</a:t>
+            </a:r>
+          </a:p>
+          <a:p>
+            <a:pPr>
+              <a:spcBef>
+                <a:spcPts val="800"/>
+              </a:spcBef>
+            </a:pPr>
+            <a:r>
+              <a:rPr sz="1200">
+                <a:solidFill>
+                  <a:srgbClr val="1B2821"/>
+                </a:solidFill>
+              </a:rPr>
+              <a:t>Thermal matches are corroborative context</a:t>
+            </a:r>
+          </a:p>
+        </p:txBody>
+      </p:sp>
+      <p:sp>
+        <p:nvSpPr>
+          <p:cNvPr id="9" name="Rounded Rectangle 8"/>
+          <p:cNvSpPr/>
           <p:nvPr/>
         </p:nvSpPr>
         <p:spPr>
           <a:xfrm>
-            <a:off x="548640" y="5029200"/>
-            <a:ext cx="10972800" cy="1097280"/>
-          </a:xfrm>
-          <a:prstGeom prst="rect">
+            <a:off x="6263640" y="3657600"/>
+            <a:ext cx="5029200" cy="1554480"/>
+          </a:xfrm>
+          <a:prstGeom prst="roundRect">
             <a:avLst/>
           </a:prstGeom>
-          <a:noFill/>
-        </p:spPr>
-        <p:txBody>
-          <a:bodyPr wrap="square">
-            <a:spAutoFit/>
-          </a:bodyPr>
-          <a:lstStyle/>
-          <a:p>
-            <a:pPr algn="l">
-              <a:spcAft>
-                <a:spcPts val="600"/>
-              </a:spcAft>
+          <a:solidFill>
+            <a:srgbClr val="FFFFFF"/>
+          </a:solidFill>
+          <a:ln>
+            <a:solidFill>
+              <a:srgbClr val="E6EFE6"/>
+            </a:solidFill>
+          </a:ln>
+        </p:spPr>
+        <p:style>
+          <a:lnRef idx="1">
+            <a:schemeClr val="accent1"/>
+          </a:lnRef>
+          <a:fillRef idx="3">
+            <a:schemeClr val="accent1"/>
+          </a:fillRef>
+          <a:effectRef idx="2">
+            <a:schemeClr val="accent1"/>
+          </a:effectRef>
+          <a:fontRef idx="minor">
+            <a:schemeClr val="lt1"/>
+          </a:fontRef>
+        </p:style>
+        <p:txBody>
+          <a:bodyPr rtlCol="0" anchor="ctr" wrap="square" lIns="146304" rIns="128016" tIns="109728"/>
+          <a:lstStyle/>
+          <a:p>
+            <a:pPr algn="ctr"/>
+            <a:r>
+              <a:rPr sz="1500" b="1">
+                <a:solidFill>
+                  <a:srgbClr val="DEA639"/>
+                </a:solidFill>
+              </a:rPr>
+              <a:t>No probability claim</a:t>
+            </a:r>
+          </a:p>
+          <a:p>
+            <a:pPr>
+              <a:spcBef>
+                <a:spcPts val="800"/>
+              </a:spcBef>
             </a:pPr>
             <a:r>
-              <a:rPr sz="1400" b="0">
-                <a:solidFill>
-                  <a:srgbClr val="52514E"/>
-                </a:solidFill>
-                <a:latin typeface="Segoe UI"/>
-              </a:rPr>
-              <a:t>Inputs: Sentinel-2 (ESA), VIIRS S-NPP / NOAA-20 / NOAA-21 and MODIS (NASA), MCD64A1, ERA5. All free and global, so it scales to any district.</a:t>
-            </a:r>
-          </a:p>
-        </p:txBody>
-      </p:sp>
-    </p:spTree>
-  </p:cSld>
-  <p:clrMapOvr>
-    <a:masterClrMapping/>
-  </p:clrMapOvr>
-</p:sld>
-</file>
-
-<file path=ppt/slides/slide4.xml><?xml version="1.0" encoding="utf-8"?>
-<p:sld xmlns:a="http://schemas.openxmlformats.org/drawingml/2006/main" xmlns:p="http://schemas.openxmlformats.org/presentationml/2006/main" xmlns:r="http://schemas.openxmlformats.org/officeDocument/2006/relationships">
-  <p:cSld>
-    <p:bg>
-      <p:bgPr>
-        <a:solidFill>
-          <a:srgbClr val="FCFCFB"/>
-        </a:solidFill>
-        <a:effectLst/>
-      </p:bgPr>
-    </p:bg>
-    <p:spTree>
-      <p:nvGrpSpPr>
-        <p:cNvPr id="1" name=""/>
-        <p:cNvGrpSpPr/>
-        <p:nvPr/>
-      </p:nvGrpSpPr>
-      <p:grpSpPr/>
-      <p:sp>
-        <p:nvSpPr>
-          <p:cNvPr id="2" name="TextBox 1"/>
-          <p:cNvSpPr txBox="1"/>
-          <p:nvPr/>
-        </p:nvSpPr>
-        <p:spPr>
-          <a:xfrm>
-            <a:off x="548640" y="292608"/>
-            <a:ext cx="10972800" cy="365760"/>
-          </a:xfrm>
-          <a:prstGeom prst="rect">
-            <a:avLst/>
-          </a:prstGeom>
-          <a:noFill/>
-        </p:spPr>
-        <p:txBody>
-          <a:bodyPr wrap="square">
-            <a:spAutoFit/>
-          </a:bodyPr>
-          <a:lstStyle/>
-          <a:p>
-            <a:pPr algn="l">
-              <a:spcAft>
-                <a:spcPts val="600"/>
-              </a:spcAft>
-            </a:pPr>
-            <a:r>
-              <a:rPr sz="1100" b="1">
-                <a:solidFill>
-                  <a:srgbClr val="2F6B4F"/>
-                </a:solidFill>
-                <a:latin typeface="Segoe UI"/>
-              </a:rPr>
-              <a:t>FINDING 1</a:t>
-            </a:r>
-          </a:p>
-        </p:txBody>
-      </p:sp>
-      <p:sp>
-        <p:nvSpPr>
-          <p:cNvPr id="3" name="TextBox 2"/>
-          <p:cNvSpPr txBox="1"/>
-          <p:nvPr/>
-        </p:nvSpPr>
-        <p:spPr>
-          <a:xfrm>
-            <a:off x="548640" y="566928"/>
-            <a:ext cx="11155680" cy="914400"/>
-          </a:xfrm>
-          <a:prstGeom prst="rect">
-            <a:avLst/>
-          </a:prstGeom>
-          <a:noFill/>
-        </p:spPr>
-        <p:txBody>
-          <a:bodyPr wrap="square">
-            <a:spAutoFit/>
-          </a:bodyPr>
-          <a:lstStyle/>
-          <a:p>
-            <a:pPr algn="l">
-              <a:spcAft>
-                <a:spcPts val="600"/>
-              </a:spcAft>
-            </a:pPr>
-            <a:r>
-              <a:rPr sz="2800" b="1">
-                <a:solidFill>
-                  <a:srgbClr val="0B0B0B"/>
-                </a:solidFill>
-                <a:latin typeface="Segoe UI"/>
-              </a:rPr>
-              <a:t>Fire alerts fell 79%. Burn scars did not.</a:t>
-            </a:r>
-          </a:p>
-        </p:txBody>
-      </p:sp>
-      <p:sp>
-        <p:nvSpPr>
-          <p:cNvPr id="4" name="TextBox 3"/>
-          <p:cNvSpPr txBox="1"/>
-          <p:nvPr/>
-        </p:nvSpPr>
-        <p:spPr>
-          <a:xfrm>
-            <a:off x="548640" y="6400800"/>
-            <a:ext cx="10424160" cy="365760"/>
-          </a:xfrm>
-          <a:prstGeom prst="rect">
-            <a:avLst/>
-          </a:prstGeom>
-          <a:noFill/>
-        </p:spPr>
-        <p:txBody>
-          <a:bodyPr wrap="square">
-            <a:spAutoFit/>
-          </a:bodyPr>
-          <a:lstStyle/>
-          <a:p>
-            <a:pPr algn="l">
-              <a:spcAft>
-                <a:spcPts val="600"/>
-              </a:spcAft>
-            </a:pPr>
-            <a:r>
-              <a:rPr sz="900" b="0">
-                <a:solidFill>
-                  <a:srgbClr val="898781"/>
-                </a:solidFill>
-                <a:latin typeface="Segoe UI"/>
-              </a:rPr>
-              <a:t>Sentinel-2 at a harmonised 5-day revisit. Strict = char-like signature tier; loose = all burn candidates; both are unverified rule candidates. 2024 burn area is a lower bound (smog gap, 3–21 Nov).</a:t>
-            </a:r>
-          </a:p>
-        </p:txBody>
-      </p:sp>
-      <p:sp>
-        <p:nvSpPr>
-          <p:cNvPr id="5" name="TextBox 4"/>
-          <p:cNvSpPr txBox="1"/>
-          <p:nvPr/>
-        </p:nvSpPr>
-        <p:spPr>
-          <a:xfrm>
-            <a:off x="11155680" y="6400800"/>
-            <a:ext cx="640080" cy="365760"/>
-          </a:xfrm>
-          <a:prstGeom prst="rect">
-            <a:avLst/>
-          </a:prstGeom>
-          <a:noFill/>
-        </p:spPr>
-        <p:txBody>
-          <a:bodyPr wrap="square">
-            <a:spAutoFit/>
-          </a:bodyPr>
-          <a:lstStyle/>
-          <a:p>
-            <a:pPr algn="r">
-              <a:spcAft>
-                <a:spcPts val="600"/>
-              </a:spcAft>
-            </a:pPr>
-            <a:r>
-              <a:rPr sz="900" b="0">
-                <a:solidFill>
-                  <a:srgbClr val="898781"/>
-                </a:solidFill>
-                <a:latin typeface="Segoe UI"/>
-              </a:rPr>
-              <a:t>4</a:t>
-            </a:r>
-          </a:p>
-        </p:txBody>
-      </p:sp>
-      <p:pic>
-        <p:nvPicPr>
-          <p:cNvPr id="6" name="Picture 5" descr="f1_alerts_vs_scars.png"/>
-          <p:cNvPicPr>
-            <a:picLocks noChangeAspect="1"/>
-          </p:cNvPicPr>
-          <p:nvPr/>
-        </p:nvPicPr>
-        <p:blipFill>
-          <a:blip r:embed="rId3"/>
-          <a:stretch>
-            <a:fillRect/>
-          </a:stretch>
-        </p:blipFill>
-        <p:spPr>
-          <a:xfrm>
-            <a:off x="548640" y="1417320"/>
-            <a:ext cx="7589520" cy="3883010"/>
-          </a:xfrm>
-          <a:prstGeom prst="rect">
-            <a:avLst/>
-          </a:prstGeom>
-        </p:spPr>
-      </p:pic>
-      <p:sp>
-        <p:nvSpPr>
-          <p:cNvPr id="7" name="TextBox 6"/>
-          <p:cNvSpPr txBox="1"/>
-          <p:nvPr/>
-        </p:nvSpPr>
-        <p:spPr>
-          <a:xfrm>
-            <a:off x="8412480" y="1554480"/>
-            <a:ext cx="3474720" cy="4572000"/>
-          </a:xfrm>
-          <a:prstGeom prst="rect">
-            <a:avLst/>
-          </a:prstGeom>
-          <a:noFill/>
-        </p:spPr>
-        <p:txBody>
-          <a:bodyPr wrap="square">
-            <a:spAutoFit/>
-          </a:bodyPr>
-          <a:lstStyle/>
-          <a:p>
-            <a:pPr>
-              <a:spcAft>
-                <a:spcPts val="1000"/>
-              </a:spcAft>
-            </a:pPr>
-            <a:r>
-              <a:rPr sz="1500" b="1">
-                <a:solidFill>
-                  <a:srgbClr val="0B0B0B"/>
-                </a:solidFill>
-                <a:latin typeface="Segoe UI"/>
-              </a:rPr>
-              <a:t>2,792 → 600 </a:t>
-            </a:r>
-            <a:r>
-              <a:rPr sz="1500">
-                <a:solidFill>
-                  <a:srgbClr val="52514E"/>
-                </a:solidFill>
-                <a:latin typeface="Segoe UI"/>
-              </a:rPr>
-              <a:t>VIIRS fire alerts in the district</a:t>
-            </a:r>
-          </a:p>
-          <a:p>
-            <a:pPr>
-              <a:spcAft>
-                <a:spcPts val="1000"/>
-              </a:spcAft>
-            </a:pPr>
-            <a:r>
-              <a:rPr sz="1500" b="1">
-                <a:solidFill>
-                  <a:srgbClr val="0B0B0B"/>
-                </a:solidFill>
-                <a:latin typeface="Segoe UI"/>
-              </a:rPr>
-              <a:t>7,883 → 7,930 ha </a:t>
-            </a:r>
-            <a:r>
-              <a:rPr sz="1500">
-                <a:solidFill>
-                  <a:srgbClr val="52514E"/>
-                </a:solidFill>
-                <a:latin typeface="Segoe UI"/>
-              </a:rPr>
-              <a:t>strict-tier burn-scar candidate area (index 101)</a:t>
-            </a:r>
-          </a:p>
-          <a:p>
-            <a:pPr>
-              <a:spcAft>
-                <a:spcPts val="1000"/>
-              </a:spcAft>
-            </a:pPr>
-            <a:r>
-              <a:rPr sz="1500" b="1">
-                <a:solidFill>
-                  <a:srgbClr val="0B0B0B"/>
-                </a:solidFill>
-                <a:latin typeface="Segoe UI"/>
-              </a:rPr>
-              <a:t>2.3 → 11.88 </a:t>
-            </a:r>
-            <a:r>
-              <a:rPr sz="1500">
-                <a:solidFill>
-                  <a:srgbClr val="52514E"/>
-                </a:solidFill>
-                <a:latin typeface="Segoe UI"/>
-              </a:rPr>
-              <a:t>burned fields per fire alert</a:t>
-            </a:r>
-          </a:p>
-          <a:p>
-            <a:pPr>
-              <a:spcAft>
-                <a:spcPts val="1000"/>
-              </a:spcAft>
-            </a:pPr>
-            <a:r>
-              <a:rPr sz="1500" b="1">
-                <a:solidFill>
-                  <a:srgbClr val="0B0B0B"/>
-                </a:solidFill>
-                <a:latin typeface="Segoe UI"/>
-              </a:rPr>
-              <a:t>Same revisit, </a:t>
-            </a:r>
-            <a:r>
-              <a:rPr sz="1500">
-                <a:solidFill>
-                  <a:srgbClr val="52514E"/>
-                </a:solidFill>
-                <a:latin typeface="Segoe UI"/>
-              </a:rPr>
-              <a:t>same thresholds, same fields</a:t>
-            </a:r>
-          </a:p>
-        </p:txBody>
-      </p:sp>
-    </p:spTree>
-  </p:cSld>
-  <p:clrMapOvr>
-    <a:masterClrMapping/>
-  </p:clrMapOvr>
-</p:sld>
-</file>
-
-<file path=ppt/slides/slide5.xml><?xml version="1.0" encoding="utf-8"?>
-<p:sld xmlns:a="http://schemas.openxmlformats.org/drawingml/2006/main" xmlns:p="http://schemas.openxmlformats.org/presentationml/2006/main" xmlns:r="http://schemas.openxmlformats.org/officeDocument/2006/relationships">
-  <p:cSld>
-    <p:bg>
-      <p:bgPr>
-        <a:solidFill>
-          <a:srgbClr val="FCFCFB"/>
-        </a:solidFill>
-        <a:effectLst/>
-      </p:bgPr>
-    </p:bg>
-    <p:spTree>
-      <p:nvGrpSpPr>
-        <p:cNvPr id="1" name=""/>
-        <p:cNvGrpSpPr/>
-        <p:nvPr/>
-      </p:nvGrpSpPr>
-      <p:grpSpPr/>
-      <p:sp>
-        <p:nvSpPr>
-          <p:cNvPr id="2" name="TextBox 1"/>
-          <p:cNvSpPr txBox="1"/>
-          <p:nvPr/>
-        </p:nvSpPr>
-        <p:spPr>
-          <a:xfrm>
-            <a:off x="548640" y="292608"/>
-            <a:ext cx="10972800" cy="365760"/>
-          </a:xfrm>
-          <a:prstGeom prst="rect">
-            <a:avLst/>
-          </a:prstGeom>
-          <a:noFill/>
-        </p:spPr>
-        <p:txBody>
-          <a:bodyPr wrap="square">
-            <a:spAutoFit/>
-          </a:bodyPr>
-          <a:lstStyle/>
-          <a:p>
-            <a:pPr algn="l">
-              <a:spcAft>
-                <a:spcPts val="600"/>
-              </a:spcAft>
-            </a:pPr>
-            <a:r>
-              <a:rPr sz="1100" b="1">
-                <a:solidFill>
-                  <a:srgbClr val="2F6B4F"/>
-                </a:solidFill>
-                <a:latin typeface="Segoe UI"/>
-              </a:rPr>
-              <a:t>FINDING 2</a:t>
-            </a:r>
-          </a:p>
-        </p:txBody>
-      </p:sp>
-      <p:sp>
-        <p:nvSpPr>
-          <p:cNvPr id="3" name="TextBox 2"/>
-          <p:cNvSpPr txBox="1"/>
-          <p:nvPr/>
-        </p:nvSpPr>
-        <p:spPr>
-          <a:xfrm>
-            <a:off x="548640" y="566928"/>
-            <a:ext cx="11155680" cy="914400"/>
-          </a:xfrm>
-          <a:prstGeom prst="rect">
-            <a:avLst/>
-          </a:prstGeom>
-          <a:noFill/>
-        </p:spPr>
-        <p:txBody>
-          <a:bodyPr wrap="square">
-            <a:spAutoFit/>
-          </a:bodyPr>
-          <a:lstStyle/>
-          <a:p>
-            <a:pPr algn="l">
-              <a:spcAft>
-                <a:spcPts val="600"/>
-              </a:spcAft>
-            </a:pPr>
-            <a:r>
-              <a:rPr sz="2800" b="1">
-                <a:solidFill>
-                  <a:srgbClr val="0B0B0B"/>
-                </a:solidFill>
-                <a:latin typeface="Segoe UI"/>
-              </a:rPr>
-              <a:t>9 in 10 strict-tier burn candidates in 2025 raised no fire alert</a:t>
-            </a:r>
-          </a:p>
-        </p:txBody>
-      </p:sp>
-      <p:sp>
-        <p:nvSpPr>
-          <p:cNvPr id="4" name="TextBox 3"/>
-          <p:cNvSpPr txBox="1"/>
-          <p:nvPr/>
-        </p:nvSpPr>
-        <p:spPr>
-          <a:xfrm>
-            <a:off x="548640" y="6400800"/>
-            <a:ext cx="10424160" cy="365760"/>
-          </a:xfrm>
-          <a:prstGeom prst="rect">
-            <a:avLst/>
-          </a:prstGeom>
-          <a:noFill/>
-        </p:spPr>
-        <p:txBody>
-          <a:bodyPr wrap="square">
-            <a:spAutoFit/>
-          </a:bodyPr>
-          <a:lstStyle/>
-          <a:p>
-            <a:pPr algn="l">
-              <a:spcAft>
-                <a:spcPts val="600"/>
-              </a:spcAft>
-            </a:pPr>
-            <a:r>
-              <a:rPr sz="900" b="0">
-                <a:solidFill>
-                  <a:srgbClr val="898781"/>
-                </a:solidFill>
-                <a:latin typeface="Segoe UI"/>
-              </a:rPr>
-              <a:t>Strict burns observed within ≤5 days; VIIRS within 500 m. Control: unburned fields with the same windows. Smoke panel: 2023 season.</a:t>
-            </a:r>
-          </a:p>
-        </p:txBody>
-      </p:sp>
-      <p:sp>
-        <p:nvSpPr>
-          <p:cNvPr id="5" name="TextBox 4"/>
-          <p:cNvSpPr txBox="1"/>
-          <p:nvPr/>
-        </p:nvSpPr>
-        <p:spPr>
-          <a:xfrm>
-            <a:off x="11155680" y="6400800"/>
-            <a:ext cx="640080" cy="365760"/>
-          </a:xfrm>
-          <a:prstGeom prst="rect">
-            <a:avLst/>
-          </a:prstGeom>
-          <a:noFill/>
-        </p:spPr>
-        <p:txBody>
-          <a:bodyPr wrap="square">
-            <a:spAutoFit/>
-          </a:bodyPr>
-          <a:lstStyle/>
-          <a:p>
-            <a:pPr algn="r">
-              <a:spcAft>
-                <a:spcPts val="600"/>
-              </a:spcAft>
-            </a:pPr>
-            <a:r>
-              <a:rPr sz="900" b="0">
-                <a:solidFill>
-                  <a:srgbClr val="898781"/>
-                </a:solidFill>
-                <a:latin typeface="Segoe UI"/>
-              </a:rPr>
-              <a:t>5</a:t>
-            </a:r>
-          </a:p>
-        </p:txBody>
-      </p:sp>
-      <p:pic>
-        <p:nvPicPr>
-          <p:cNvPr id="6" name="Picture 5" descr="f2_blind_spot.png"/>
-          <p:cNvPicPr>
-            <a:picLocks noChangeAspect="1"/>
-          </p:cNvPicPr>
-          <p:nvPr/>
-        </p:nvPicPr>
-        <p:blipFill>
-          <a:blip r:embed="rId3"/>
-          <a:stretch>
-            <a:fillRect/>
-          </a:stretch>
-        </p:blipFill>
-        <p:spPr>
-          <a:xfrm>
-            <a:off x="548640" y="1417320"/>
-            <a:ext cx="5669280" cy="3149600"/>
-          </a:xfrm>
-          <a:prstGeom prst="rect">
-            <a:avLst/>
-          </a:prstGeom>
-        </p:spPr>
-      </p:pic>
-      <p:pic>
-        <p:nvPicPr>
-          <p:cNvPr id="7" name="Picture 6" descr="f3_smoke_blindness.png"/>
-          <p:cNvPicPr>
-            <a:picLocks noChangeAspect="1"/>
-          </p:cNvPicPr>
-          <p:nvPr/>
-        </p:nvPicPr>
-        <p:blipFill>
-          <a:blip r:embed="rId4"/>
-          <a:stretch>
-            <a:fillRect/>
-          </a:stretch>
-        </p:blipFill>
-        <p:spPr>
-          <a:xfrm>
-            <a:off x="6400800" y="1417320"/>
-            <a:ext cx="5303520" cy="3683000"/>
-          </a:xfrm>
-          <a:prstGeom prst="rect">
-            <a:avLst/>
-          </a:prstGeom>
-        </p:spPr>
-      </p:pic>
-      <p:sp>
-        <p:nvSpPr>
-          <p:cNvPr id="8" name="TextBox 7"/>
-          <p:cNvSpPr txBox="1"/>
-          <p:nvPr/>
-        </p:nvSpPr>
-        <p:spPr>
-          <a:xfrm>
-            <a:off x="548640" y="4800600"/>
-            <a:ext cx="5669280" cy="1463040"/>
-          </a:xfrm>
-          <a:prstGeom prst="rect">
-            <a:avLst/>
-          </a:prstGeom>
-          <a:noFill/>
-        </p:spPr>
-        <p:txBody>
-          <a:bodyPr wrap="square">
-            <a:spAutoFit/>
-          </a:bodyPr>
-          <a:lstStyle/>
-          <a:p>
-            <a:pPr>
-              <a:spcAft>
-                <a:spcPts val="1000"/>
-              </a:spcAft>
-            </a:pPr>
-            <a:r>
-              <a:rPr sz="1400" b="1">
-                <a:solidFill>
-                  <a:srgbClr val="0B0B0B"/>
-                </a:solidFill>
-                <a:latin typeface="Segoe UI"/>
-              </a:rPr>
-              <a:t>34% → 8% </a:t>
-            </a:r>
-            <a:r>
-              <a:rPr sz="1400">
-                <a:solidFill>
-                  <a:srgbClr val="52514E"/>
-                </a:solidFill>
-                <a:latin typeface="Segoe UI"/>
-              </a:rPr>
-              <a:t>strict-tier burn candidates with any VIIRS alert (control 4%)</a:t>
-            </a:r>
-          </a:p>
-          <a:p>
-            <a:pPr>
-              <a:spcAft>
-                <a:spcPts val="1000"/>
-              </a:spcAft>
-            </a:pPr>
-            <a:r>
-              <a:rPr sz="1400" b="1">
-                <a:solidFill>
-                  <a:srgbClr val="0B0B0B"/>
-                </a:solidFill>
-                <a:latin typeface="Segoe UI"/>
-              </a:rPr>
-              <a:t>Independent of iFOREST: </a:t>
-            </a:r>
-            <a:r>
-              <a:rPr sz="1400">
-                <a:solidFill>
-                  <a:srgbClr val="52514E"/>
-                </a:solidFill>
-                <a:latin typeface="Segoe UI"/>
-              </a:rPr>
-              <a:t>field-level evidence of after-overpass burning</a:t>
-            </a:r>
-          </a:p>
-        </p:txBody>
-      </p:sp>
-    </p:spTree>
-  </p:cSld>
-  <p:clrMapOvr>
-    <a:masterClrMapping/>
-  </p:clrMapOvr>
-</p:sld>
-</file>
-
-<file path=ppt/slides/slide6.xml><?xml version="1.0" encoding="utf-8"?>
-<p:sld xmlns:a="http://schemas.openxmlformats.org/drawingml/2006/main" xmlns:p="http://schemas.openxmlformats.org/presentationml/2006/main" xmlns:r="http://schemas.openxmlformats.org/officeDocument/2006/relationships">
-  <p:cSld>
-    <p:bg>
-      <p:bgPr>
-        <a:solidFill>
-          <a:srgbClr val="FCFCFB"/>
-        </a:solidFill>
-        <a:effectLst/>
-      </p:bgPr>
-    </p:bg>
-    <p:spTree>
-      <p:nvGrpSpPr>
-        <p:cNvPr id="1" name=""/>
-        <p:cNvGrpSpPr/>
-        <p:nvPr/>
-      </p:nvGrpSpPr>
-      <p:grpSpPr/>
-      <p:sp>
-        <p:nvSpPr>
-          <p:cNvPr id="2" name="TextBox 1"/>
-          <p:cNvSpPr txBox="1"/>
-          <p:nvPr/>
-        </p:nvSpPr>
-        <p:spPr>
-          <a:xfrm>
-            <a:off x="548640" y="292608"/>
-            <a:ext cx="10972800" cy="365760"/>
-          </a:xfrm>
-          <a:prstGeom prst="rect">
-            <a:avLst/>
-          </a:prstGeom>
-          <a:noFill/>
-        </p:spPr>
-        <p:txBody>
-          <a:bodyPr wrap="square">
-            <a:spAutoFit/>
-          </a:bodyPr>
-          <a:lstStyle/>
-          <a:p>
-            <a:pPr algn="l">
-              <a:spcAft>
-                <a:spcPts val="600"/>
-              </a:spcAft>
-            </a:pPr>
-            <a:r>
-              <a:rPr sz="1100" b="1">
-                <a:solidFill>
-                  <a:srgbClr val="2F6B4F"/>
-                </a:solidFill>
-                <a:latin typeface="Segoe UI"/>
-              </a:rPr>
-              <a:t>METHOD RIGOUR</a:t>
-            </a:r>
-          </a:p>
-        </p:txBody>
-      </p:sp>
-      <p:sp>
-        <p:nvSpPr>
-          <p:cNvPr id="3" name="TextBox 2"/>
-          <p:cNvSpPr txBox="1"/>
-          <p:nvPr/>
-        </p:nvSpPr>
-        <p:spPr>
-          <a:xfrm>
-            <a:off x="548640" y="566928"/>
-            <a:ext cx="11155680" cy="914400"/>
-          </a:xfrm>
-          <a:prstGeom prst="rect">
-            <a:avLst/>
-          </a:prstGeom>
-          <a:noFill/>
-        </p:spPr>
-        <p:txBody>
-          <a:bodyPr wrap="square">
-            <a:spAutoFit/>
-          </a:bodyPr>
-          <a:lstStyle/>
-          <a:p>
-            <a:pPr algn="l">
-              <a:spcAft>
-                <a:spcPts val="600"/>
-              </a:spcAft>
-            </a:pPr>
-            <a:r>
-              <a:rPr sz="2800" b="1">
-                <a:solidFill>
-                  <a:srgbClr val="0B0B0B"/>
-                </a:solidFill>
-                <a:latin typeface="Segoe UI"/>
-              </a:rPr>
-              <a:t>Harvest-aware detection, independently checked</a:t>
-            </a:r>
-          </a:p>
-        </p:txBody>
-      </p:sp>
-      <p:sp>
-        <p:nvSpPr>
-          <p:cNvPr id="4" name="TextBox 3"/>
-          <p:cNvSpPr txBox="1"/>
-          <p:nvPr/>
-        </p:nvSpPr>
-        <p:spPr>
-          <a:xfrm>
-            <a:off x="548640" y="6400800"/>
-            <a:ext cx="10424160" cy="365760"/>
-          </a:xfrm>
-          <a:prstGeom prst="rect">
-            <a:avLst/>
-          </a:prstGeom>
-          <a:noFill/>
-        </p:spPr>
-        <p:txBody>
-          <a:bodyPr wrap="square">
-            <a:spAutoFit/>
-          </a:bodyPr>
-          <a:lstStyle/>
-          <a:p>
-            <a:pPr algn="l">
-              <a:spcAft>
-                <a:spcPts val="600"/>
-              </a:spcAft>
-            </a:pPr>
-            <a:r>
-              <a:rPr sz="900" b="0">
-                <a:solidFill>
-                  <a:srgbClr val="898781"/>
-                </a:solidFill>
-                <a:latin typeface="Segoe UI"/>
-              </a:rPr>
-              <a:t>Key &amp; Benson (2006) dNBR thresholds; Olofsson et al. (2014) stratified estimator; validation tool in reports/research/label_tool.</a:t>
-            </a:r>
-          </a:p>
-        </p:txBody>
-      </p:sp>
-      <p:sp>
-        <p:nvSpPr>
-          <p:cNvPr id="5" name="TextBox 4"/>
-          <p:cNvSpPr txBox="1"/>
-          <p:nvPr/>
-        </p:nvSpPr>
-        <p:spPr>
-          <a:xfrm>
-            <a:off x="11155680" y="6400800"/>
-            <a:ext cx="640080" cy="365760"/>
-          </a:xfrm>
-          <a:prstGeom prst="rect">
-            <a:avLst/>
-          </a:prstGeom>
-          <a:noFill/>
-        </p:spPr>
-        <p:txBody>
-          <a:bodyPr wrap="square">
-            <a:spAutoFit/>
-          </a:bodyPr>
-          <a:lstStyle/>
-          <a:p>
-            <a:pPr algn="r">
-              <a:spcAft>
-                <a:spcPts val="600"/>
-              </a:spcAft>
-            </a:pPr>
-            <a:r>
-              <a:rPr sz="900" b="0">
-                <a:solidFill>
-                  <a:srgbClr val="898781"/>
-                </a:solidFill>
-                <a:latin typeface="Segoe UI"/>
-              </a:rPr>
-              <a:t>6</a:t>
-            </a:r>
-          </a:p>
-        </p:txBody>
-      </p:sp>
-      <p:pic>
-        <p:nvPicPr>
-          <p:cNvPr id="6" name="Picture 5" descr="f4_naive_vs_aware.png"/>
-          <p:cNvPicPr>
-            <a:picLocks noChangeAspect="1"/>
-          </p:cNvPicPr>
-          <p:nvPr/>
-        </p:nvPicPr>
-        <p:blipFill>
-          <a:blip r:embed="rId3"/>
-          <a:stretch>
-            <a:fillRect/>
-          </a:stretch>
-        </p:blipFill>
-        <p:spPr>
-          <a:xfrm>
-            <a:off x="548640" y="1417320"/>
-            <a:ext cx="6035040" cy="3017520"/>
-          </a:xfrm>
-          <a:prstGeom prst="rect">
-            <a:avLst/>
-          </a:prstGeom>
-        </p:spPr>
-      </p:pic>
-      <p:sp>
-        <p:nvSpPr>
-          <p:cNvPr id="7" name="TextBox 6"/>
-          <p:cNvSpPr txBox="1"/>
-          <p:nvPr/>
-        </p:nvSpPr>
-        <p:spPr>
-          <a:xfrm>
-            <a:off x="6858000" y="1463040"/>
-            <a:ext cx="4937760" cy="4754880"/>
-          </a:xfrm>
-          <a:prstGeom prst="rect">
-            <a:avLst/>
-          </a:prstGeom>
-          <a:noFill/>
-        </p:spPr>
-        <p:txBody>
-          <a:bodyPr wrap="square">
-            <a:spAutoFit/>
-          </a:bodyPr>
-          <a:lstStyle/>
-          <a:p>
-            <a:pPr>
-              <a:spcAft>
-                <a:spcPts val="1000"/>
-              </a:spcAft>
-            </a:pPr>
-            <a:r>
-              <a:rPr sz="1300" b="1">
-                <a:solidFill>
-                  <a:srgbClr val="0B0B0B"/>
-                </a:solidFill>
-                <a:latin typeface="Segoe UI"/>
-              </a:rPr>
-              <a:t>Smoke-robust: </a:t>
-            </a:r>
-            <a:r>
-              <a:rPr sz="1300">
-                <a:solidFill>
-                  <a:srgbClr val="52514E"/>
-                </a:solidFill>
-                <a:latin typeface="Segoe UI"/>
-              </a:rPr>
-              <a:t>NIR/SWIR logic; Sen2Cor misses smoke haze</a:t>
-            </a:r>
-          </a:p>
-          <a:p>
-            <a:pPr>
-              <a:spcAft>
-                <a:spcPts val="1000"/>
-              </a:spcAft>
-            </a:pPr>
-            <a:r>
-              <a:rPr sz="1300" b="1">
-                <a:solidFill>
-                  <a:srgbClr val="0B0B0B"/>
-                </a:solidFill>
-                <a:latin typeface="Segoe UI"/>
-              </a:rPr>
-              <a:t>Wet-soil rejection: </a:t>
-            </a:r>
-            <a:r>
-              <a:rPr sz="1300">
-                <a:solidFill>
-                  <a:srgbClr val="52514E"/>
-                </a:solidFill>
-                <a:latin typeface="Segoe UI"/>
-              </a:rPr>
-              <a:t>irrigated soil keeps a positive NBR, char does not</a:t>
-            </a:r>
-          </a:p>
-          <a:p>
-            <a:pPr>
-              <a:spcAft>
-                <a:spcPts val="1000"/>
-              </a:spcAft>
-            </a:pPr>
-            <a:r>
-              <a:rPr sz="1300" b="1">
-                <a:solidFill>
-                  <a:srgbClr val="0B0B0B"/>
-                </a:solidFill>
-                <a:latin typeface="Segoe UI"/>
-              </a:rPr>
-              <a:t>Thermal recall: </a:t>
-            </a:r>
-            <a:r>
-              <a:rPr sz="1300">
-                <a:solidFill>
-                  <a:srgbClr val="52514E"/>
-                </a:solidFill>
-                <a:latin typeface="Segoe UI"/>
-              </a:rPr>
-              <a:t>67% / 53% / 64% of VIIRS alerts have a Sentinel-2 burn within 500 m (2023/24/25)</a:t>
-            </a:r>
-          </a:p>
-          <a:p>
-            <a:pPr>
-              <a:spcAft>
-                <a:spcPts val="1000"/>
-              </a:spcAft>
-            </a:pPr>
-            <a:r>
-              <a:rPr sz="1300" b="1">
-                <a:solidFill>
-                  <a:srgbClr val="0B0B0B"/>
-                </a:solidFill>
-                <a:latin typeface="Segoe UI"/>
-              </a:rPr>
-              <a:t>Controls and sensitivity: </a:t>
-            </a:r>
-            <a:r>
-              <a:rPr sz="1300">
-                <a:solidFill>
-                  <a:srgbClr val="52514E"/>
-                </a:solidFill>
-                <a:latin typeface="Segoe UI"/>
-              </a:rPr>
-              <a:t>proximity controls; radius 375–1,000 m; harmonised revisit</a:t>
-            </a:r>
-          </a:p>
-          <a:p>
-            <a:pPr>
-              <a:spcAft>
-                <a:spcPts val="1000"/>
-              </a:spcAft>
-            </a:pPr>
-            <a:r>
-              <a:rPr sz="1300" b="1">
-                <a:solidFill>
-                  <a:srgbClr val="0B0B0B"/>
-                </a:solidFill>
-                <a:latin typeface="Segoe UI"/>
-              </a:rPr>
-              <a:t>Human validation: </a:t>
-            </a:r>
-            <a:r>
-              <a:rPr sz="1300">
-                <a:solidFill>
-                  <a:srgbClr val="52514E"/>
-                </a:solidFill>
-                <a:latin typeface="Segoe UI"/>
-              </a:rPr>
-              <a:t>stratified, blind before/after labelling tool → precision, recall, area with 95% CI</a:t>
-            </a:r>
-          </a:p>
-          <a:p>
-            <a:pPr>
-              <a:spcAft>
-                <a:spcPts val="1000"/>
-              </a:spcAft>
-            </a:pPr>
-            <a:r>
-              <a:rPr sz="1300" b="1">
-                <a:solidFill>
-                  <a:srgbClr val="0B0B0B"/>
-                </a:solidFill>
-                <a:latin typeface="Segoe UI"/>
-              </a:rPr>
-              <a:t>Bug found and fixed: </a:t>
-            </a:r>
-            <a:r>
-              <a:rPr sz="1300">
-                <a:solidFill>
-                  <a:srgbClr val="52514E"/>
-                </a:solidFill>
-                <a:latin typeface="Segoe UI"/>
-              </a:rPr>
-              <a:t>missing −1000 DN reflectance offset inflated reflectance by 0.10</a:t>
-            </a:r>
-          </a:p>
-        </p:txBody>
-      </p:sp>
-    </p:spTree>
-  </p:cSld>
-  <p:clrMapOvr>
-    <a:masterClrMapping/>
-  </p:clrMapOvr>
-</p:sld>
-</file>
-
-<file path=ppt/slides/slide7.xml><?xml version="1.0" encoding="utf-8"?>
-<p:sld xmlns:a="http://schemas.openxmlformats.org/drawingml/2006/main" xmlns:p="http://schemas.openxmlformats.org/presentationml/2006/main" xmlns:r="http://schemas.openxmlformats.org/officeDocument/2006/relationships">
-  <p:cSld>
-    <p:bg>
-      <p:bgPr>
-        <a:solidFill>
-          <a:srgbClr val="FCFCFB"/>
-        </a:solidFill>
-        <a:effectLst/>
-      </p:bgPr>
-    </p:bg>
-    <p:spTree>
-      <p:nvGrpSpPr>
-        <p:cNvPr id="1" name=""/>
-        <p:cNvGrpSpPr/>
-        <p:nvPr/>
-      </p:nvGrpSpPr>
-      <p:grpSpPr/>
-      <p:sp>
-        <p:nvSpPr>
-          <p:cNvPr id="2" name="TextBox 1"/>
-          <p:cNvSpPr txBox="1"/>
-          <p:nvPr/>
-        </p:nvSpPr>
-        <p:spPr>
-          <a:xfrm>
-            <a:off x="548640" y="292608"/>
-            <a:ext cx="10972800" cy="365760"/>
-          </a:xfrm>
-          <a:prstGeom prst="rect">
-            <a:avLst/>
-          </a:prstGeom>
-          <a:noFill/>
-        </p:spPr>
-        <p:txBody>
-          <a:bodyPr wrap="square">
-            <a:spAutoFit/>
-          </a:bodyPr>
-          <a:lstStyle/>
-          <a:p>
-            <a:pPr algn="l">
-              <a:spcAft>
-                <a:spcPts val="600"/>
-              </a:spcAft>
-            </a:pPr>
-            <a:r>
-              <a:rPr sz="1100" b="1">
-                <a:solidFill>
-                  <a:srgbClr val="2F6B4F"/>
-                </a:solidFill>
-                <a:latin typeface="Segoe UI"/>
-              </a:rPr>
-              <a:t>FINDING 3</a:t>
-            </a:r>
-          </a:p>
-        </p:txBody>
-      </p:sp>
-      <p:sp>
-        <p:nvSpPr>
-          <p:cNvPr id="3" name="TextBox 2"/>
-          <p:cNvSpPr txBox="1"/>
-          <p:nvPr/>
-        </p:nvSpPr>
-        <p:spPr>
-          <a:xfrm>
-            <a:off x="548640" y="566928"/>
-            <a:ext cx="11155680" cy="914400"/>
-          </a:xfrm>
-          <a:prstGeom prst="rect">
-            <a:avLst/>
-          </a:prstGeom>
-          <a:noFill/>
-        </p:spPr>
-        <p:txBody>
-          <a:bodyPr wrap="square">
-            <a:spAutoFit/>
-          </a:bodyPr>
-          <a:lstStyle/>
-          <a:p>
-            <a:pPr algn="l">
-              <a:spcAft>
-                <a:spcPts val="600"/>
-              </a:spcAft>
-            </a:pPr>
-            <a:r>
-              <a:rPr sz="2800" b="1">
-                <a:solidFill>
-                  <a:srgbClr val="0B0B0B"/>
-                </a:solidFill>
-                <a:latin typeface="Segoe UI"/>
-              </a:rPr>
-              <a:t>Burning clusters, persists, and leaves about a two-week window</a:t>
-            </a:r>
-          </a:p>
-        </p:txBody>
-      </p:sp>
-      <p:sp>
-        <p:nvSpPr>
-          <p:cNvPr id="4" name="TextBox 3"/>
-          <p:cNvSpPr txBox="1"/>
-          <p:nvPr/>
-        </p:nvSpPr>
-        <p:spPr>
-          <a:xfrm>
-            <a:off x="548640" y="6400800"/>
-            <a:ext cx="10424160" cy="365760"/>
-          </a:xfrm>
-          <a:prstGeom prst="rect">
-            <a:avLst/>
-          </a:prstGeom>
-          <a:noFill/>
-        </p:spPr>
-        <p:txBody>
-          <a:bodyPr wrap="square">
-            <a:spAutoFit/>
-          </a:bodyPr>
-          <a:lstStyle/>
-          <a:p>
-            <a:pPr algn="l">
-              <a:spcAft>
-                <a:spcPts val="600"/>
-              </a:spcAft>
-            </a:pPr>
-            <a:r>
-              <a:rPr sz="900" b="0">
-                <a:solidFill>
-                  <a:srgbClr val="898781"/>
-                </a:solidFill>
-                <a:latin typeface="Segoe UI"/>
-              </a:rPr>
-              <a:t>Left: 2025 burn tiers per field with VIIRS alerts. Right: days from first harvested to first char observation (2025, interval-censored).</a:t>
-            </a:r>
-          </a:p>
-        </p:txBody>
-      </p:sp>
-      <p:sp>
-        <p:nvSpPr>
-          <p:cNvPr id="5" name="TextBox 4"/>
-          <p:cNvSpPr txBox="1"/>
-          <p:nvPr/>
-        </p:nvSpPr>
-        <p:spPr>
-          <a:xfrm>
-            <a:off x="11155680" y="6400800"/>
-            <a:ext cx="640080" cy="365760"/>
-          </a:xfrm>
-          <a:prstGeom prst="rect">
-            <a:avLst/>
-          </a:prstGeom>
-          <a:noFill/>
-        </p:spPr>
-        <p:txBody>
-          <a:bodyPr wrap="square">
-            <a:spAutoFit/>
-          </a:bodyPr>
-          <a:lstStyle/>
-          <a:p>
-            <a:pPr algn="r">
-              <a:spcAft>
-                <a:spcPts val="600"/>
-              </a:spcAft>
-            </a:pPr>
-            <a:r>
-              <a:rPr sz="900" b="0">
-                <a:solidFill>
-                  <a:srgbClr val="898781"/>
-                </a:solidFill>
-                <a:latin typeface="Segoe UI"/>
-              </a:rPr>
-              <a:t>7</a:t>
-            </a:r>
-          </a:p>
-        </p:txBody>
-      </p:sp>
-      <p:pic>
-        <p:nvPicPr>
-          <p:cNvPr id="6" name="Picture 5" descr="f8_burn_map_2025.png"/>
-          <p:cNvPicPr>
-            <a:picLocks noChangeAspect="1"/>
-          </p:cNvPicPr>
-          <p:nvPr/>
-        </p:nvPicPr>
-        <p:blipFill>
-          <a:blip r:embed="rId3"/>
-          <a:stretch>
-            <a:fillRect/>
-          </a:stretch>
-        </p:blipFill>
-        <p:spPr>
-          <a:xfrm>
-            <a:off x="457200" y="1280160"/>
-            <a:ext cx="3742660" cy="5029200"/>
-          </a:xfrm>
-          <a:prstGeom prst="rect">
-            <a:avLst/>
-          </a:prstGeom>
-        </p:spPr>
-      </p:pic>
-      <p:pic>
-        <p:nvPicPr>
-          <p:cNvPr id="7" name="Picture 6" descr="f5_intervention_window.png"/>
-          <p:cNvPicPr>
-            <a:picLocks noChangeAspect="1"/>
-          </p:cNvPicPr>
-          <p:nvPr/>
-        </p:nvPicPr>
-        <p:blipFill>
-          <a:blip r:embed="rId4"/>
-          <a:stretch>
-            <a:fillRect/>
-          </a:stretch>
-        </p:blipFill>
-        <p:spPr>
-          <a:xfrm>
-            <a:off x="4389120" y="1325880"/>
-            <a:ext cx="6766560" cy="3383280"/>
-          </a:xfrm>
-          <a:prstGeom prst="rect">
-            <a:avLst/>
-          </a:prstGeom>
-        </p:spPr>
-      </p:pic>
-      <p:sp>
-        <p:nvSpPr>
-          <p:cNvPr id="8" name="TextBox 7"/>
-          <p:cNvSpPr txBox="1"/>
-          <p:nvPr/>
-        </p:nvSpPr>
-        <p:spPr>
-          <a:xfrm>
-            <a:off x="4480560" y="4846320"/>
-            <a:ext cx="7315200" cy="1554480"/>
-          </a:xfrm>
-          <a:prstGeom prst="rect">
-            <a:avLst/>
-          </a:prstGeom>
-          <a:noFill/>
-        </p:spPr>
-        <p:txBody>
-          <a:bodyPr wrap="square">
-            <a:spAutoFit/>
-          </a:bodyPr>
-          <a:lstStyle/>
-          <a:p>
-            <a:pPr>
-              <a:spcAft>
-                <a:spcPts val="1000"/>
-              </a:spcAft>
-            </a:pPr>
-            <a:r>
-              <a:rPr sz="1400" b="1">
-                <a:solidFill>
-                  <a:srgbClr val="0B0B0B"/>
-                </a:solidFill>
-                <a:latin typeface="Segoe UI"/>
-              </a:rPr>
-              <a:t>15 days </a:t>
-            </a:r>
-            <a:r>
-              <a:rPr sz="1400">
-                <a:solidFill>
-                  <a:srgbClr val="52514E"/>
-                </a:solidFill>
-                <a:latin typeface="Segoe UI"/>
-              </a:rPr>
-              <a:t>median harvest → fire window (2025)</a:t>
-            </a:r>
-          </a:p>
-          <a:p>
-            <a:pPr>
-              <a:spcAft>
-                <a:spcPts val="1000"/>
-              </a:spcAft>
-            </a:pPr>
-            <a:r>
-              <a:rPr sz="1400" b="1">
-                <a:solidFill>
-                  <a:srgbClr val="0B0B0B"/>
-                </a:solidFill>
-                <a:latin typeface="Segoe UI"/>
-              </a:rPr>
-              <a:t>30% vs 12% </a:t>
-            </a:r>
-            <a:r>
-              <a:rPr sz="1400">
-                <a:solidFill>
-                  <a:srgbClr val="52514E"/>
-                </a:solidFill>
-                <a:latin typeface="Segoe UI"/>
-              </a:rPr>
-              <a:t>burn again if burned last year vs not</a:t>
-            </a:r>
-          </a:p>
-          <a:p>
-            <a:pPr>
-              <a:spcAft>
-                <a:spcPts val="1000"/>
-              </a:spcAft>
-            </a:pPr>
-            <a:r>
-              <a:rPr sz="1400" b="1">
-                <a:solidFill>
-                  <a:srgbClr val="0B0B0B"/>
-                </a:solidFill>
-                <a:latin typeface="Segoe UI"/>
-              </a:rPr>
-              <a:t>4.6% of fields </a:t>
-            </a:r>
-            <a:r>
-              <a:rPr sz="1400">
-                <a:solidFill>
-                  <a:srgbClr val="52514E"/>
-                </a:solidFill>
-                <a:latin typeface="Segoe UI"/>
-              </a:rPr>
-              <a:t>burned in 2+ seasons and did 34% of all burning (2023–25)</a:t>
-            </a:r>
-          </a:p>
-        </p:txBody>
-      </p:sp>
-    </p:spTree>
-  </p:cSld>
-  <p:clrMapOvr>
-    <a:masterClrMapping/>
-  </p:clrMapOvr>
-</p:sld>
-</file>
-
-<file path=ppt/slides/slide8.xml><?xml version="1.0" encoding="utf-8"?>
-<p:sld xmlns:a="http://schemas.openxmlformats.org/drawingml/2006/main" xmlns:p="http://schemas.openxmlformats.org/presentationml/2006/main" xmlns:r="http://schemas.openxmlformats.org/officeDocument/2006/relationships">
-  <p:cSld>
-    <p:bg>
-      <p:bgPr>
-        <a:solidFill>
-          <a:srgbClr val="FCFCFB"/>
-        </a:solidFill>
-        <a:effectLst/>
-      </p:bgPr>
-    </p:bg>
-    <p:spTree>
-      <p:nvGrpSpPr>
-        <p:cNvPr id="1" name=""/>
-        <p:cNvGrpSpPr/>
-        <p:nvPr/>
-      </p:nvGrpSpPr>
-      <p:grpSpPr/>
-      <p:sp>
-        <p:nvSpPr>
-          <p:cNvPr id="2" name="TextBox 1"/>
-          <p:cNvSpPr txBox="1"/>
-          <p:nvPr/>
-        </p:nvSpPr>
-        <p:spPr>
-          <a:xfrm>
-            <a:off x="548640" y="292608"/>
-            <a:ext cx="10972800" cy="365760"/>
-          </a:xfrm>
-          <a:prstGeom prst="rect">
-            <a:avLst/>
-          </a:prstGeom>
-          <a:noFill/>
-        </p:spPr>
-        <p:txBody>
-          <a:bodyPr wrap="square">
-            <a:spAutoFit/>
-          </a:bodyPr>
-          <a:lstStyle/>
-          <a:p>
-            <a:pPr algn="l">
-              <a:spcAft>
-                <a:spcPts val="600"/>
-              </a:spcAft>
-            </a:pPr>
-            <a:r>
-              <a:rPr sz="1100" b="1">
-                <a:solidFill>
-                  <a:srgbClr val="2F6B4F"/>
-                </a:solidFill>
-                <a:latin typeface="Segoe UI"/>
-              </a:rPr>
-              <a:t>FINDING 4 · SAME 100 BALERS, SMARTER ORDER</a:t>
-            </a:r>
-          </a:p>
-        </p:txBody>
-      </p:sp>
-      <p:sp>
-        <p:nvSpPr>
-          <p:cNvPr id="3" name="TextBox 2"/>
-          <p:cNvSpPr txBox="1"/>
-          <p:nvPr/>
-        </p:nvSpPr>
-        <p:spPr>
-          <a:xfrm>
-            <a:off x="548640" y="566928"/>
-            <a:ext cx="11155680" cy="914400"/>
-          </a:xfrm>
-          <a:prstGeom prst="rect">
-            <a:avLst/>
-          </a:prstGeom>
-          <a:noFill/>
-        </p:spPr>
-        <p:txBody>
-          <a:bodyPr wrap="square">
-            <a:spAutoFit/>
-          </a:bodyPr>
-          <a:lstStyle/>
-          <a:p>
-            <a:pPr algn="l">
-              <a:spcAft>
-                <a:spcPts val="600"/>
-              </a:spcAft>
-            </a:pPr>
-            <a:r>
-              <a:rPr sz="2800" b="1">
-                <a:solidFill>
-                  <a:srgbClr val="0B0B0B"/>
-                </a:solidFill>
-                <a:latin typeface="Segoe UI"/>
-              </a:rPr>
-              <a:t>Risk-ranked dispatch pre-empts 2.6× more burns</a:t>
-            </a:r>
-          </a:p>
-        </p:txBody>
-      </p:sp>
-      <p:sp>
-        <p:nvSpPr>
-          <p:cNvPr id="4" name="TextBox 3"/>
-          <p:cNvSpPr txBox="1"/>
-          <p:nvPr/>
-        </p:nvSpPr>
-        <p:spPr>
-          <a:xfrm>
-            <a:off x="548640" y="6400800"/>
-            <a:ext cx="10424160" cy="365760"/>
-          </a:xfrm>
-          <a:prstGeom prst="rect">
-            <a:avLst/>
-          </a:prstGeom>
-          <a:noFill/>
-        </p:spPr>
-        <p:txBody>
-          <a:bodyPr wrap="square">
-            <a:spAutoFit/>
-          </a:bodyPr>
-          <a:lstStyle/>
-          <a:p>
-            <a:pPr algn="l">
-              <a:spcAft>
-                <a:spcPts val="600"/>
-              </a:spcAft>
-            </a:pPr>
-            <a:r>
-              <a:rPr sz="900" b="0">
-                <a:solidFill>
-                  <a:srgbClr val="898781"/>
-                </a:solidFill>
-                <a:latin typeface="Segoe UI"/>
-              </a:rPr>
-              <a:t>Season-replay digital twin on real 2025 events; 4 ha/baler/day; ERA5 rain days skipped; assumes baling prevents burning. Emissions: Andreae (2019), IPCC AR6 GWP100.</a:t>
-            </a:r>
-          </a:p>
-        </p:txBody>
-      </p:sp>
-      <p:sp>
-        <p:nvSpPr>
-          <p:cNvPr id="5" name="TextBox 4"/>
-          <p:cNvSpPr txBox="1"/>
-          <p:nvPr/>
-        </p:nvSpPr>
-        <p:spPr>
-          <a:xfrm>
-            <a:off x="11155680" y="6400800"/>
-            <a:ext cx="640080" cy="365760"/>
-          </a:xfrm>
-          <a:prstGeom prst="rect">
-            <a:avLst/>
-          </a:prstGeom>
-          <a:noFill/>
-        </p:spPr>
-        <p:txBody>
-          <a:bodyPr wrap="square">
-            <a:spAutoFit/>
-          </a:bodyPr>
-          <a:lstStyle/>
-          <a:p>
-            <a:pPr algn="r">
-              <a:spcAft>
-                <a:spcPts val="600"/>
-              </a:spcAft>
-            </a:pPr>
-            <a:r>
-              <a:rPr sz="900" b="0">
-                <a:solidFill>
-                  <a:srgbClr val="898781"/>
-                </a:solidFill>
-                <a:latin typeface="Segoe UI"/>
-              </a:rPr>
-              <a:t>8</a:t>
-            </a:r>
-          </a:p>
-        </p:txBody>
-      </p:sp>
-      <p:pic>
-        <p:nvPicPr>
-          <p:cNvPr id="6" name="Picture 5" descr="f6_replay.png"/>
-          <p:cNvPicPr>
-            <a:picLocks noChangeAspect="1"/>
-          </p:cNvPicPr>
-          <p:nvPr/>
-        </p:nvPicPr>
-        <p:blipFill>
-          <a:blip r:embed="rId3"/>
-          <a:stretch>
-            <a:fillRect/>
-          </a:stretch>
-        </p:blipFill>
-        <p:spPr>
-          <a:xfrm>
-            <a:off x="548640" y="1417320"/>
-            <a:ext cx="6766560" cy="3947160"/>
-          </a:xfrm>
-          <a:prstGeom prst="rect">
-            <a:avLst/>
-          </a:prstGeom>
-        </p:spPr>
-      </p:pic>
-      <p:sp>
-        <p:nvSpPr>
-          <p:cNvPr id="7" name="TextBox 6"/>
-          <p:cNvSpPr txBox="1"/>
-          <p:nvPr/>
-        </p:nvSpPr>
-        <p:spPr>
-          <a:xfrm>
-            <a:off x="7589520" y="1554480"/>
-            <a:ext cx="4206240" cy="4572000"/>
-          </a:xfrm>
-          <a:prstGeom prst="rect">
-            <a:avLst/>
-          </a:prstGeom>
-          <a:noFill/>
-        </p:spPr>
-        <p:txBody>
-          <a:bodyPr wrap="square">
-            <a:spAutoFit/>
-          </a:bodyPr>
-          <a:lstStyle/>
-          <a:p>
-            <a:pPr>
-              <a:spcAft>
-                <a:spcPts val="1000"/>
-              </a:spcAft>
-            </a:pPr>
-            <a:r>
-              <a:rPr sz="1400" b="1">
-                <a:solidFill>
-                  <a:srgbClr val="0B0B0B"/>
-                </a:solidFill>
-                <a:latin typeface="Segoe UI"/>
-              </a:rPr>
-              <a:t>11.4% vs 4.3% </a:t>
-            </a:r>
-            <a:r>
-              <a:rPr sz="1400">
-                <a:solidFill>
-                  <a:srgbClr val="52514E"/>
-                </a:solidFill>
-                <a:latin typeface="Segoe UI"/>
-              </a:rPr>
-              <a:t>burns pre-empted, 100 balers</a:t>
-            </a:r>
-          </a:p>
-          <a:p>
-            <a:pPr>
-              <a:spcAft>
-                <a:spcPts val="1000"/>
-              </a:spcAft>
-            </a:pPr>
-            <a:r>
-              <a:rPr sz="1400" b="1">
-                <a:solidFill>
-                  <a:srgbClr val="0B0B0B"/>
-                </a:solidFill>
-                <a:latin typeface="Segoe UI"/>
-              </a:rPr>
-              <a:t>1,859 t CO₂e </a:t>
-            </a:r>
-            <a:r>
-              <a:rPr sz="1400">
-                <a:solidFill>
-                  <a:srgbClr val="52514E"/>
-                </a:solidFill>
-                <a:latin typeface="Segoe UI"/>
-              </a:rPr>
-              <a:t>CH₄+N₂O avoided (90%: 328–4,849)</a:t>
-            </a:r>
-          </a:p>
-          <a:p>
-            <a:pPr>
-              <a:spcAft>
-                <a:spcPts val="1000"/>
-              </a:spcAft>
-            </a:pPr>
-            <a:r>
-              <a:rPr sz="1400" b="1">
-                <a:solidFill>
-                  <a:srgbClr val="0B0B0B"/>
-                </a:solidFill>
-                <a:latin typeface="Segoe UI"/>
-              </a:rPr>
-              <a:t>85 t PM2.5 </a:t>
-            </a:r>
-            <a:r>
-              <a:rPr sz="1400">
-                <a:solidFill>
-                  <a:srgbClr val="52514E"/>
-                </a:solidFill>
-                <a:latin typeface="Segoe UI"/>
-              </a:rPr>
-              <a:t>and 4.4 t black carbon avoided</a:t>
-            </a:r>
-          </a:p>
-          <a:p>
-            <a:pPr>
-              <a:spcAft>
-                <a:spcPts val="1000"/>
-              </a:spcAft>
-            </a:pPr>
-            <a:r>
-              <a:rPr sz="1400" b="1">
-                <a:solidFill>
-                  <a:srgbClr val="0B0B0B"/>
-                </a:solidFill>
-                <a:latin typeface="Segoe UI"/>
-              </a:rPr>
-              <a:t>₹11.73 crore </a:t>
-            </a:r>
-            <a:r>
-              <a:rPr sz="1400">
-                <a:solidFill>
-                  <a:srgbClr val="52514E"/>
-                </a:solidFill>
-                <a:latin typeface="Segoe UI"/>
-              </a:rPr>
-              <a:t>of straw baled by the fleet at ₹169/quintal</a:t>
-            </a:r>
-          </a:p>
-          <a:p>
-            <a:pPr>
-              <a:spcAft>
-                <a:spcPts val="1000"/>
-              </a:spcAft>
-            </a:pPr>
-            <a:r>
-              <a:rPr sz="1400" b="1">
-                <a:solidFill>
-                  <a:srgbClr val="0B0B0B"/>
-                </a:solidFill>
-                <a:latin typeface="Segoe UI"/>
-              </a:rPr>
-              <a:t>Top decile = 2.7× lift </a:t>
-            </a:r>
-            <a:r>
-              <a:rPr sz="1400">
-                <a:solidFill>
-                  <a:srgbClr val="52514E"/>
-                </a:solidFill>
-                <a:latin typeface="Segoe UI"/>
-              </a:rPr>
-              <a:t>on the unseen 2025 season (pre-season model)</a:t>
+              <a:rPr sz="1200">
+                <a:solidFill>
+                  <a:srgbClr val="1B2821"/>
+                </a:solidFill>
+              </a:rPr>
+              <a:t>Risk is normalized score, not probability</a:t>
             </a:r>
           </a:p>
         </p:txBody>
@@ -9194,7 +7209,7 @@
     <p:bg>
       <p:bgPr>
         <a:solidFill>
-          <a:srgbClr val="FCFCFB"/>
+          <a:srgbClr val="F8F9F5"/>
         </a:solidFill>
         <a:effectLst/>
       </p:bgPr>
@@ -9214,8 +7229,8 @@
         </p:nvSpPr>
         <p:spPr>
           <a:xfrm>
-            <a:off x="548640" y="292608"/>
-            <a:ext cx="10972800" cy="365760"/>
+            <a:off x="502920" y="256032"/>
+            <a:ext cx="10972800" cy="256032"/>
           </a:xfrm>
           <a:prstGeom prst="rect">
             <a:avLst/>
@@ -9230,17 +7245,17 @@
           <a:p>
             <a:pPr algn="l">
               <a:spcAft>
-                <a:spcPts val="600"/>
+                <a:spcPts val="500"/>
               </a:spcAft>
             </a:pPr>
             <a:r>
               <a:rPr sz="1100" b="1">
                 <a:solidFill>
-                  <a:srgbClr val="2F6B4F"/>
-                </a:solidFill>
-                <a:latin typeface="Segoe UI"/>
-              </a:rPr>
-              <a:t>LIVE NOWCAST</a:t>
+                  <a:srgbClr val="1F6543"/>
+                </a:solidFill>
+                <a:latin typeface="Aptos"/>
+              </a:rPr>
+              <a:t>ACTION</a:t>
             </a:r>
           </a:p>
         </p:txBody>
@@ -9253,8 +7268,8 @@
         </p:nvSpPr>
         <p:spPr>
           <a:xfrm>
-            <a:off x="548640" y="566928"/>
-            <a:ext cx="11155680" cy="914400"/>
+            <a:off x="502920" y="566928"/>
+            <a:ext cx="11064240" cy="685800"/>
           </a:xfrm>
           <a:prstGeom prst="rect">
             <a:avLst/>
@@ -9269,17 +7284,17 @@
           <a:p>
             <a:pPr algn="l">
               <a:spcAft>
-                <a:spcPts val="600"/>
+                <a:spcPts val="500"/>
               </a:spcAft>
             </a:pPr>
             <a:r>
-              <a:rPr sz="2800" b="1">
-                <a:solidFill>
-                  <a:srgbClr val="0B0B0B"/>
-                </a:solidFill>
-                <a:latin typeface="Segoe UI"/>
-              </a:rPr>
-              <a:t>Live: Muktsar 2026, as of this week's satellite pass</a:t>
+              <a:rPr sz="2700" b="1">
+                <a:solidFill>
+                  <a:srgbClr val="1B2821"/>
+                </a:solidFill>
+                <a:latin typeface="Aptos"/>
+              </a:rPr>
+              <a:t>Pilot the evidence-to-pickup loop</a:t>
             </a:r>
           </a:p>
         </p:txBody>
@@ -9292,8 +7307,8 @@
         </p:nvSpPr>
         <p:spPr>
           <a:xfrm>
-            <a:off x="548640" y="6400800"/>
-            <a:ext cx="10424160" cy="365760"/>
+            <a:off x="502920" y="6419088"/>
+            <a:ext cx="10698480" cy="256032"/>
           </a:xfrm>
           <a:prstGeom prst="rect">
             <a:avLst/>
@@ -9308,17 +7323,17 @@
           <a:p>
             <a:pPr algn="l">
               <a:spcAft>
-                <a:spcPts val="600"/>
+                <a:spcPts val="500"/>
               </a:spcAft>
             </a:pPr>
             <a:r>
-              <a:rPr sz="900" b="0">
-                <a:solidFill>
-                  <a:srgbClr val="898781"/>
-                </a:solidFill>
-                <a:latin typeface="Segoe UI"/>
-              </a:rPr>
-              <a:t>Latest Sentinel-2 image 2026-10-03. Forecast = typical (2023–2025) harvest pace; baleable straw 3.3 t/ha.</a:t>
+              <a:rPr sz="800" b="0">
+                <a:solidFill>
+                  <a:srgbClr val="5B695F"/>
+                </a:solidFill>
+                <a:latin typeface="Aptos"/>
+              </a:rPr>
+              <a:t>Project sources: docs/RESEARCH_METHODS.md; docs/PITCH_AND_DEMO_GUIDE.md; synthetic prototype workflow.</a:t>
             </a:r>
           </a:p>
         </p:txBody>
@@ -9331,8 +7346,8 @@
         </p:nvSpPr>
         <p:spPr>
           <a:xfrm>
-            <a:off x="11155680" y="6400800"/>
-            <a:ext cx="640080" cy="365760"/>
+            <a:off x="11109960" y="6419088"/>
+            <a:ext cx="548640" cy="256032"/>
           </a:xfrm>
           <a:prstGeom prst="rect">
             <a:avLst/>
@@ -9347,558 +7362,31 @@
           <a:p>
             <a:pPr algn="r">
               <a:spcAft>
-                <a:spcPts val="600"/>
+                <a:spcPts val="500"/>
               </a:spcAft>
             </a:pPr>
             <a:r>
-              <a:rPr sz="900" b="0">
-                <a:solidFill>
-                  <a:srgbClr val="898781"/>
-                </a:solidFill>
-                <a:latin typeface="Segoe UI"/>
+              <a:rPr sz="800" b="0">
+                <a:solidFill>
+                  <a:srgbClr val="5B695F"/>
+                </a:solidFill>
+                <a:latin typeface="Aptos"/>
               </a:rPr>
               <a:t>9</a:t>
             </a:r>
           </a:p>
         </p:txBody>
       </p:sp>
-      <p:pic>
-        <p:nvPicPr>
-          <p:cNvPr id="6" name="Picture 5" descr="f7_nowcast_2026.png"/>
-          <p:cNvPicPr>
-            <a:picLocks noChangeAspect="1"/>
-          </p:cNvPicPr>
-          <p:nvPr/>
-        </p:nvPicPr>
-        <p:blipFill>
-          <a:blip r:embed="rId3"/>
-          <a:stretch>
-            <a:fillRect/>
-          </a:stretch>
-        </p:blipFill>
-        <p:spPr>
-          <a:xfrm>
-            <a:off x="548640" y="1417320"/>
-            <a:ext cx="6583680" cy="3657600"/>
-          </a:xfrm>
-          <a:prstGeom prst="rect">
-            <a:avLst/>
-          </a:prstGeom>
-        </p:spPr>
-      </p:pic>
-      <p:graphicFrame>
-        <p:nvGraphicFramePr>
-          <p:cNvPr id="7" name="Table 6"/>
-          <p:cNvGraphicFramePr>
-            <a:graphicFrameLocks noGrp="1"/>
-          </p:cNvGraphicFramePr>
-          <p:nvPr/>
-        </p:nvGraphicFramePr>
-        <p:xfrm>
-          <a:off x="7406640" y="1508760"/>
-          <a:ext cx="4389120" cy="2304288"/>
-        </p:xfrm>
-        <a:graphic>
-          <a:graphicData uri="http://schemas.openxmlformats.org/drawingml/2006/table">
-            <a:tbl>
-              <a:tblPr firstRow="1" bandRow="1">
-                <a:tableStyleId>{5C22544A-7EE6-4342-B048-85BDC9FD1C3A}</a:tableStyleId>
-              </a:tblPr>
-              <a:tblGrid>
-                <a:gridCol w="1463040"/>
-                <a:gridCol w="1463040"/>
-                <a:gridCol w="1463040"/>
-              </a:tblGrid>
-              <a:tr h="329184">
-                <a:tc>
-                  <a:txBody>
-                    <a:bodyPr/>
-                    <a:lstStyle/>
-                    <a:p>
-                      <a:r>
-                        <a:rPr sz="1100" b="1">
-                          <a:solidFill>
-                            <a:srgbClr val="FFFFFF"/>
-                          </a:solidFill>
-                          <a:latin typeface="Segoe UI"/>
-                        </a:rPr>
-                        <a:t>Week of</a:t>
-                      </a:r>
-                    </a:p>
-                  </a:txBody>
-                  <a:tcPr>
-                    <a:solidFill>
-                      <a:srgbClr val="1D3D2B"/>
-                    </a:solidFill>
-                  </a:tcPr>
-                </a:tc>
-                <a:tc>
-                  <a:txBody>
-                    <a:bodyPr/>
-                    <a:lstStyle/>
-                    <a:p>
-                      <a:r>
-                        <a:rPr sz="1100" b="1">
-                          <a:solidFill>
-                            <a:srgbClr val="FFFFFF"/>
-                          </a:solidFill>
-                          <a:latin typeface="Segoe UI"/>
-                        </a:rPr>
-                        <a:t>Expected harvest</a:t>
-                      </a:r>
-                    </a:p>
-                  </a:txBody>
-                  <a:tcPr>
-                    <a:solidFill>
-                      <a:srgbClr val="1D3D2B"/>
-                    </a:solidFill>
-                  </a:tcPr>
-                </a:tc>
-                <a:tc>
-                  <a:txBody>
-                    <a:bodyPr/>
-                    <a:lstStyle/>
-                    <a:p>
-                      <a:r>
-                        <a:rPr sz="1100" b="1">
-                          <a:solidFill>
-                            <a:srgbClr val="FFFFFF"/>
-                          </a:solidFill>
-                          <a:latin typeface="Segoe UI"/>
-                        </a:rPr>
-                        <a:t>Baleable straw</a:t>
-                      </a:r>
-                    </a:p>
-                  </a:txBody>
-                  <a:tcPr>
-                    <a:solidFill>
-                      <a:srgbClr val="1D3D2B"/>
-                    </a:solidFill>
-                  </a:tcPr>
-                </a:tc>
-              </a:tr>
-              <a:tr h="329184">
-                <a:tc>
-                  <a:txBody>
-                    <a:bodyPr/>
-                    <a:lstStyle/>
-                    <a:p>
-                      <a:r>
-                        <a:rPr sz="1100" b="0">
-                          <a:solidFill>
-                            <a:srgbClr val="0B0B0B"/>
-                          </a:solidFill>
-                          <a:latin typeface="Segoe UI"/>
-                        </a:rPr>
-                        <a:t>10-03</a:t>
-                      </a:r>
-                    </a:p>
-                  </a:txBody>
-                  <a:tcPr>
-                    <a:solidFill>
-                      <a:srgbClr val="FFFFFF"/>
-                    </a:solidFill>
-                  </a:tcPr>
-                </a:tc>
-                <a:tc>
-                  <a:txBody>
-                    <a:bodyPr/>
-                    <a:lstStyle/>
-                    <a:p>
-                      <a:r>
-                        <a:rPr sz="1100" b="0">
-                          <a:solidFill>
-                            <a:srgbClr val="0B0B0B"/>
-                          </a:solidFill>
-                          <a:latin typeface="Segoe UI"/>
-                        </a:rPr>
-                        <a:t>4,284 ha</a:t>
-                      </a:r>
-                    </a:p>
-                  </a:txBody>
-                  <a:tcPr>
-                    <a:solidFill>
-                      <a:srgbClr val="FFFFFF"/>
-                    </a:solidFill>
-                  </a:tcPr>
-                </a:tc>
-                <a:tc>
-                  <a:txBody>
-                    <a:bodyPr/>
-                    <a:lstStyle/>
-                    <a:p>
-                      <a:r>
-                        <a:rPr sz="1100" b="0">
-                          <a:solidFill>
-                            <a:srgbClr val="0B0B0B"/>
-                          </a:solidFill>
-                          <a:latin typeface="Segoe UI"/>
-                        </a:rPr>
-                        <a:t>14,136 t</a:t>
-                      </a:r>
-                    </a:p>
-                  </a:txBody>
-                  <a:tcPr>
-                    <a:solidFill>
-                      <a:srgbClr val="FFFFFF"/>
-                    </a:solidFill>
-                  </a:tcPr>
-                </a:tc>
-              </a:tr>
-              <a:tr h="329184">
-                <a:tc>
-                  <a:txBody>
-                    <a:bodyPr/>
-                    <a:lstStyle/>
-                    <a:p>
-                      <a:r>
-                        <a:rPr sz="1100" b="0">
-                          <a:solidFill>
-                            <a:srgbClr val="0B0B0B"/>
-                          </a:solidFill>
-                          <a:latin typeface="Segoe UI"/>
-                        </a:rPr>
-                        <a:t>10-10</a:t>
-                      </a:r>
-                    </a:p>
-                  </a:txBody>
-                  <a:tcPr>
-                    <a:solidFill>
-                      <a:srgbClr val="F0F4EF"/>
-                    </a:solidFill>
-                  </a:tcPr>
-                </a:tc>
-                <a:tc>
-                  <a:txBody>
-                    <a:bodyPr/>
-                    <a:lstStyle/>
-                    <a:p>
-                      <a:r>
-                        <a:rPr sz="1100" b="0">
-                          <a:solidFill>
-                            <a:srgbClr val="0B0B0B"/>
-                          </a:solidFill>
-                          <a:latin typeface="Segoe UI"/>
-                        </a:rPr>
-                        <a:t>17,605 ha</a:t>
-                      </a:r>
-                    </a:p>
-                  </a:txBody>
-                  <a:tcPr>
-                    <a:solidFill>
-                      <a:srgbClr val="F0F4EF"/>
-                    </a:solidFill>
-                  </a:tcPr>
-                </a:tc>
-                <a:tc>
-                  <a:txBody>
-                    <a:bodyPr/>
-                    <a:lstStyle/>
-                    <a:p>
-                      <a:r>
-                        <a:rPr sz="1100" b="0">
-                          <a:solidFill>
-                            <a:srgbClr val="0B0B0B"/>
-                          </a:solidFill>
-                          <a:latin typeface="Segoe UI"/>
-                        </a:rPr>
-                        <a:t>58,095 t</a:t>
-                      </a:r>
-                    </a:p>
-                  </a:txBody>
-                  <a:tcPr>
-                    <a:solidFill>
-                      <a:srgbClr val="F0F4EF"/>
-                    </a:solidFill>
-                  </a:tcPr>
-                </a:tc>
-              </a:tr>
-              <a:tr h="329184">
-                <a:tc>
-                  <a:txBody>
-                    <a:bodyPr/>
-                    <a:lstStyle/>
-                    <a:p>
-                      <a:r>
-                        <a:rPr sz="1100" b="0">
-                          <a:solidFill>
-                            <a:srgbClr val="0B0B0B"/>
-                          </a:solidFill>
-                          <a:latin typeface="Segoe UI"/>
-                        </a:rPr>
-                        <a:t>10-17</a:t>
-                      </a:r>
-                    </a:p>
-                  </a:txBody>
-                  <a:tcPr>
-                    <a:solidFill>
-                      <a:srgbClr val="FFFFFF"/>
-                    </a:solidFill>
-                  </a:tcPr>
-                </a:tc>
-                <a:tc>
-                  <a:txBody>
-                    <a:bodyPr/>
-                    <a:lstStyle/>
-                    <a:p>
-                      <a:r>
-                        <a:rPr sz="1100" b="0">
-                          <a:solidFill>
-                            <a:srgbClr val="0B0B0B"/>
-                          </a:solidFill>
-                          <a:latin typeface="Segoe UI"/>
-                        </a:rPr>
-                        <a:t>36,572 ha</a:t>
-                      </a:r>
-                    </a:p>
-                  </a:txBody>
-                  <a:tcPr>
-                    <a:solidFill>
-                      <a:srgbClr val="FFFFFF"/>
-                    </a:solidFill>
-                  </a:tcPr>
-                </a:tc>
-                <a:tc>
-                  <a:txBody>
-                    <a:bodyPr/>
-                    <a:lstStyle/>
-                    <a:p>
-                      <a:r>
-                        <a:rPr sz="1100" b="0">
-                          <a:solidFill>
-                            <a:srgbClr val="0B0B0B"/>
-                          </a:solidFill>
-                          <a:latin typeface="Segoe UI"/>
-                        </a:rPr>
-                        <a:t>120,687 t</a:t>
-                      </a:r>
-                    </a:p>
-                  </a:txBody>
-                  <a:tcPr>
-                    <a:solidFill>
-                      <a:srgbClr val="FFFFFF"/>
-                    </a:solidFill>
-                  </a:tcPr>
-                </a:tc>
-              </a:tr>
-              <a:tr h="329184">
-                <a:tc>
-                  <a:txBody>
-                    <a:bodyPr/>
-                    <a:lstStyle/>
-                    <a:p>
-                      <a:r>
-                        <a:rPr sz="1100" b="0">
-                          <a:solidFill>
-                            <a:srgbClr val="0B0B0B"/>
-                          </a:solidFill>
-                          <a:latin typeface="Segoe UI"/>
-                        </a:rPr>
-                        <a:t>10-24</a:t>
-                      </a:r>
-                    </a:p>
-                  </a:txBody>
-                  <a:tcPr>
-                    <a:solidFill>
-                      <a:srgbClr val="F0F4EF"/>
-                    </a:solidFill>
-                  </a:tcPr>
-                </a:tc>
-                <a:tc>
-                  <a:txBody>
-                    <a:bodyPr/>
-                    <a:lstStyle/>
-                    <a:p>
-                      <a:r>
-                        <a:rPr sz="1100" b="0">
-                          <a:solidFill>
-                            <a:srgbClr val="0B0B0B"/>
-                          </a:solidFill>
-                          <a:latin typeface="Segoe UI"/>
-                        </a:rPr>
-                        <a:t>50,835 ha</a:t>
-                      </a:r>
-                    </a:p>
-                  </a:txBody>
-                  <a:tcPr>
-                    <a:solidFill>
-                      <a:srgbClr val="F0F4EF"/>
-                    </a:solidFill>
-                  </a:tcPr>
-                </a:tc>
-                <a:tc>
-                  <a:txBody>
-                    <a:bodyPr/>
-                    <a:lstStyle/>
-                    <a:p>
-                      <a:r>
-                        <a:rPr sz="1100" b="0">
-                          <a:solidFill>
-                            <a:srgbClr val="0B0B0B"/>
-                          </a:solidFill>
-                          <a:latin typeface="Segoe UI"/>
-                        </a:rPr>
-                        <a:t>167,755 t</a:t>
-                      </a:r>
-                    </a:p>
-                  </a:txBody>
-                  <a:tcPr>
-                    <a:solidFill>
-                      <a:srgbClr val="F0F4EF"/>
-                    </a:solidFill>
-                  </a:tcPr>
-                </a:tc>
-              </a:tr>
-              <a:tr h="329184">
-                <a:tc>
-                  <a:txBody>
-                    <a:bodyPr/>
-                    <a:lstStyle/>
-                    <a:p>
-                      <a:r>
-                        <a:rPr sz="1100" b="0">
-                          <a:solidFill>
-                            <a:srgbClr val="0B0B0B"/>
-                          </a:solidFill>
-                          <a:latin typeface="Segoe UI"/>
-                        </a:rPr>
-                        <a:t>10-31</a:t>
-                      </a:r>
-                    </a:p>
-                  </a:txBody>
-                  <a:tcPr>
-                    <a:solidFill>
-                      <a:srgbClr val="FFFFFF"/>
-                    </a:solidFill>
-                  </a:tcPr>
-                </a:tc>
-                <a:tc>
-                  <a:txBody>
-                    <a:bodyPr/>
-                    <a:lstStyle/>
-                    <a:p>
-                      <a:r>
-                        <a:rPr sz="1100" b="0">
-                          <a:solidFill>
-                            <a:srgbClr val="0B0B0B"/>
-                          </a:solidFill>
-                          <a:latin typeface="Segoe UI"/>
-                        </a:rPr>
-                        <a:t>27,075 ha</a:t>
-                      </a:r>
-                    </a:p>
-                  </a:txBody>
-                  <a:tcPr>
-                    <a:solidFill>
-                      <a:srgbClr val="FFFFFF"/>
-                    </a:solidFill>
-                  </a:tcPr>
-                </a:tc>
-                <a:tc>
-                  <a:txBody>
-                    <a:bodyPr/>
-                    <a:lstStyle/>
-                    <a:p>
-                      <a:r>
-                        <a:rPr sz="1100" b="0">
-                          <a:solidFill>
-                            <a:srgbClr val="0B0B0B"/>
-                          </a:solidFill>
-                          <a:latin typeface="Segoe UI"/>
-                        </a:rPr>
-                        <a:t>89,349 t</a:t>
-                      </a:r>
-                    </a:p>
-                  </a:txBody>
-                  <a:tcPr>
-                    <a:solidFill>
-                      <a:srgbClr val="FFFFFF"/>
-                    </a:solidFill>
-                  </a:tcPr>
-                </a:tc>
-              </a:tr>
-              <a:tr h="329184">
-                <a:tc>
-                  <a:txBody>
-                    <a:bodyPr/>
-                    <a:lstStyle/>
-                    <a:p>
-                      <a:r>
-                        <a:rPr sz="1100" b="0">
-                          <a:solidFill>
-                            <a:srgbClr val="0B0B0B"/>
-                          </a:solidFill>
-                          <a:latin typeface="Segoe UI"/>
-                        </a:rPr>
-                        <a:t>11-07</a:t>
-                      </a:r>
-                    </a:p>
-                  </a:txBody>
-                  <a:tcPr>
-                    <a:solidFill>
-                      <a:srgbClr val="F0F4EF"/>
-                    </a:solidFill>
-                  </a:tcPr>
-                </a:tc>
-                <a:tc>
-                  <a:txBody>
-                    <a:bodyPr/>
-                    <a:lstStyle/>
-                    <a:p>
-                      <a:r>
-                        <a:rPr sz="1100" b="0">
-                          <a:solidFill>
-                            <a:srgbClr val="0B0B0B"/>
-                          </a:solidFill>
-                          <a:latin typeface="Segoe UI"/>
-                        </a:rPr>
-                        <a:t>12,534 ha</a:t>
-                      </a:r>
-                    </a:p>
-                  </a:txBody>
-                  <a:tcPr>
-                    <a:solidFill>
-                      <a:srgbClr val="F0F4EF"/>
-                    </a:solidFill>
-                  </a:tcPr>
-                </a:tc>
-                <a:tc>
-                  <a:txBody>
-                    <a:bodyPr/>
-                    <a:lstStyle/>
-                    <a:p>
-                      <a:r>
-                        <a:rPr sz="1100" b="0">
-                          <a:solidFill>
-                            <a:srgbClr val="0B0B0B"/>
-                          </a:solidFill>
-                          <a:latin typeface="Segoe UI"/>
-                        </a:rPr>
-                        <a:t>41,363 t</a:t>
-                      </a:r>
-                    </a:p>
-                  </a:txBody>
-                  <a:tcPr>
-                    <a:solidFill>
-                      <a:srgbClr val="F0F4EF"/>
-                    </a:solidFill>
-                  </a:tcPr>
-                </a:tc>
-              </a:tr>
-            </a:tbl>
-          </a:graphicData>
-        </a:graphic>
-      </p:graphicFrame>
-      <p:sp>
-        <p:nvSpPr>
-          <p:cNvPr id="8" name="TextBox 7"/>
+      <p:sp>
+        <p:nvSpPr>
+          <p:cNvPr id="6" name="TextBox 5"/>
           <p:cNvSpPr txBox="1"/>
           <p:nvPr/>
         </p:nvSpPr>
         <p:spPr>
           <a:xfrm>
-            <a:off x="7406640" y="4206240"/>
-            <a:ext cx="4389120" cy="1645920"/>
+            <a:off x="731520" y="1737360"/>
+            <a:ext cx="10607040" cy="1051560"/>
           </a:xfrm>
           <a:prstGeom prst="rect">
             <a:avLst/>
@@ -9913,33 +7401,221 @@
           <a:p>
             <a:pPr algn="l">
               <a:spcAft>
-                <a:spcPts val="600"/>
+                <a:spcPts val="500"/>
               </a:spcAft>
             </a:pPr>
             <a:r>
-              <a:rPr sz="1300" b="0">
-                <a:solidFill>
-                  <a:srgbClr val="52514E"/>
-                </a:solidFill>
-                <a:latin typeface="Segoe UI"/>
-              </a:rPr>
-              <a:t>Pre-booking list: top decile = 15,864 fields, 18,399 ha</a:t>
-            </a:r>
-          </a:p>
-          <a:p>
-            <a:pPr algn="l">
-              <a:spcAft>
-                <a:spcPts val="600"/>
-              </a:spcAft>
+              <a:rPr sz="2700" b="1">
+                <a:solidFill>
+                  <a:srgbClr val="1B2821"/>
+                </a:solidFill>
+                <a:latin typeface="Aptos"/>
+              </a:rPr>
+              <a:t>Real satellite evidence → clear limits → a prototype path from straw to value.</a:t>
+            </a:r>
+          </a:p>
+        </p:txBody>
+      </p:sp>
+      <p:sp>
+        <p:nvSpPr>
+          <p:cNvPr id="7" name="Rounded Rectangle 6"/>
+          <p:cNvSpPr/>
+          <p:nvPr/>
+        </p:nvSpPr>
+        <p:spPr>
+          <a:xfrm>
+            <a:off x="822960" y="3977639"/>
+            <a:ext cx="3246120" cy="1417320"/>
+          </a:xfrm>
+          <a:prstGeom prst="roundRect">
+            <a:avLst/>
+          </a:prstGeom>
+          <a:solidFill>
+            <a:srgbClr val="FFFFFF"/>
+          </a:solidFill>
+          <a:ln>
+            <a:solidFill>
+              <a:srgbClr val="E6EFE6"/>
+            </a:solidFill>
+          </a:ln>
+        </p:spPr>
+        <p:style>
+          <a:lnRef idx="1">
+            <a:schemeClr val="accent1"/>
+          </a:lnRef>
+          <a:fillRef idx="3">
+            <a:schemeClr val="accent1"/>
+          </a:fillRef>
+          <a:effectRef idx="2">
+            <a:schemeClr val="accent1"/>
+          </a:effectRef>
+          <a:fontRef idx="minor">
+            <a:schemeClr val="lt1"/>
+          </a:fontRef>
+        </p:style>
+        <p:txBody>
+          <a:bodyPr rtlCol="0" anchor="ctr" wrap="square" lIns="146304" rIns="128016" tIns="109728"/>
+          <a:lstStyle/>
+          <a:p>
+            <a:pPr algn="ctr"/>
+            <a:r>
+              <a:rPr sz="1500" b="1">
+                <a:solidFill>
+                  <a:srgbClr val="1F6543"/>
+                </a:solidFill>
+              </a:rPr>
+              <a:t>1 · Inspect</a:t>
+            </a:r>
+          </a:p>
+          <a:p>
+            <a:pPr>
+              <a:spcBef>
+                <a:spcPts val="800"/>
+              </a:spcBef>
             </a:pPr>
             <a:r>
-              <a:rPr sz="1300" b="0">
-                <a:solidFill>
-                  <a:srgbClr val="52514E"/>
-                </a:solidFill>
-                <a:latin typeface="Segoe UI"/>
-              </a:rPr>
-              <a:t>District straw ≈ 11.5 lakh t (published estimate: 12.1 lakh t)</a:t>
+              <a:rPr sz="1200">
+                <a:solidFill>
+                  <a:srgbClr val="1B2821"/>
+                </a:solidFill>
+              </a:rPr>
+              <a:t>Muktsar real map and one field history</a:t>
+            </a:r>
+          </a:p>
+        </p:txBody>
+      </p:sp>
+      <p:sp>
+        <p:nvSpPr>
+          <p:cNvPr id="8" name="Rounded Rectangle 7"/>
+          <p:cNvSpPr/>
+          <p:nvPr/>
+        </p:nvSpPr>
+        <p:spPr>
+          <a:xfrm>
+            <a:off x="4480560" y="3977639"/>
+            <a:ext cx="3246120" cy="1417320"/>
+          </a:xfrm>
+          <a:prstGeom prst="roundRect">
+            <a:avLst/>
+          </a:prstGeom>
+          <a:solidFill>
+            <a:srgbClr val="FFFFFF"/>
+          </a:solidFill>
+          <a:ln>
+            <a:solidFill>
+              <a:srgbClr val="E6EFE6"/>
+            </a:solidFill>
+          </a:ln>
+        </p:spPr>
+        <p:style>
+          <a:lnRef idx="1">
+            <a:schemeClr val="accent1"/>
+          </a:lnRef>
+          <a:fillRef idx="3">
+            <a:schemeClr val="accent1"/>
+          </a:fillRef>
+          <a:effectRef idx="2">
+            <a:schemeClr val="accent1"/>
+          </a:effectRef>
+          <a:fontRef idx="minor">
+            <a:schemeClr val="lt1"/>
+          </a:fontRef>
+        </p:style>
+        <p:txBody>
+          <a:bodyPr rtlCol="0" anchor="ctr" wrap="square" lIns="146304" rIns="128016" tIns="109728"/>
+          <a:lstStyle/>
+          <a:p>
+            <a:pPr algn="ctr"/>
+            <a:r>
+              <a:rPr sz="1500" b="1">
+                <a:solidFill>
+                  <a:srgbClr val="1F6543"/>
+                </a:solidFill>
+              </a:rPr>
+              <a:t>2 · Demonstrate</a:t>
+            </a:r>
+          </a:p>
+          <a:p>
+            <a:pPr>
+              <a:spcBef>
+                <a:spcPts val="800"/>
+              </a:spcBef>
+            </a:pPr>
+            <a:r>
+              <a:rPr sz="1200">
+                <a:solidFill>
+                  <a:srgbClr val="1B2821"/>
+                </a:solidFill>
+              </a:rPr>
+              <a:t>Synthetic dispatch and buyer workflow</a:t>
+            </a:r>
+          </a:p>
+        </p:txBody>
+      </p:sp>
+      <p:sp>
+        <p:nvSpPr>
+          <p:cNvPr id="9" name="Rounded Rectangle 8"/>
+          <p:cNvSpPr/>
+          <p:nvPr/>
+        </p:nvSpPr>
+        <p:spPr>
+          <a:xfrm>
+            <a:off x="8138160" y="3977639"/>
+            <a:ext cx="3246120" cy="1417320"/>
+          </a:xfrm>
+          <a:prstGeom prst="roundRect">
+            <a:avLst/>
+          </a:prstGeom>
+          <a:solidFill>
+            <a:srgbClr val="FFFFFF"/>
+          </a:solidFill>
+          <a:ln>
+            <a:solidFill>
+              <a:srgbClr val="E6EFE6"/>
+            </a:solidFill>
+          </a:ln>
+        </p:spPr>
+        <p:style>
+          <a:lnRef idx="1">
+            <a:schemeClr val="accent1"/>
+          </a:lnRef>
+          <a:fillRef idx="3">
+            <a:schemeClr val="accent1"/>
+          </a:fillRef>
+          <a:effectRef idx="2">
+            <a:schemeClr val="accent1"/>
+          </a:effectRef>
+          <a:fontRef idx="minor">
+            <a:schemeClr val="lt1"/>
+          </a:fontRef>
+        </p:style>
+        <p:txBody>
+          <a:bodyPr rtlCol="0" anchor="ctr" wrap="square" lIns="146304" rIns="128016" tIns="109728"/>
+          <a:lstStyle/>
+          <a:p>
+            <a:pPr algn="ctr"/>
+            <a:r>
+              <a:rPr sz="1500" b="1">
+                <a:solidFill>
+                  <a:srgbClr val="1F6543"/>
+                </a:solidFill>
+              </a:rPr>
+              <a:t>3 · Pilot</a:t>
+            </a:r>
+          </a:p>
+          <a:p>
+            <a:pPr>
+              <a:spcBef>
+                <a:spcPts val="800"/>
+              </a:spcBef>
+            </a:pPr>
+            <a:r>
+              <a:rPr sz="1200">
+                <a:solidFill>
+                  <a:srgbClr val="1B2821"/>
+                </a:solidFill>
+              </a:rPr>
+              <a:t>Independent labels and local partners</a:t>
             </a:r>
           </a:p>
         </p:txBody>
